--- a/rapport/oral/presentation_soutenance.pptx
+++ b/rapport/oral/presentation_soutenance.pptx
@@ -4,6 +4,9 @@
   <p:sldMasterIdLst>
     <p:sldMasterId id="2147483648" r:id="rId1"/>
   </p:sldMasterIdLst>
+  <p:notesMasterIdLst>
+    <p:notesMasterId r:id="rId26"/>
+  </p:notesMasterIdLst>
   <p:sldIdLst>
     <p:sldId id="256" r:id="rId2"/>
     <p:sldId id="257" r:id="rId3"/>
@@ -30,11 +33,8 @@
     <p:sldId id="278" r:id="rId24"/>
     <p:sldId id="279" r:id="rId25"/>
   </p:sldIdLst>
-  <p:notesMasterIdLst>
-    <p:notesMasterId r:id="rId26"/>
-  </p:notesMasterIdLst>
-  <p:sldSz cx="12191695" cy="6858000"/>
-  <p:notesSz cx="6858000" cy="12191695"/>
+  <p:sldSz cx="12192000" cy="6858000"/>
+  <p:notesSz cx="6858000" cy="12192000"/>
   <p:defaultTextStyle>
     <a:lvl1pPr marL="0" algn="l" defTabSz="914400" rtl="0" eaLnBrk="1" latinLnBrk="0" hangingPunct="1">
       <a:defRPr sz="1800" kern="1200">
@@ -127,6 +127,11 @@
       </a:defRPr>
     </a:lvl9pPr>
   </p:defaultTextStyle>
+  <p:extLst>
+    <p:ext uri="{EFAFB233-063F-42B5-8137-9DF3F51BA10A}">
+      <p15:sldGuideLst xmlns:p15="http://schemas.microsoft.com/office/powerpoint/2012/main"/>
+    </p:ext>
+  </p:extLst>
 </p:presentation>
 </file>
 
@@ -152,234 +157,10 @@
           <a:chExt cx="0" cy="0"/>
         </a:xfrm>
       </p:grpSpPr>
-      <p:sp>
-        <p:nvSpPr>
-          <p:cNvPr id="2" name="Header Placeholder 1"/>
-          <p:cNvSpPr>
-            <a:spLocks noGrp="1"/>
-          </p:cNvSpPr>
-          <p:nvPr>
-            <p:ph type="hdr" sz="quarter"/>
-          </p:nvPr>
-        </p:nvSpPr>
-        <p:spPr>
-          <a:xfrm>
-            <a:off x="0" y="0"/>
-            <a:ext cx="2971800" cy="458788"/>
-          </a:xfrm>
-          <a:prstGeom prst="rect">
-            <a:avLst/>
-          </a:prstGeom>
-        </p:spPr>
-        <p:txBody>
-          <a:bodyPr vert="horz" lIns="91440" tIns="45720" rIns="91440" bIns="45720" rtlCol="0"/>
-          <a:lstStyle>
-            <a:lvl1pPr algn="l">
-              <a:defRPr sz="1200"/>
-            </a:lvl1pPr>
-          </a:lstStyle>
-          <a:p>
-            <a:endParaRPr lang="en-US"/>
-          </a:p>
-        </p:txBody>
-      </p:sp>
-      <p:sp>
-        <p:nvSpPr>
-          <p:cNvPr id="3" name="Date Placeholder 2"/>
-          <p:cNvSpPr>
-            <a:spLocks noGrp="1"/>
-          </p:cNvSpPr>
-          <p:nvPr>
-            <p:ph type="dt" idx="1"/>
-          </p:nvPr>
-        </p:nvSpPr>
-        <p:spPr>
-          <a:xfrm>
-            <a:off x="3884613" y="0"/>
-            <a:ext cx="2971800" cy="458788"/>
-          </a:xfrm>
-          <a:prstGeom prst="rect">
-            <a:avLst/>
-          </a:prstGeom>
-        </p:spPr>
-        <p:txBody>
-          <a:bodyPr vert="horz" lIns="91440" tIns="45720" rIns="91440" bIns="45720" rtlCol="0"/>
-          <a:lstStyle>
-            <a:lvl1pPr algn="r">
-              <a:defRPr sz="1200"/>
-            </a:lvl1pPr>
-          </a:lstStyle>
-          <a:p>
-            <a:fld id="{5282F153-3F37-0F45-9E97-73ACFA13230C}" type="datetimeFigureOut">
-              <a:rPr lang="en-US"/>
-              <a:t>7/23/19</a:t>
-            </a:fld>
-            <a:endParaRPr lang="en-US"/>
-          </a:p>
-        </p:txBody>
-      </p:sp>
-      <p:sp>
-        <p:nvSpPr>
-          <p:cNvPr id="4" name="Slide Image Placeholder 3"/>
-          <p:cNvSpPr>
-            <a:spLocks noGrp="1" noRot="1" noChangeAspect="1"/>
-          </p:cNvSpPr>
-          <p:nvPr>
-            <p:ph type="sldImg" idx="2"/>
-          </p:nvPr>
-        </p:nvSpPr>
-        <p:spPr>
-          <a:xfrm>
-            <a:off x="685800" y="1143000"/>
-            <a:ext cx="5486400" cy="3086100"/>
-          </a:xfrm>
-          <a:prstGeom prst="rect">
-            <a:avLst/>
-          </a:prstGeom>
-          <a:noFill/>
-          <a:ln w="12700">
-            <a:solidFill>
-              <a:prstClr val="black"/>
-            </a:solidFill>
-          </a:ln>
-        </p:spPr>
-        <p:txBody>
-          <a:bodyPr vert="horz" lIns="91440" tIns="45720" rIns="91440" bIns="45720" rtlCol="0" anchor="ctr"/>
-          <a:lstStyle/>
-          <a:p>
-            <a:endParaRPr lang="en-US"/>
-          </a:p>
-        </p:txBody>
-      </p:sp>
-      <p:sp>
-        <p:nvSpPr>
-          <p:cNvPr id="5" name="Notes Placeholder 4"/>
-          <p:cNvSpPr>
-            <a:spLocks noGrp="1"/>
-          </p:cNvSpPr>
-          <p:nvPr>
-            <p:ph type="body" sz="quarter" idx="3"/>
-          </p:nvPr>
-        </p:nvSpPr>
-        <p:spPr>
-          <a:xfrm>
-            <a:off x="685800" y="4400550"/>
-            <a:ext cx="5486400" cy="3600450"/>
-          </a:xfrm>
-          <a:prstGeom prst="rect">
-            <a:avLst/>
-          </a:prstGeom>
-        </p:spPr>
-        <p:txBody>
-          <a:bodyPr vert="horz" lIns="91440" tIns="45720" rIns="91440" bIns="45720" rtlCol="0"/>
-          <a:lstStyle/>
-          <a:p>
-            <a:pPr lvl="0"/>
-            <a:r>
-              <a:rPr lang="en-US"/>
-              <a:t>Click to edit Master text styles</a:t>
-            </a:r>
-          </a:p>
-          <a:p>
-            <a:pPr lvl="1"/>
-            <a:r>
-              <a:rPr lang="en-US"/>
-              <a:t>Second level</a:t>
-            </a:r>
-          </a:p>
-          <a:p>
-            <a:pPr lvl="2"/>
-            <a:r>
-              <a:rPr lang="en-US"/>
-              <a:t>Third level</a:t>
-            </a:r>
-          </a:p>
-          <a:p>
-            <a:pPr lvl="3"/>
-            <a:r>
-              <a:rPr lang="en-US"/>
-              <a:t>Fourth level</a:t>
-            </a:r>
-          </a:p>
-          <a:p>
-            <a:pPr lvl="4"/>
-            <a:r>
-              <a:rPr lang="en-US"/>
-              <a:t>Fifth level</a:t>
-            </a:r>
-          </a:p>
-        </p:txBody>
-      </p:sp>
-      <p:sp>
-        <p:nvSpPr>
-          <p:cNvPr id="6" name="Footer Placeholder 5"/>
-          <p:cNvSpPr>
-            <a:spLocks noGrp="1"/>
-          </p:cNvSpPr>
-          <p:nvPr>
-            <p:ph type="ftr" sz="quarter" idx="4"/>
-          </p:nvPr>
-        </p:nvSpPr>
-        <p:spPr>
-          <a:xfrm>
-            <a:off x="0" y="8685213"/>
-            <a:ext cx="2971800" cy="458787"/>
-          </a:xfrm>
-          <a:prstGeom prst="rect">
-            <a:avLst/>
-          </a:prstGeom>
-        </p:spPr>
-        <p:txBody>
-          <a:bodyPr vert="horz" lIns="91440" tIns="45720" rIns="91440" bIns="45720" rtlCol="0" anchor="b"/>
-          <a:lstStyle>
-            <a:lvl1pPr algn="l">
-              <a:defRPr sz="1200"/>
-            </a:lvl1pPr>
-          </a:lstStyle>
-          <a:p>
-            <a:endParaRPr lang="en-US"/>
-          </a:p>
-        </p:txBody>
-      </p:sp>
-      <p:sp>
-        <p:nvSpPr>
-          <p:cNvPr id="7" name="Slide Number Placeholder 6"/>
-          <p:cNvSpPr>
-            <a:spLocks noGrp="1"/>
-          </p:cNvSpPr>
-          <p:nvPr>
-            <p:ph type="sldNum" sz="quarter" idx="5"/>
-          </p:nvPr>
-        </p:nvSpPr>
-        <p:spPr>
-          <a:xfrm>
-            <a:off x="3884613" y="8685213"/>
-            <a:ext cx="2971800" cy="458787"/>
-          </a:xfrm>
-          <a:prstGeom prst="rect">
-            <a:avLst/>
-          </a:prstGeom>
-        </p:spPr>
-        <p:txBody>
-          <a:bodyPr vert="horz" lIns="91440" tIns="45720" rIns="91440" bIns="45720" rtlCol="0" anchor="b"/>
-          <a:lstStyle>
-            <a:lvl1pPr algn="r">
-              <a:defRPr sz="1200"/>
-            </a:lvl1pPr>
-          </a:lstStyle>
-          <a:p>
-            <a:fld id="{CE5E9CC1-C706-0F49-92D6-E571CC5EEA8F}" type="slidenum">
-              <a:rPr lang="en-US"/>
-              <a:t>‹#›</a:t>
-            </a:fld>
-            <a:endParaRPr lang="en-US"/>
-          </a:p>
-        </p:txBody>
-      </p:sp>
     </p:spTree>
     <p:extLst>
       <p:ext uri="{BB962C8B-B14F-4D97-AF65-F5344CB8AC3E}">
-        <p14:creationId xmlns:p14="http://schemas.microsoft.com/office/powerpoint/2010/main" val="1024086991"/>
+        <p14:creationId xmlns:p14="http://schemas.microsoft.com/office/powerpoint/2010/main" val="397428627"/>
       </p:ext>
     </p:extLst>
   </p:cSld>
@@ -527,7 +308,6 @@
               <a:rPr lang="en-US" dirty="0"/>
               <a:t>Bonjour, je m’appelle Aurélien Arnaud. Je vais vous présenter Vindhellfest, la refonte complète du site web d’un festival de musique rock et métal en Charente. C’est le projet que j’ai mené en autonomie sur l’année, de novembre 2025 à juillet 2026, dans le cadre du titre Concepteur Développeur d’Applications.</a:t>
             </a:r>
-            <a:endParaRPr lang="en-US" dirty="0"/>
           </a:p>
         </p:txBody>
       </p:sp>
@@ -615,7 +395,6 @@
               <a:rPr lang="en-US" dirty="0"/>
               <a:t>La base a été modélisée selon la méthode Merise, du conceptuel au physique. Le MCD compte cinq entités : Utilisateur, Session, News, Artiste et Concert. Au passage au logique, chaque attribut reçoit un type PostgreSQL choisi — des UUID pour tous les identifiants, du CITEXT pour les emails et noms afin d’avoir une comparaison insensible à la casse, du VARCHAR borné, du TEXT pour les contenus longs, et du TIMESTAMPTZ pour les dates. Surtout, j’ai poussé les règles métier directement dans la base : des contraintes CHECK sur la cohérence des dates, des contraintes EXCLUDE qui empêchent deux concerts de se chevaucher, et un trigger qui limite à deux le nombre d’artistes mis en avant. J’y reviendrai en détail dans la partie code.</a:t>
             </a:r>
-            <a:endParaRPr lang="en-US" dirty="0"/>
           </a:p>
         </p:txBody>
       </p:sp>
@@ -703,7 +482,6 @@
               <a:rPr lang="en-US" dirty="0"/>
               <a:t>L’application repose sur une architecture trois tiers orchestrée par Docker Compose : un frontend Next.js, une API REST Express, et une base PostgreSQL, chacune dans son propre conteneur et communiquant via un réseau Docker interne. Le frontend est exposé sur le port 3000, le backend sur le 4000. L’API est sans état : chaque requête d’administration est authentifiée par un cookie JWT httpOnly vérifié en base. Un point d’architecture que j’ai dû résoudre : le frontend appelle l’API par deux chemins différents selon qu’il s’exécute côté serveur, dans le conteneur, ou côté navigateur. Enfin, un healthcheck garantit que le backend ne tente de se connecter à la base qu’une fois celle-ci prête.</a:t>
             </a:r>
-            <a:endParaRPr lang="en-US" dirty="0"/>
           </a:p>
         </p:txBody>
       </p:sp>
@@ -791,7 +569,6 @@
               <a:rPr lang="en-US" dirty="0"/>
               <a:t>Chaque choix technique répond à un besoin précis. Next.js pour le SEO — un festival grand public doit être indexé et affiché immédiatement, ce qu’un rendu entièrement client ne permet pas. Express plutôt que NestJS pour garder le contrôle sur mon architecture en couches, avec TypeScript en mode strict sur les deux applications. PostgreSQL pour sa robustesse mais surtout pour des fonctionnalités qu’une base NoSQL n’offre pas nativement : citext pour les emails insensibles à la casse, et btree_gist pour les contraintes anti-chevauchement des concerts. Pour l’authentification, des JWT stockés dans des cookies httpOnly plutôt que dans le localStorage exposé au XSS, avec des sessions persistées en base pour pouvoir les révoquer. Et Docker Compose pour garantir un environnement reproductible entre le développement et l’intégration continue.</a:t>
             </a:r>
-            <a:endParaRPr lang="en-US" dirty="0"/>
           </a:p>
         </p:txBody>
       </p:sp>
@@ -879,7 +656,6 @@
               <a:rPr lang="en-US" dirty="0"/>
               <a:t>Le backend suit une architecture en couches : routes, middlewares, contrôleurs, services optionnels, puis base de données. Le principe clé, c’est que chaque couche ne connaît que la suivante — cette isolation se traduit par un fichier dédié à chaque responsabilité, plutôt que des classes qui font tout. À noter, je n’ai pas suivi un MVC monolithique classique où le serveur rend directement la vue : ici le front et le back sont deux applications distinctes qui communiquent par HTTP. C’est la vue React qui va chercher ses données auprès de l’API de façon asynchrone, plutôt que de recevoir un rendu poussé par le serveur. Le schéma montre le trajet complet d’une requête à travers ces couches.</a:t>
             </a:r>
-            <a:endParaRPr lang="en-US" dirty="0"/>
           </a:p>
         </p:txBody>
       </p:sp>
@@ -967,7 +743,6 @@
               <a:rPr lang="en-US" dirty="0"/>
               <a:t>Passons à la démonstration. Je commence par le site public. La page d’accueil est servie en rendu incrémental toutes les 60 s ; elle agrège le bandeau d’ouverture, un teaser des artistes mis en avant, les actualités récentes et les partenaires. Sur la Programmation, la liste est filtrable par jour et triée par heure de passage. Je clique un artiste pour sa fiche détaillée — photo, créneau, bio, liens YouTube/Spotify. Je passe aux Actualités puis aux Infos pratiques ; à tout moment, "Nous contacter" ouvre le formulaire en modale. Je montre le responsive sur une page. — Je passe ensuite au back-office. Je me connecte : session ouverte en base et cookie JWT httpOnly, et chaque page admin vérifie la session avant de s’afficher. Le dashboard affiche la carte profil, un compte à rebours et des raccourcis filtrés selon le rôle. Je crée un artiste avec upload d’image — c’est le cas d’essai du dossier : 201 en nominal, 400 si l’image manque. Je le modifie depuis sa page de détail. Je publie une actualité (statut brouillon/publié). Enfin la gestion des utilisateurs, réservée au rôle admin : mot de passe temporaire envoyé par email, changement imposé à la première connexion. Je me déconnecte, ce qui révoque la session.</a:t>
             </a:r>
-            <a:endParaRPr lang="en-US" dirty="0"/>
           </a:p>
         </p:txBody>
       </p:sp>
@@ -1055,7 +830,6 @@
               <a:rPr lang="en-US" dirty="0"/>
               <a:t>Je bascule dans l’éditeur. 1) 05_concert_schema.sql : je montre l’extension btree_gist et les deux contraintes EXCLUDE USING gist sur la table concerts — deux concerts ne peuvent pas se chevaucher sur une même scène, ni un artiste jouer sur deux scènes en même temps. Plutôt qu’une vérification en JavaScript, faillible en accès concurrent, la base garantit la règle de façon atomique ; l’intervalle tstzrange en [) autorise un concert à commencer pile à l’heure où le précédent finit. 2) 04_artist_schema.sql : le trigger check_featured_limit compte les artistes déjà en avant en s’excluant lui-même et lève une exception au-delà de deux. 3) create_artist.controller.ts : dans le catch de ma transaction, j’intercepte cette exception et la traduis en AppError 409 ; ce même catch fait le ROLLBACK et supprime l’image déjà écrite. La base impose la règle, l’application la traduit en HTTP.</a:t>
             </a:r>
-            <a:endParaRPr lang="en-US" dirty="0"/>
           </a:p>
         </p:txBody>
       </p:sp>
@@ -1143,7 +917,6 @@
               <a:rPr lang="en-US" dirty="0"/>
               <a:t>Je bascule dans apiRequest.ts, le cœur de ma couche d’accès aux données. Je montre d’abord le type de retour : une union discriminée — soit des données et pas d’erreur, soit une ApiRequestError typée et pas de données. TypeScript force donc chaque appelant à traiter le cas d’erreur. Ensuite le fetch avec credentials: include, qui envoie le cookie httpOnly sans que je manipule le token en JavaScript. Puis, si la réponse n’est pas ok, je lève une ApiRequestError qui étend Error avec un champ status. Enfin le catch distingue trois cas : l’erreur API attendue que je remonte, une erreur technique comme le backend injoignable normalisée en 500, et un cas limite non-Error. Résultat : mes composants n’ont jamais de try/catch, ils testent juste if (result.error). Si j’ai le temps, je montre useFetch.ts et son useReducer qui consomme cette couche.</a:t>
             </a:r>
-            <a:endParaRPr lang="en-US" dirty="0"/>
           </a:p>
         </p:txBody>
       </p:sp>
@@ -1231,7 +1004,6 @@
               <a:rPr lang="en-US" dirty="0"/>
               <a:t>La sécurité a été une préoccupation constante. Pour l’authentification, à la connexion je génère un JWT signé avec un secret stocké en variable d’environnement ; son payload ne contient que l’identifiant utilisateur et l’identifiant de session, jamais de donnée sensible. Ce token est déposé dans un cookie httpOnly — donc inaccessible en JavaScript, ce qui le protège du vol par XSS — complété par les attributs Secure et SameSite. Point important : un JWT seul ne peut pas être invalidé avant son expiration. J’ai donc associé chaque token à une session en base, ce qui permet une révocation explicite — à la déconnexion, ou en cascade quand un compte est supprimé. Enfin, le contrôle d’accès par rôle s’applique côté serveur, avec un middleware requireRole sur chaque route sensible : un appel direct à l’API avec un rôle insuffisant reçoit un 403. La protection côté frontend ne sert qu’à ne pas afficher de liens inutiles — elle n’empêche rien.</a:t>
             </a:r>
-            <a:endParaRPr lang="en-US" dirty="0"/>
           </a:p>
         </p:txBody>
       </p:sp>
@@ -1319,7 +1091,6 @@
               <a:rPr lang="en-US" dirty="0"/>
               <a:t>Au-delà de l’authentification, j’ai appliqué une défense en profondeur. Le verrou réel des entrées, c’est la validation Zod côté backend : chaque route qui reçoit un corps de requête le valide avant d’atteindre le contrôleur, et rejette en 400 — ça s’applique quel que soit l’appelant, pas seulement mon frontend. Contre l’injection SQL, toutes les requêtes passent par des requêtes paramétrées, sans aucune concaténation de chaîne, ce qui élimine le risque structurellement. J’ai mis un rate limiting sur les points les plus exposés au brute force — la connexion et le mot de passe oublié — limité à cinq tentatives par dix minutes et par IP. Pour les uploads, je filtre le type MIME, je limite la taille, je convertis en WebP et je renomme chaque fichier avec un UUID, ce qui empêche le path traversal. Les mots de passe sont hachés avec bcrypt, jamais stockés en clair. Un CORS restreint à une seule origine, et des secrets qui vivent exclusivement dans des fichiers d’environnement, avec une validation au démarrage : si une variable manque, le serveur refuse de démarrer.</a:t>
             </a:r>
-            <a:endParaRPr lang="en-US" dirty="0"/>
           </a:p>
         </p:txBody>
       </p:sp>
@@ -1407,7 +1178,6 @@
               <a:rPr lang="en-US" dirty="0"/>
               <a:t>Ma stratégie de test suit une pyramide classique. À la base, des tests unitaires qui vérifient middlewares et services en isolation, avec les dépendances mockées. Au-dessus, des tests d’intégration qui font traverser toute la chaîne Express — middlewares, contrôleur et vraie base PostgreSQL de test — via Supertest. J’ai fait le choix de ne pas faire d’end-to-end. Au total, 241 tests passent, 132 côté backend et 109 côté frontend, sans régression. Pour le jeu d’essai, j’ai retenu la fonctionnalité la plus représentative : la création d’un artiste avec upload d’image, parce qu’elle mobilise l’ensemble des couches — contrôle de rôle, upload multipart, validation Zod, conversion d’image et écriture transactionnelle sur deux tables. En cas nominal l’API répond 201 ; si l’image manque, elle renvoie un 400 avec un message explicite. Les deux résultats obtenus sont conformes.</a:t>
             </a:r>
-            <a:endParaRPr lang="en-US" dirty="0"/>
           </a:p>
         </p:txBody>
       </p:sp>
@@ -1495,7 +1265,6 @@
               <a:rPr lang="en-US" dirty="0"/>
               <a:t>Voici le déroulé. Je commencerai par le contexte et les besoins de l’association, puis ma gestion de projet et la phase de conception. J’enchaînerai sur l’architecture technique, avant une démonstration live de l’application — le cœur de la présentation. Je reviendrai ensuite sur des points de code, la sécurité, les tests et le déploiement, ma veille, et je terminerai par un bilan. Commençons par le contexte.</a:t>
             </a:r>
-            <a:endParaRPr lang="en-US" dirty="0"/>
           </a:p>
         </p:txBody>
       </p:sp>
@@ -1583,7 +1352,6 @@
               <a:rPr lang="en-US" dirty="0"/>
               <a:t>Côté déploiement, tout repose sur Docker Compose avec trois services, et des Dockerfiles multi-stages : passer en production consiste simplement à basculer la cible de dev vers runner, sans toucher au reste. L’intégration continue est assurée par GitHub Actions : à chaque push et chaque pull request, sur toutes les branches, deux jobs s’exécutent en parallèle sur des machines distinctes, qui lancent le lint et les tests. Le job backend démarre une vraie base PostgreSQL et attend sa disponibilité avant de tester ; le job frontend tourne sans base, ses tests reposant entièrement sur des appels réseau mockés. L’intérêt de Docker, c’est que l’environnement est strictement identique entre mon poste et la CI. Pour être transparent sur les limites : le déploiement en production n’est pas encore automatisé — j’ai documenté une procédure de déploiement continu par runner comme évolution.</a:t>
             </a:r>
-            <a:endParaRPr lang="en-US" dirty="0"/>
           </a:p>
         </p:txBody>
       </p:sp>
@@ -1671,7 +1439,6 @@
               <a:rPr lang="en-US" dirty="0"/>
               <a:t>J’ai organisé ma veille avec Feedly, en deux dossiers : un dossier sécurité, avec le CERT-FR et les rapports de vulnérabilités de Node, et un dossier technologique qui suit Next.js, Node, PostgreSQL, Docker et React. Pour montrer que cette veille est appliquée et pas seulement théorique, deux cas concrets. Premier cas : une fois l’application conteneurisée, le hot reload ne fonctionnait plus. Ma recherche m’a mené à une issue officielle sur le dépôt de Next.js, où plusieurs développeurs confirment que Turbopack ne respecte pas correctement le polling en environnement Docker — j’ai appliqué le contournement documenté, revenir à Webpack. Second cas : npm audit a signalé une faille modérée dans PostCSS, dépendance embarquée par Next.js. J’ai analysé le risque : PostCSS ne traite que mes propres fichiers CSS à la compilation, jamais du CSS soumis par un utilisateur — le scénario d’attaque ne s’applique pas. Comme le correctif automatique aurait forcé un retour à une version très ancienne de Next.js, j’ai décidé de ne pas l’appliquer et de surveiller une future version corrigée. Une veille, ce n’est pas juste détecter une alerte, c’est savoir en évaluer l’impact réel avant d’agir.</a:t>
             </a:r>
-            <a:endParaRPr lang="en-US" dirty="0"/>
           </a:p>
         </p:txBody>
       </p:sp>
@@ -1759,7 +1526,6 @@
               <a:rPr lang="en-US" dirty="0"/>
               <a:t>Pour conclure, un mot sur les trois difficultés techniques principales que j’ai rencontrées et résolues. La première : garantir qu’aucun concert ne se chevauche — je l’ai réglée au niveau de la base avec les contraintes EXCLUDE. La deuxième : une fois l’application conteneurisée, le hot reload ne fonctionnait plus ; j’ai identifié que Turbopack ne gérait pas le polling en Docker et je suis revenu à Webpack. La troisième, la plus subtile : dans une architecture Docker, le frontend n’adresse pas le backend de la même façon selon qu’il s’exécute dans le conteneur ou dans le navigateur ; je l’ai résolue avec deux variables d’environnement distinctes. Ces trois cas montrent ma démarche : identifier précisément le problème, chercher la cause, et appliquer une solution justifiée.</a:t>
             </a:r>
-            <a:endParaRPr lang="en-US" dirty="0"/>
           </a:p>
         </p:txBody>
       </p:sp>
@@ -1847,7 +1613,6 @@
               <a:rPr lang="en-US" dirty="0"/>
               <a:t>Ce projet m’a permis de mettre en œuvre l’ensemble des onze compétences du référentiel, réparties sur les trois activités-types — développer une application sécurisée, la concevoir en couches, et préparer son déploiement. Quant aux perspectives, plusieurs pistes sont ouvertes une fois le socle stabilisé : mettre le site en ligne avec un déploiement continu automatisé, externaliser le stockage des images vers un stockage objet, et réintégrer les fonctionnalités écartées du périmètre — la boutique de merchandising, les archives des éditions et les statistiques de fréquentation.</a:t>
             </a:r>
-            <a:endParaRPr lang="en-US" dirty="0"/>
           </a:p>
         </p:txBody>
       </p:sp>
@@ -1935,7 +1700,6 @@
               <a:rPr lang="en-US" dirty="0"/>
               <a:t>Voilà qui conclut ma présentation. Je vous remercie de votre attention et je suis prêt à répondre à vos questions.</a:t>
             </a:r>
-            <a:endParaRPr lang="en-US" dirty="0"/>
           </a:p>
         </p:txBody>
       </p:sp>
@@ -2023,7 +1787,6 @@
               <a:rPr lang="en-US" dirty="0"/>
               <a:t>Vindhellfest est un festival rock et métal en Charente, cinq éditions à son actif, qui prépare sa sixième pour mai 2027. Son site reposait sur WordPress, avec un design vieillissant et purement statique. Le vrai problème était opérationnel : la moindre mise à jour — ajouter un artiste, publier une actualité — nécessitait de passer par un développeur externe. Résultat, l’association ne communiquait qu’une à deux fois par an et dépendait d’un prestataire pour la maintenance courante. C’est ce qui a motivé une refonte complète.</a:t>
             </a:r>
-            <a:endParaRPr lang="en-US" dirty="0"/>
           </a:p>
         </p:txBody>
       </p:sp>
@@ -2111,7 +1874,6 @@
               <a:rPr lang="en-US" dirty="0"/>
               <a:t>J’ai fixé cinq objectifs. Moderniser l’image du festival, offrir une vitrine publique complète, et surtout donner à l’association une administration autonome pour gérer artistes, actualités et comptes sans développeur. À cela s’ajoutent une gestion différenciée des droits par rôle, et un socle de qualité — code testé, documenté, déployable. Je les ai priorisés en MoSCoW : côté Must-have, la vitrine publique, l’autonomie éditoriale, la maintenabilité, et un socle d’accessibilité validé sous WAVE avec zéro erreur et zéro erreur de contraste. En Should-have, deux éléments livrables ultérieurement : les archives des éditions passées, écartées faute de temps, et les statistiques de fréquentation, déjà couvertes par les données de vente HelloAsso. L’objectif d’autonomie change concrètement la donne : là où l’association publiait deux fois par an, elle peut désormais publier une actualité en quelques clics.</a:t>
             </a:r>
-            <a:endParaRPr lang="en-US" dirty="0"/>
           </a:p>
         </p:txBody>
       </p:sp>
@@ -2199,7 +1961,6 @@
               <a:rPr lang="en-US" dirty="0"/>
               <a:t>Le périmètre a été délimité avec l’association pour concentrer l’effort sur l’essentiel. Dans le périmètre : le site public, l’espace d’administration sécurisé avec les trois CRUD, l’upload d’images et les e-mails transactionnels. Hors périmètre : la billetterie, qui reste gérée par HelloAsso, la boutique de merchandising, et le multilingue — le site est en français uniquement. Côté acteurs, quatre profils : le visiteur public non authentifié, et trois rôles internes — admin avec l’accès complet et seul habilité à gérer les comptes, gestionnaire artistes, et gestionnaire actualités. Un point technique : le rôle est porté par un ENUM en base, donc un seul rôle par compte ; un membre qui cumule deux responsabilités reçoit le rôle admin.</a:t>
             </a:r>
-            <a:endParaRPr lang="en-US" dirty="0"/>
           </a:p>
         </p:txBody>
       </p:sp>
@@ -2287,7 +2048,6 @@
               <a:rPr lang="en-US" dirty="0"/>
               <a:t>Le projet a été mené entièrement en autonomie, sans structure d’entreprise. J’ai donc dû m’organiser comme une petite équipe, en prenant seul les décisions techniques et de gestion. Je l’ai découpé en quatre sous-projets interdépendants : l’infrastructure Docker et le pipeline CI/CD forment une enveloppe commune qui orchestre les trois autres — la base de données, le backend et le frontend. Chacun a sa propre documentation et ses propres tests, ce qui lui donne une autonomie de livraison. En définissant précisément le périmètre de chacun en amont, j’ai pu développer le backend et le frontend en parallèle. Le suivi se fait sur un backlog kanban Notion : chaque carte est une user story, avec sa priorité, sa complexité, ses critères d’acceptation et des notes techniques, comme sur l’exemple affiché.</a:t>
             </a:r>
-            <a:endParaRPr lang="en-US" dirty="0"/>
           </a:p>
         </p:txBody>
       </p:sp>
@@ -2375,7 +2135,6 @@
               <a:rPr lang="en-US" dirty="0"/>
               <a:t>Le rétroplanning découpe le projet en cinq phases, de la conception en novembre 2025 à la rédaction du dossier en juillet 2026. Point important, visible sur le Gantt : j’ai volontairement fait chevaucher les phases backend et frontend — le frontend démarre deux semaines après le backend, dès que l’API est assez stable pour être consommée, ce qui m’a fait gagner du temps. Deux jalons ferment le projet : la remise du dossier le 12 juillet et la soutenance fin juillet. Côté outillage : Git et GitHub pour le versioning, GitHub Actions pour l’intégration continue avec deux jobs indépendants qui lancent lint et tests à chaque push, Docker Compose pour les trois services, draw.io et pgAdmin pour la modélisation de la base, et Figma pour les maquettes.</a:t>
             </a:r>
-            <a:endParaRPr lang="en-US" dirty="0"/>
           </a:p>
         </p:txBody>
       </p:sp>
@@ -2463,7 +2222,6 @@
               <a:rPr lang="en-US" dirty="0"/>
               <a:t>Le projet compte deux types d’acteurs. Le visiteur, qui accède au site sans authentification, dispose de sept cas d’usage — toutes les pages publiques et le formulaire de contact. L’administrateur a quatre cas communs aux trois rôles — se connecter, consulter le dashboard, changer son mot de passe et se déconnecter — puis trois cas restreints selon le rôle : gérer les artistes pour admin et artists, gérer les actualités pour admin et news, et gérer les utilisateurs, réservé au seul admin. Sur les quatorze cas au total, j’en ai détaillé cinq dans le dossier — consulter la programmation, envoyer un message de contact, se connecter à l’administration — avec leur scénario nominal et leurs extensions d’erreur ; les autres sont documentés dans le backlog Notion.</a:t>
             </a:r>
-            <a:endParaRPr lang="en-US" dirty="0"/>
           </a:p>
         </p:txBody>
       </p:sp>
@@ -2551,7 +2309,6 @@
               <a:rPr lang="en-US" dirty="0"/>
               <a:t>Avant de coder, chaque écran est passé par un zoning puis un wireframe basse fidélité sous Figma. Cette étape m’a permis de valider l’organisation des pages indépendamment de la charte graphique. Au total, treize zonings et treize wireframes couvrent l’ensemble des écrans, côté public comme côté administration. Tout a été pensé responsive — desktop, tablette et mobile — avec deux thèmes visuels distincts : un thème sombre pour le site visiteur, un thème clair pour l’administration. L’ensemble est reproduit en annexe du dossier.</a:t>
             </a:r>
-            <a:endParaRPr lang="en-US" dirty="0"/>
           </a:p>
         </p:txBody>
       </p:sp>
@@ -2624,6 +2381,11 @@
 <file path=ppt/slideMasters/slideMaster1.xml><?xml version="1.0" encoding="utf-8"?>
 <p:sldMaster xmlns:a="http://schemas.openxmlformats.org/drawingml/2006/main" xmlns:r="http://schemas.openxmlformats.org/officeDocument/2006/relationships" xmlns:p="http://schemas.openxmlformats.org/presentationml/2006/main">
   <p:cSld>
+    <p:bg>
+      <p:bgRef idx="1001">
+        <a:schemeClr val="bg1"/>
+      </p:bgRef>
+    </p:bg>
     <p:spTree>
       <p:nvGrpSpPr>
         <p:cNvPr id="1" name=""/>
@@ -2906,6 +2668,7 @@
         <a:solidFill>
           <a:srgbClr val="1A1A24"/>
         </a:solidFill>
+        <a:effectLst/>
       </p:bgPr>
     </p:bg>
     <p:spTree>
@@ -2943,7 +2706,7 @@
           <a:bodyPr wrap="square" lIns="0" tIns="0" rIns="0" bIns="0" rtlCol="0" anchor="ctr"/>
           <a:lstStyle/>
           <a:p>
-            <a:pPr algn="l" indent="0" marL="0">
+            <a:pPr marL="0" indent="0" algn="l">
               <a:buNone/>
             </a:pPr>
             <a:r>
@@ -2982,11 +2745,11 @@
           <a:bodyPr wrap="square" lIns="0" tIns="0" rIns="0" bIns="0" rtlCol="0" anchor="ctr"/>
           <a:lstStyle/>
           <a:p>
-            <a:pPr algn="l" indent="0" marL="0">
-              <a:buNone/>
-            </a:pPr>
-            <a:r>
-              <a:rPr lang="en-US" sz="6000" b="1" spc="200" kern="0" dirty="0">
+            <a:pPr marL="0" indent="0" algn="l">
+              <a:buNone/>
+            </a:pPr>
+            <a:r>
+              <a:rPr lang="en-US" sz="6000" b="1" kern="0" spc="200" dirty="0">
                 <a:solidFill>
                   <a:srgbClr val="FFFFFF"/>
                 </a:solidFill>
@@ -3019,6 +2782,13 @@
           </a:solidFill>
           <a:ln/>
         </p:spPr>
+        <p:txBody>
+          <a:bodyPr/>
+          <a:lstStyle/>
+          <a:p>
+            <a:endParaRPr lang="fr-FR"/>
+          </a:p>
+        </p:txBody>
       </p:sp>
       <p:sp>
         <p:nvSpPr>
@@ -3041,7 +2811,7 @@
           <a:bodyPr wrap="square" lIns="0" tIns="0" rIns="0" bIns="0" rtlCol="0" anchor="ctr"/>
           <a:lstStyle/>
           <a:p>
-            <a:pPr algn="l" indent="0" marL="0">
+            <a:pPr marL="0" indent="0" algn="l">
               <a:buNone/>
             </a:pPr>
             <a:r>
@@ -3080,7 +2850,7 @@
           <a:bodyPr wrap="square" lIns="0" tIns="0" rIns="0" bIns="0" rtlCol="0" anchor="ctr"/>
           <a:lstStyle/>
           <a:p>
-            <a:pPr algn="l" indent="0" marL="0">
+            <a:pPr marL="0" indent="0" algn="l">
               <a:buNone/>
             </a:pPr>
             <a:r>
@@ -3119,7 +2889,7 @@
           <a:bodyPr wrap="square" lIns="0" tIns="0" rIns="0" bIns="0" rtlCol="0" anchor="ctr"/>
           <a:lstStyle/>
           <a:p>
-            <a:pPr algn="l" indent="0" marL="0">
+            <a:pPr marL="0" indent="0" algn="l">
               <a:buNone/>
             </a:pPr>
             <a:r>
@@ -3158,7 +2928,7 @@
           <a:bodyPr wrap="square" lIns="0" tIns="0" rIns="0" bIns="0" rtlCol="0" anchor="ctr"/>
           <a:lstStyle/>
           <a:p>
-            <a:pPr algn="r" indent="0" marL="0">
+            <a:pPr marL="0" indent="0" algn="r">
               <a:buNone/>
             </a:pPr>
             <a:r>
@@ -3192,6 +2962,7 @@
         <a:solidFill>
           <a:srgbClr val="1A1A24"/>
         </a:solidFill>
+        <a:effectLst/>
       </p:bgPr>
     </p:bg>
     <p:spTree>
@@ -3229,11 +3000,11 @@
           <a:bodyPr wrap="square" lIns="0" tIns="0" rIns="0" bIns="0" rtlCol="0" anchor="ctr"/>
           <a:lstStyle/>
           <a:p>
-            <a:pPr algn="l" indent="0" marL="0">
-              <a:buNone/>
-            </a:pPr>
-            <a:r>
-              <a:rPr lang="en-US" sz="3200" b="1" spc="100" kern="0" dirty="0">
+            <a:pPr marL="0" indent="0" algn="l">
+              <a:buNone/>
+            </a:pPr>
+            <a:r>
+              <a:rPr lang="en-US" sz="3200" b="1" kern="0" spc="100" dirty="0">
                 <a:solidFill>
                   <a:srgbClr val="FFFFFF"/>
                 </a:solidFill>
@@ -3266,6 +3037,13 @@
           </a:solidFill>
           <a:ln/>
         </p:spPr>
+        <p:txBody>
+          <a:bodyPr/>
+          <a:lstStyle/>
+          <a:p>
+            <a:endParaRPr lang="fr-FR"/>
+          </a:p>
+        </p:txBody>
       </p:sp>
       <p:sp>
         <p:nvSpPr>
@@ -3286,6 +3064,13 @@
           </a:solidFill>
           <a:ln/>
         </p:spPr>
+        <p:txBody>
+          <a:bodyPr/>
+          <a:lstStyle/>
+          <a:p>
+            <a:endParaRPr lang="fr-FR"/>
+          </a:p>
+        </p:txBody>
       </p:sp>
       <p:sp>
         <p:nvSpPr>
@@ -3308,7 +3093,7 @@
           <a:bodyPr wrap="square" lIns="0" tIns="0" rIns="0" bIns="0" rtlCol="0" anchor="t"/>
           <a:lstStyle/>
           <a:p>
-            <a:pPr algn="l" indent="0" marL="0">
+            <a:pPr marL="0" indent="0" algn="l">
               <a:buNone/>
             </a:pPr>
             <a:r>
@@ -3345,6 +3130,13 @@
           </a:solidFill>
           <a:ln/>
         </p:spPr>
+        <p:txBody>
+          <a:bodyPr/>
+          <a:lstStyle/>
+          <a:p>
+            <a:endParaRPr lang="fr-FR"/>
+          </a:p>
+        </p:txBody>
       </p:sp>
       <p:sp>
         <p:nvSpPr>
@@ -3367,7 +3159,7 @@
           <a:bodyPr wrap="square" lIns="0" tIns="0" rIns="0" bIns="0" rtlCol="0" anchor="t"/>
           <a:lstStyle/>
           <a:p>
-            <a:pPr algn="l" indent="0" marL="0">
+            <a:pPr marL="0" indent="0" algn="l">
               <a:buNone/>
             </a:pPr>
             <a:r>
@@ -3404,6 +3196,13 @@
           </a:solidFill>
           <a:ln/>
         </p:spPr>
+        <p:txBody>
+          <a:bodyPr/>
+          <a:lstStyle/>
+          <a:p>
+            <a:endParaRPr lang="fr-FR"/>
+          </a:p>
+        </p:txBody>
       </p:sp>
       <p:sp>
         <p:nvSpPr>
@@ -3426,7 +3225,7 @@
           <a:bodyPr wrap="square" lIns="0" tIns="0" rIns="0" bIns="0" rtlCol="0" anchor="t"/>
           <a:lstStyle/>
           <a:p>
-            <a:pPr algn="l" indent="0" marL="0">
+            <a:pPr marL="0" indent="0" algn="l">
               <a:buNone/>
             </a:pPr>
             <a:r>
@@ -3463,6 +3262,13 @@
           </a:solidFill>
           <a:ln/>
         </p:spPr>
+        <p:txBody>
+          <a:bodyPr/>
+          <a:lstStyle/>
+          <a:p>
+            <a:endParaRPr lang="fr-FR"/>
+          </a:p>
+        </p:txBody>
       </p:sp>
       <p:sp>
         <p:nvSpPr>
@@ -3485,7 +3291,7 @@
           <a:bodyPr wrap="square" lIns="0" tIns="0" rIns="0" bIns="0" rtlCol="0" anchor="t"/>
           <a:lstStyle/>
           <a:p>
-            <a:pPr algn="l" indent="0" marL="0">
+            <a:pPr marL="0" indent="0" algn="l">
               <a:buNone/>
             </a:pPr>
             <a:r>
@@ -3527,17 +3333,24 @@
             <a:prstDash val="solid"/>
           </a:ln>
         </p:spPr>
+        <p:txBody>
+          <a:bodyPr/>
+          <a:lstStyle/>
+          <a:p>
+            <a:endParaRPr lang="fr-FR"/>
+          </a:p>
+        </p:txBody>
       </p:sp>
       <p:pic>
         <p:nvPicPr>
-          <p:cNvPr id="13" name="Image 0" descr="mcd.png">    </p:cNvPr>
+          <p:cNvPr id="13" name="Image 0" descr="mcd.png"/>
           <p:cNvPicPr>
             <a:picLocks noChangeAspect="1"/>
           </p:cNvPicPr>
           <p:nvPr/>
         </p:nvPicPr>
         <p:blipFill>
-          <a:blip r:embed="rId1"/>
+          <a:blip r:embed="rId3"/>
           <a:stretch>
             <a:fillRect/>
           </a:stretch>
@@ -3573,7 +3386,7 @@
           <a:bodyPr wrap="square" lIns="0" tIns="0" rIns="0" bIns="0" rtlCol="0" anchor="ctr"/>
           <a:lstStyle/>
           <a:p>
-            <a:pPr algn="ctr" indent="0" marL="0">
+            <a:pPr marL="0" indent="0" algn="ctr">
               <a:buNone/>
             </a:pPr>
             <a:r>
@@ -3612,7 +3425,7 @@
           <a:bodyPr wrap="square" lIns="0" tIns="0" rIns="0" bIns="0" rtlCol="0" anchor="ctr"/>
           <a:lstStyle/>
           <a:p>
-            <a:pPr algn="l" indent="0" marL="0">
+            <a:pPr marL="0" indent="0" algn="l">
               <a:buNone/>
             </a:pPr>
             <a:r>
@@ -3651,7 +3464,7 @@
           <a:bodyPr wrap="square" lIns="0" tIns="0" rIns="0" bIns="0" rtlCol="0" anchor="ctr"/>
           <a:lstStyle/>
           <a:p>
-            <a:pPr algn="r" indent="0" marL="0">
+            <a:pPr marL="0" indent="0" algn="r">
               <a:buNone/>
             </a:pPr>
             <a:r>
@@ -3685,6 +3498,7 @@
         <a:solidFill>
           <a:srgbClr val="1A1A24"/>
         </a:solidFill>
+        <a:effectLst/>
       </p:bgPr>
     </p:bg>
     <p:spTree>
@@ -3722,11 +3536,11 @@
           <a:bodyPr wrap="square" lIns="0" tIns="0" rIns="0" bIns="0" rtlCol="0" anchor="ctr"/>
           <a:lstStyle/>
           <a:p>
-            <a:pPr algn="l" indent="0" marL="0">
-              <a:buNone/>
-            </a:pPr>
-            <a:r>
-              <a:rPr lang="en-US" sz="3200" b="1" spc="100" kern="0" dirty="0">
+            <a:pPr marL="0" indent="0" algn="l">
+              <a:buNone/>
+            </a:pPr>
+            <a:r>
+              <a:rPr lang="en-US" sz="3200" b="1" kern="0" spc="100" dirty="0">
                 <a:solidFill>
                   <a:srgbClr val="FFFFFF"/>
                 </a:solidFill>
@@ -3759,6 +3573,13 @@
           </a:solidFill>
           <a:ln/>
         </p:spPr>
+        <p:txBody>
+          <a:bodyPr/>
+          <a:lstStyle/>
+          <a:p>
+            <a:endParaRPr lang="fr-FR"/>
+          </a:p>
+        </p:txBody>
       </p:sp>
       <p:sp>
         <p:nvSpPr>
@@ -3779,6 +3600,13 @@
           </a:solidFill>
           <a:ln/>
         </p:spPr>
+        <p:txBody>
+          <a:bodyPr/>
+          <a:lstStyle/>
+          <a:p>
+            <a:endParaRPr lang="fr-FR"/>
+          </a:p>
+        </p:txBody>
       </p:sp>
       <p:sp>
         <p:nvSpPr>
@@ -3801,7 +3629,7 @@
           <a:bodyPr wrap="square" lIns="0" tIns="0" rIns="0" bIns="0" rtlCol="0" anchor="t"/>
           <a:lstStyle/>
           <a:p>
-            <a:pPr algn="l" indent="0" marL="0">
+            <a:pPr marL="0" indent="0" algn="l">
               <a:buNone/>
             </a:pPr>
             <a:r>
@@ -3838,6 +3666,13 @@
           </a:solidFill>
           <a:ln/>
         </p:spPr>
+        <p:txBody>
+          <a:bodyPr/>
+          <a:lstStyle/>
+          <a:p>
+            <a:endParaRPr lang="fr-FR"/>
+          </a:p>
+        </p:txBody>
       </p:sp>
       <p:sp>
         <p:nvSpPr>
@@ -3860,7 +3695,7 @@
           <a:bodyPr wrap="square" lIns="0" tIns="0" rIns="0" bIns="0" rtlCol="0" anchor="t"/>
           <a:lstStyle/>
           <a:p>
-            <a:pPr algn="l" indent="0" marL="0">
+            <a:pPr marL="0" indent="0" algn="l">
               <a:buNone/>
             </a:pPr>
             <a:r>
@@ -3897,6 +3732,13 @@
           </a:solidFill>
           <a:ln/>
         </p:spPr>
+        <p:txBody>
+          <a:bodyPr/>
+          <a:lstStyle/>
+          <a:p>
+            <a:endParaRPr lang="fr-FR"/>
+          </a:p>
+        </p:txBody>
       </p:sp>
       <p:sp>
         <p:nvSpPr>
@@ -3919,7 +3761,7 @@
           <a:bodyPr wrap="square" lIns="0" tIns="0" rIns="0" bIns="0" rtlCol="0" anchor="t"/>
           <a:lstStyle/>
           <a:p>
-            <a:pPr algn="l" indent="0" marL="0">
+            <a:pPr marL="0" indent="0" algn="l">
               <a:buNone/>
             </a:pPr>
             <a:r>
@@ -3956,6 +3798,13 @@
           </a:solidFill>
           <a:ln/>
         </p:spPr>
+        <p:txBody>
+          <a:bodyPr/>
+          <a:lstStyle/>
+          <a:p>
+            <a:endParaRPr lang="fr-FR"/>
+          </a:p>
+        </p:txBody>
       </p:sp>
       <p:sp>
         <p:nvSpPr>
@@ -3978,7 +3827,7 @@
           <a:bodyPr wrap="square" lIns="0" tIns="0" rIns="0" bIns="0" rtlCol="0" anchor="t"/>
           <a:lstStyle/>
           <a:p>
-            <a:pPr algn="l" indent="0" marL="0">
+            <a:pPr marL="0" indent="0" algn="l">
               <a:buNone/>
             </a:pPr>
             <a:r>
@@ -4020,17 +3869,24 @@
             <a:prstDash val="solid"/>
           </a:ln>
         </p:spPr>
+        <p:txBody>
+          <a:bodyPr/>
+          <a:lstStyle/>
+          <a:p>
+            <a:endParaRPr lang="fr-FR"/>
+          </a:p>
+        </p:txBody>
       </p:sp>
       <p:pic>
         <p:nvPicPr>
-          <p:cNvPr id="13" name="Image 0" descr="archi.png">    </p:cNvPr>
+          <p:cNvPr id="13" name="Image 0" descr="archi.png"/>
           <p:cNvPicPr>
             <a:picLocks noChangeAspect="1"/>
           </p:cNvPicPr>
           <p:nvPr/>
         </p:nvPicPr>
         <p:blipFill>
-          <a:blip r:embed="rId1"/>
+          <a:blip r:embed="rId3"/>
           <a:stretch>
             <a:fillRect/>
           </a:stretch>
@@ -4066,7 +3922,7 @@
           <a:bodyPr wrap="square" lIns="0" tIns="0" rIns="0" bIns="0" rtlCol="0" anchor="ctr"/>
           <a:lstStyle/>
           <a:p>
-            <a:pPr algn="ctr" indent="0" marL="0">
+            <a:pPr marL="0" indent="0" algn="ctr">
               <a:buNone/>
             </a:pPr>
             <a:r>
@@ -4105,7 +3961,7 @@
           <a:bodyPr wrap="square" lIns="0" tIns="0" rIns="0" bIns="0" rtlCol="0" anchor="ctr"/>
           <a:lstStyle/>
           <a:p>
-            <a:pPr algn="l" indent="0" marL="0">
+            <a:pPr marL="0" indent="0" algn="l">
               <a:buNone/>
             </a:pPr>
             <a:r>
@@ -4144,7 +4000,7 @@
           <a:bodyPr wrap="square" lIns="0" tIns="0" rIns="0" bIns="0" rtlCol="0" anchor="ctr"/>
           <a:lstStyle/>
           <a:p>
-            <a:pPr algn="r" indent="0" marL="0">
+            <a:pPr marL="0" indent="0" algn="r">
               <a:buNone/>
             </a:pPr>
             <a:r>
@@ -4178,6 +4034,7 @@
         <a:solidFill>
           <a:srgbClr val="1A1A24"/>
         </a:solidFill>
+        <a:effectLst/>
       </p:bgPr>
     </p:bg>
     <p:spTree>
@@ -4215,11 +4072,11 @@
           <a:bodyPr wrap="square" lIns="0" tIns="0" rIns="0" bIns="0" rtlCol="0" anchor="ctr"/>
           <a:lstStyle/>
           <a:p>
-            <a:pPr algn="l" indent="0" marL="0">
-              <a:buNone/>
-            </a:pPr>
-            <a:r>
-              <a:rPr lang="en-US" sz="3200" b="1" spc="100" kern="0" dirty="0">
+            <a:pPr marL="0" indent="0" algn="l">
+              <a:buNone/>
+            </a:pPr>
+            <a:r>
+              <a:rPr lang="en-US" sz="3200" b="1" kern="0" spc="100" dirty="0">
                 <a:solidFill>
                   <a:srgbClr val="FFFFFF"/>
                 </a:solidFill>
@@ -4252,6 +4109,13 @@
           </a:solidFill>
           <a:ln/>
         </p:spPr>
+        <p:txBody>
+          <a:bodyPr/>
+          <a:lstStyle/>
+          <a:p>
+            <a:endParaRPr lang="fr-FR"/>
+          </a:p>
+        </p:txBody>
       </p:sp>
       <p:sp>
         <p:nvSpPr>
@@ -4272,6 +4136,13 @@
           </a:solidFill>
           <a:ln/>
         </p:spPr>
+        <p:txBody>
+          <a:bodyPr/>
+          <a:lstStyle/>
+          <a:p>
+            <a:endParaRPr lang="fr-FR"/>
+          </a:p>
+        </p:txBody>
       </p:sp>
       <p:sp>
         <p:nvSpPr>
@@ -4294,7 +4165,7 @@
           <a:bodyPr wrap="square" lIns="0" tIns="0" rIns="0" bIns="0" rtlCol="0" anchor="t"/>
           <a:lstStyle/>
           <a:p>
-            <a:pPr algn="l" indent="0" marL="0">
+            <a:pPr marL="0" indent="0" algn="l">
               <a:buNone/>
             </a:pPr>
             <a:r>
@@ -4308,9 +4179,6 @@
               </a:rPr>
               <a:t>Next.js 16 / React 19</a:t>
             </a:r>
-            <a:pPr algn="l" indent="0" marL="0">
-              <a:buNone/>
-            </a:pPr>
             <a:r>
               <a:rPr lang="en-US" sz="1450" dirty="0">
                 <a:solidFill>
@@ -4320,7 +4188,7 @@
                 <a:ea typeface="Inter" pitchFamily="34" charset="-122"/>
                 <a:cs typeface="Inter" pitchFamily="34" charset="-120"/>
               </a:rPr>
-              <a:t>  →  SEO d’un site grand public (SSR/SSG/ISR)</a:t>
+              <a:t>  →  SEO d’un site grand public</a:t>
             </a:r>
             <a:endParaRPr lang="en-US" sz="1450" dirty="0"/>
           </a:p>
@@ -4345,6 +4213,13 @@
           </a:solidFill>
           <a:ln/>
         </p:spPr>
+        <p:txBody>
+          <a:bodyPr/>
+          <a:lstStyle/>
+          <a:p>
+            <a:endParaRPr lang="fr-FR"/>
+          </a:p>
+        </p:txBody>
       </p:sp>
       <p:sp>
         <p:nvSpPr>
@@ -4367,7 +4242,7 @@
           <a:bodyPr wrap="square" lIns="0" tIns="0" rIns="0" bIns="0" rtlCol="0" anchor="t"/>
           <a:lstStyle/>
           <a:p>
-            <a:pPr algn="l" indent="0" marL="0">
+            <a:pPr marL="0" indent="0" algn="l">
               <a:buNone/>
             </a:pPr>
             <a:r>
@@ -4381,9 +4256,6 @@
               </a:rPr>
               <a:t>Express 5 / Node 20</a:t>
             </a:r>
-            <a:pPr algn="l" indent="0" marL="0">
-              <a:buNone/>
-            </a:pPr>
             <a:r>
               <a:rPr lang="en-US" sz="1450" dirty="0">
                 <a:solidFill>
@@ -4418,6 +4290,13 @@
           </a:solidFill>
           <a:ln/>
         </p:spPr>
+        <p:txBody>
+          <a:bodyPr/>
+          <a:lstStyle/>
+          <a:p>
+            <a:endParaRPr lang="fr-FR"/>
+          </a:p>
+        </p:txBody>
       </p:sp>
       <p:sp>
         <p:nvSpPr>
@@ -4440,7 +4319,7 @@
           <a:bodyPr wrap="square" lIns="0" tIns="0" rIns="0" bIns="0" rtlCol="0" anchor="t"/>
           <a:lstStyle/>
           <a:p>
-            <a:pPr algn="l" indent="0" marL="0">
+            <a:pPr marL="0" indent="0" algn="l">
               <a:buNone/>
             </a:pPr>
             <a:r>
@@ -4454,9 +4333,6 @@
               </a:rPr>
               <a:t>PostgreSQL 16</a:t>
             </a:r>
-            <a:pPr algn="l" indent="0" marL="0">
-              <a:buNone/>
-            </a:pPr>
             <a:r>
               <a:rPr lang="en-US" sz="1450" dirty="0">
                 <a:solidFill>
@@ -4491,6 +4367,13 @@
           </a:solidFill>
           <a:ln/>
         </p:spPr>
+        <p:txBody>
+          <a:bodyPr/>
+          <a:lstStyle/>
+          <a:p>
+            <a:endParaRPr lang="fr-FR"/>
+          </a:p>
+        </p:txBody>
       </p:sp>
       <p:sp>
         <p:nvSpPr>
@@ -4513,7 +4396,7 @@
           <a:bodyPr wrap="square" lIns="0" tIns="0" rIns="0" bIns="0" rtlCol="0" anchor="t"/>
           <a:lstStyle/>
           <a:p>
-            <a:pPr algn="l" indent="0" marL="0">
+            <a:pPr marL="0" indent="0" algn="l">
               <a:buNone/>
             </a:pPr>
             <a:r>
@@ -4527,9 +4410,6 @@
               </a:rPr>
               <a:t>JWT + cookies httpOnly + sessions</a:t>
             </a:r>
-            <a:pPr algn="l" indent="0" marL="0">
-              <a:buNone/>
-            </a:pPr>
             <a:r>
               <a:rPr lang="en-US" sz="1450" dirty="0">
                 <a:solidFill>
@@ -4564,6 +4444,13 @@
           </a:solidFill>
           <a:ln/>
         </p:spPr>
+        <p:txBody>
+          <a:bodyPr/>
+          <a:lstStyle/>
+          <a:p>
+            <a:endParaRPr lang="fr-FR"/>
+          </a:p>
+        </p:txBody>
       </p:sp>
       <p:sp>
         <p:nvSpPr>
@@ -4586,7 +4473,7 @@
           <a:bodyPr wrap="square" lIns="0" tIns="0" rIns="0" bIns="0" rtlCol="0" anchor="t"/>
           <a:lstStyle/>
           <a:p>
-            <a:pPr algn="l" indent="0" marL="0">
+            <a:pPr marL="0" indent="0" algn="l">
               <a:buNone/>
             </a:pPr>
             <a:r>
@@ -4600,9 +4487,6 @@
               </a:rPr>
               <a:t>Zod</a:t>
             </a:r>
-            <a:pPr algn="l" indent="0" marL="0">
-              <a:buNone/>
-            </a:pPr>
             <a:r>
               <a:rPr lang="en-US" sz="1450" dirty="0">
                 <a:solidFill>
@@ -4637,6 +4521,13 @@
           </a:solidFill>
           <a:ln/>
         </p:spPr>
+        <p:txBody>
+          <a:bodyPr/>
+          <a:lstStyle/>
+          <a:p>
+            <a:endParaRPr lang="fr-FR"/>
+          </a:p>
+        </p:txBody>
       </p:sp>
       <p:sp>
         <p:nvSpPr>
@@ -4659,7 +4550,7 @@
           <a:bodyPr wrap="square" lIns="0" tIns="0" rIns="0" bIns="0" rtlCol="0" anchor="t"/>
           <a:lstStyle/>
           <a:p>
-            <a:pPr algn="l" indent="0" marL="0">
+            <a:pPr marL="0" indent="0" algn="l">
               <a:buNone/>
             </a:pPr>
             <a:r>
@@ -4673,9 +4564,6 @@
               </a:rPr>
               <a:t>Vitest + Supertest + RTL</a:t>
             </a:r>
-            <a:pPr algn="l" indent="0" marL="0">
-              <a:buNone/>
-            </a:pPr>
             <a:r>
               <a:rPr lang="en-US" sz="1450" dirty="0">
                 <a:solidFill>
@@ -4710,6 +4598,13 @@
           </a:solidFill>
           <a:ln/>
         </p:spPr>
+        <p:txBody>
+          <a:bodyPr/>
+          <a:lstStyle/>
+          <a:p>
+            <a:endParaRPr lang="fr-FR"/>
+          </a:p>
+        </p:txBody>
       </p:sp>
       <p:sp>
         <p:nvSpPr>
@@ -4732,7 +4627,7 @@
           <a:bodyPr wrap="square" lIns="0" tIns="0" rIns="0" bIns="0" rtlCol="0" anchor="t"/>
           <a:lstStyle/>
           <a:p>
-            <a:pPr algn="l" indent="0" marL="0">
+            <a:pPr marL="0" indent="0" algn="l">
               <a:buNone/>
             </a:pPr>
             <a:r>
@@ -4746,9 +4641,6 @@
               </a:rPr>
               <a:t>Docker Compose</a:t>
             </a:r>
-            <a:pPr algn="l" indent="0" marL="0">
-              <a:buNone/>
-            </a:pPr>
             <a:r>
               <a:rPr lang="en-US" sz="1450" dirty="0">
                 <a:solidFill>
@@ -4785,7 +4677,7 @@
           <a:bodyPr wrap="square" lIns="0" tIns="0" rIns="0" bIns="0" rtlCol="0" anchor="ctr"/>
           <a:lstStyle/>
           <a:p>
-            <a:pPr algn="l" indent="0" marL="0">
+            <a:pPr marL="0" indent="0" algn="l">
               <a:buNone/>
             </a:pPr>
             <a:r>
@@ -4824,7 +4716,7 @@
           <a:bodyPr wrap="square" lIns="0" tIns="0" rIns="0" bIns="0" rtlCol="0" anchor="ctr"/>
           <a:lstStyle/>
           <a:p>
-            <a:pPr algn="r" indent="0" marL="0">
+            <a:pPr marL="0" indent="0" algn="r">
               <a:buNone/>
             </a:pPr>
             <a:r>
@@ -4858,6 +4750,7 @@
         <a:solidFill>
           <a:srgbClr val="1A1A24"/>
         </a:solidFill>
+        <a:effectLst/>
       </p:bgPr>
     </p:bg>
     <p:spTree>
@@ -4895,11 +4788,11 @@
           <a:bodyPr wrap="square" lIns="0" tIns="0" rIns="0" bIns="0" rtlCol="0" anchor="ctr"/>
           <a:lstStyle/>
           <a:p>
-            <a:pPr algn="l" indent="0" marL="0">
-              <a:buNone/>
-            </a:pPr>
-            <a:r>
-              <a:rPr lang="en-US" sz="3200" b="1" spc="100" kern="0" dirty="0">
+            <a:pPr marL="0" indent="0" algn="l">
+              <a:buNone/>
+            </a:pPr>
+            <a:r>
+              <a:rPr lang="en-US" sz="3200" b="1" kern="0" spc="100" dirty="0">
                 <a:solidFill>
                   <a:srgbClr val="FFFFFF"/>
                 </a:solidFill>
@@ -4932,6 +4825,13 @@
           </a:solidFill>
           <a:ln/>
         </p:spPr>
+        <p:txBody>
+          <a:bodyPr/>
+          <a:lstStyle/>
+          <a:p>
+            <a:endParaRPr lang="fr-FR"/>
+          </a:p>
+        </p:txBody>
       </p:sp>
       <p:sp>
         <p:nvSpPr>
@@ -4952,6 +4852,13 @@
           </a:solidFill>
           <a:ln/>
         </p:spPr>
+        <p:txBody>
+          <a:bodyPr/>
+          <a:lstStyle/>
+          <a:p>
+            <a:endParaRPr lang="fr-FR"/>
+          </a:p>
+        </p:txBody>
       </p:sp>
       <p:sp>
         <p:nvSpPr>
@@ -4974,7 +4881,7 @@
           <a:bodyPr wrap="square" lIns="0" tIns="0" rIns="0" bIns="0" rtlCol="0" anchor="t"/>
           <a:lstStyle/>
           <a:p>
-            <a:pPr algn="l" indent="0" marL="0">
+            <a:pPr marL="0" indent="0" algn="l">
               <a:buNone/>
             </a:pPr>
             <a:r>
@@ -5011,6 +4918,13 @@
           </a:solidFill>
           <a:ln/>
         </p:spPr>
+        <p:txBody>
+          <a:bodyPr/>
+          <a:lstStyle/>
+          <a:p>
+            <a:endParaRPr lang="fr-FR"/>
+          </a:p>
+        </p:txBody>
       </p:sp>
       <p:sp>
         <p:nvSpPr>
@@ -5033,7 +4947,7 @@
           <a:bodyPr wrap="square" lIns="0" tIns="0" rIns="0" bIns="0" rtlCol="0" anchor="t"/>
           <a:lstStyle/>
           <a:p>
-            <a:pPr algn="l" indent="0" marL="0">
+            <a:pPr marL="0" indent="0" algn="l">
               <a:buNone/>
             </a:pPr>
             <a:r>
@@ -5070,6 +4984,13 @@
           </a:solidFill>
           <a:ln/>
         </p:spPr>
+        <p:txBody>
+          <a:bodyPr/>
+          <a:lstStyle/>
+          <a:p>
+            <a:endParaRPr lang="fr-FR"/>
+          </a:p>
+        </p:txBody>
       </p:sp>
       <p:sp>
         <p:nvSpPr>
@@ -5092,7 +5013,7 @@
           <a:bodyPr wrap="square" lIns="0" tIns="0" rIns="0" bIns="0" rtlCol="0" anchor="t"/>
           <a:lstStyle/>
           <a:p>
-            <a:pPr algn="l" indent="0" marL="0">
+            <a:pPr marL="0" indent="0" algn="l">
               <a:buNone/>
             </a:pPr>
             <a:r>
@@ -5104,7 +5025,7 @@
                 <a:ea typeface="Inter" pitchFamily="34" charset="-122"/>
                 <a:cs typeface="Inter" pitchFamily="34" charset="-120"/>
               </a:rPr>
-              <a:t>Pas de MVC monolithique : front et back séparés, la Vue React interroge l’API en asynchrone</a:t>
+              <a:t>MVC : front et back séparés, la Vue React interroge l’API en asynchrone</a:t>
             </a:r>
             <a:endParaRPr lang="en-US" sz="1600" dirty="0"/>
           </a:p>
@@ -5134,17 +5055,24 @@
             <a:prstDash val="solid"/>
           </a:ln>
         </p:spPr>
+        <p:txBody>
+          <a:bodyPr/>
+          <a:lstStyle/>
+          <a:p>
+            <a:endParaRPr lang="fr-FR"/>
+          </a:p>
+        </p:txBody>
       </p:sp>
       <p:pic>
         <p:nvPicPr>
-          <p:cNvPr id="11" name="Image 0" descr="flux.png">    </p:cNvPr>
+          <p:cNvPr id="11" name="Image 0" descr="flux.png"/>
           <p:cNvPicPr>
             <a:picLocks noChangeAspect="1"/>
           </p:cNvPicPr>
           <p:nvPr/>
         </p:nvPicPr>
         <p:blipFill>
-          <a:blip r:embed="rId1"/>
+          <a:blip r:embed="rId3"/>
           <a:stretch>
             <a:fillRect/>
           </a:stretch>
@@ -5180,7 +5108,7 @@
           <a:bodyPr wrap="square" lIns="0" tIns="0" rIns="0" bIns="0" rtlCol="0" anchor="ctr"/>
           <a:lstStyle/>
           <a:p>
-            <a:pPr algn="ctr" indent="0" marL="0">
+            <a:pPr marL="0" indent="0" algn="ctr">
               <a:buNone/>
             </a:pPr>
             <a:r>
@@ -5219,7 +5147,7 @@
           <a:bodyPr wrap="square" lIns="0" tIns="0" rIns="0" bIns="0" rtlCol="0" anchor="ctr"/>
           <a:lstStyle/>
           <a:p>
-            <a:pPr algn="l" indent="0" marL="0">
+            <a:pPr marL="0" indent="0" algn="l">
               <a:buNone/>
             </a:pPr>
             <a:r>
@@ -5258,7 +5186,7 @@
           <a:bodyPr wrap="square" lIns="0" tIns="0" rIns="0" bIns="0" rtlCol="0" anchor="ctr"/>
           <a:lstStyle/>
           <a:p>
-            <a:pPr algn="r" indent="0" marL="0">
+            <a:pPr marL="0" indent="0" algn="r">
               <a:buNone/>
             </a:pPr>
             <a:r>
@@ -5292,6 +5220,7 @@
         <a:solidFill>
           <a:srgbClr val="1A1A24"/>
         </a:solidFill>
+        <a:effectLst/>
       </p:bgPr>
     </p:bg>
     <p:spTree>
@@ -5331,11 +5260,11 @@
           <a:bodyPr wrap="square" lIns="0" tIns="0" rIns="0" bIns="0" rtlCol="0" anchor="ctr"/>
           <a:lstStyle/>
           <a:p>
-            <a:pPr algn="ctr" indent="0" marL="0">
-              <a:buNone/>
-            </a:pPr>
-            <a:r>
-              <a:rPr lang="en-US" sz="1700" b="1" spc="300" kern="0" dirty="0">
+            <a:pPr marL="0" indent="0" algn="ctr">
+              <a:buNone/>
+            </a:pPr>
+            <a:r>
+              <a:rPr lang="en-US" sz="1700" b="1" kern="0" spc="300" dirty="0">
                 <a:solidFill>
                   <a:srgbClr val="FFFFFF"/>
                 </a:solidFill>
@@ -5370,11 +5299,11 @@
           <a:bodyPr wrap="square" lIns="0" tIns="0" rIns="0" bIns="0" rtlCol="0" anchor="ctr"/>
           <a:lstStyle/>
           <a:p>
-            <a:pPr algn="l" indent="0" marL="0">
-              <a:buNone/>
-            </a:pPr>
-            <a:r>
-              <a:rPr lang="en-US" sz="5200" b="1" spc="100" kern="0" dirty="0">
+            <a:pPr marL="0" indent="0" algn="l">
+              <a:buNone/>
+            </a:pPr>
+            <a:r>
+              <a:rPr lang="en-US" sz="5200" b="1" kern="0" spc="100" dirty="0">
                 <a:solidFill>
                   <a:srgbClr val="FFFFFF"/>
                 </a:solidFill>
@@ -5407,6 +5336,13 @@
           </a:solidFill>
           <a:ln/>
         </p:spPr>
+        <p:txBody>
+          <a:bodyPr/>
+          <a:lstStyle/>
+          <a:p>
+            <a:endParaRPr lang="fr-FR"/>
+          </a:p>
+        </p:txBody>
       </p:sp>
       <p:sp>
         <p:nvSpPr>
@@ -5429,7 +5365,7 @@
           <a:bodyPr wrap="square" lIns="0" tIns="0" rIns="0" bIns="0" rtlCol="0" anchor="ctr"/>
           <a:lstStyle/>
           <a:p>
-            <a:pPr algn="l" indent="0" marL="0">
+            <a:pPr marL="0" indent="0" algn="l">
               <a:buNone/>
             </a:pPr>
             <a:r>
@@ -5468,7 +5404,7 @@
           <a:bodyPr wrap="square" lIns="0" tIns="0" rIns="0" bIns="0" rtlCol="0" anchor="t"/>
           <a:lstStyle/>
           <a:p>
-            <a:pPr algn="l" indent="0" marL="0">
+            <a:pPr marL="0" indent="0" algn="l">
               <a:buNone/>
             </a:pPr>
             <a:r>
@@ -5507,7 +5443,7 @@
           <a:bodyPr wrap="square" lIns="0" tIns="0" rIns="0" bIns="0" rtlCol="0" anchor="ctr"/>
           <a:lstStyle/>
           <a:p>
-            <a:pPr algn="l" indent="0" marL="0">
+            <a:pPr marL="0" indent="0" algn="l">
               <a:buNone/>
             </a:pPr>
             <a:r>
@@ -5546,7 +5482,7 @@
           <a:bodyPr wrap="square" lIns="0" tIns="0" rIns="0" bIns="0" rtlCol="0" anchor="t"/>
           <a:lstStyle/>
           <a:p>
-            <a:pPr algn="l" indent="0" marL="0">
+            <a:pPr marL="0" indent="0" algn="l">
               <a:buNone/>
             </a:pPr>
             <a:r>
@@ -5585,7 +5521,7 @@
           <a:bodyPr wrap="square" lIns="0" tIns="0" rIns="0" bIns="0" rtlCol="0" anchor="ctr"/>
           <a:lstStyle/>
           <a:p>
-            <a:pPr algn="l" indent="0" marL="0">
+            <a:pPr marL="0" indent="0" algn="l">
               <a:buNone/>
             </a:pPr>
             <a:r>
@@ -5624,7 +5560,7 @@
           <a:bodyPr wrap="square" lIns="0" tIns="0" rIns="0" bIns="0" rtlCol="0" anchor="ctr"/>
           <a:lstStyle/>
           <a:p>
-            <a:pPr algn="r" indent="0" marL="0">
+            <a:pPr marL="0" indent="0" algn="r">
               <a:buNone/>
             </a:pPr>
             <a:r>
@@ -5658,6 +5594,7 @@
         <a:solidFill>
           <a:srgbClr val="1A1A24"/>
         </a:solidFill>
+        <a:effectLst/>
       </p:bgPr>
     </p:bg>
     <p:spTree>
@@ -5695,11 +5632,11 @@
           <a:bodyPr wrap="square" lIns="0" tIns="0" rIns="0" bIns="0" rtlCol="0" anchor="ctr"/>
           <a:lstStyle/>
           <a:p>
-            <a:pPr algn="l" indent="0" marL="0">
-              <a:buNone/>
-            </a:pPr>
-            <a:r>
-              <a:rPr lang="en-US" sz="3200" b="1" spc="100" kern="0" dirty="0">
+            <a:pPr marL="0" indent="0" algn="l">
+              <a:buNone/>
+            </a:pPr>
+            <a:r>
+              <a:rPr lang="en-US" sz="3200" b="1" kern="0" spc="100" dirty="0">
                 <a:solidFill>
                   <a:srgbClr val="FFFFFF"/>
                 </a:solidFill>
@@ -5732,6 +5669,13 @@
           </a:solidFill>
           <a:ln/>
         </p:spPr>
+        <p:txBody>
+          <a:bodyPr/>
+          <a:lstStyle/>
+          <a:p>
+            <a:endParaRPr lang="fr-FR"/>
+          </a:p>
+        </p:txBody>
       </p:sp>
       <p:sp>
         <p:nvSpPr>
@@ -5756,11 +5700,11 @@
           <a:bodyPr wrap="square" lIns="0" tIns="0" rIns="0" bIns="0" rtlCol="0" anchor="ctr"/>
           <a:lstStyle/>
           <a:p>
-            <a:pPr algn="ctr" indent="0" marL="0">
-              <a:buNone/>
-            </a:pPr>
-            <a:r>
-              <a:rPr lang="en-US" sz="1500" b="1" spc="200" kern="0" dirty="0">
+            <a:pPr marL="0" indent="0" algn="ctr">
+              <a:buNone/>
+            </a:pPr>
+            <a:r>
+              <a:rPr lang="en-US" sz="1500" b="1" kern="0" spc="200" dirty="0">
                 <a:solidFill>
                   <a:srgbClr val="FFFFFF"/>
                 </a:solidFill>
@@ -5795,7 +5739,7 @@
           <a:bodyPr wrap="square" lIns="0" tIns="0" rIns="0" bIns="0" rtlCol="0" anchor="ctr"/>
           <a:lstStyle/>
           <a:p>
-            <a:pPr algn="l" indent="0" marL="0">
+            <a:pPr marL="0" indent="0" algn="l">
               <a:buNone/>
             </a:pPr>
             <a:r>
@@ -5832,6 +5776,13 @@
           </a:solidFill>
           <a:ln/>
         </p:spPr>
+        <p:txBody>
+          <a:bodyPr/>
+          <a:lstStyle/>
+          <a:p>
+            <a:endParaRPr lang="fr-FR"/>
+          </a:p>
+        </p:txBody>
       </p:sp>
       <p:sp>
         <p:nvSpPr>
@@ -5854,7 +5805,7 @@
           <a:bodyPr wrap="square" lIns="0" tIns="0" rIns="0" bIns="0" rtlCol="0" anchor="t"/>
           <a:lstStyle/>
           <a:p>
-            <a:pPr algn="l" indent="0" marL="0">
+            <a:pPr marL="0" indent="0" algn="l">
               <a:buNone/>
             </a:pPr>
             <a:r>
@@ -5891,6 +5842,13 @@
           </a:solidFill>
           <a:ln/>
         </p:spPr>
+        <p:txBody>
+          <a:bodyPr/>
+          <a:lstStyle/>
+          <a:p>
+            <a:endParaRPr lang="fr-FR"/>
+          </a:p>
+        </p:txBody>
       </p:sp>
       <p:sp>
         <p:nvSpPr>
@@ -5913,7 +5871,7 @@
           <a:bodyPr wrap="square" lIns="0" tIns="0" rIns="0" bIns="0" rtlCol="0" anchor="t"/>
           <a:lstStyle/>
           <a:p>
-            <a:pPr algn="l" indent="0" marL="0">
+            <a:pPr marL="0" indent="0" algn="l">
               <a:buNone/>
             </a:pPr>
             <a:r>
@@ -5950,6 +5908,13 @@
           </a:solidFill>
           <a:ln/>
         </p:spPr>
+        <p:txBody>
+          <a:bodyPr/>
+          <a:lstStyle/>
+          <a:p>
+            <a:endParaRPr lang="fr-FR"/>
+          </a:p>
+        </p:txBody>
       </p:sp>
       <p:sp>
         <p:nvSpPr>
@@ -5972,7 +5937,7 @@
           <a:bodyPr wrap="square" lIns="0" tIns="0" rIns="0" bIns="0" rtlCol="0" anchor="t"/>
           <a:lstStyle/>
           <a:p>
-            <a:pPr algn="l" indent="0" marL="0">
+            <a:pPr marL="0" indent="0" algn="l">
               <a:buNone/>
             </a:pPr>
             <a:r>
@@ -6011,7 +5976,7 @@
           <a:bodyPr wrap="square" lIns="0" tIns="0" rIns="0" bIns="0" rtlCol="0" anchor="ctr"/>
           <a:lstStyle/>
           <a:p>
-            <a:pPr algn="l" indent="0" marL="0">
+            <a:pPr marL="0" indent="0" algn="l">
               <a:buNone/>
             </a:pPr>
             <a:r>
@@ -6050,7 +6015,7 @@
           <a:bodyPr wrap="square" lIns="0" tIns="0" rIns="0" bIns="0" rtlCol="0" anchor="ctr"/>
           <a:lstStyle/>
           <a:p>
-            <a:pPr algn="r" indent="0" marL="0">
+            <a:pPr marL="0" indent="0" algn="r">
               <a:buNone/>
             </a:pPr>
             <a:r>
@@ -6084,6 +6049,7 @@
         <a:solidFill>
           <a:srgbClr val="1A1A24"/>
         </a:solidFill>
+        <a:effectLst/>
       </p:bgPr>
     </p:bg>
     <p:spTree>
@@ -6121,11 +6087,11 @@
           <a:bodyPr wrap="square" lIns="0" tIns="0" rIns="0" bIns="0" rtlCol="0" anchor="ctr"/>
           <a:lstStyle/>
           <a:p>
-            <a:pPr algn="l" indent="0" marL="0">
-              <a:buNone/>
-            </a:pPr>
-            <a:r>
-              <a:rPr lang="en-US" sz="3200" b="1" spc="100" kern="0" dirty="0">
+            <a:pPr marL="0" indent="0" algn="l">
+              <a:buNone/>
+            </a:pPr>
+            <a:r>
+              <a:rPr lang="en-US" sz="3200" b="1" kern="0" spc="100" dirty="0">
                 <a:solidFill>
                   <a:srgbClr val="FFFFFF"/>
                 </a:solidFill>
@@ -6158,6 +6124,13 @@
           </a:solidFill>
           <a:ln/>
         </p:spPr>
+        <p:txBody>
+          <a:bodyPr/>
+          <a:lstStyle/>
+          <a:p>
+            <a:endParaRPr lang="fr-FR"/>
+          </a:p>
+        </p:txBody>
       </p:sp>
       <p:sp>
         <p:nvSpPr>
@@ -6182,11 +6155,11 @@
           <a:bodyPr wrap="square" lIns="0" tIns="0" rIns="0" bIns="0" rtlCol="0" anchor="ctr"/>
           <a:lstStyle/>
           <a:p>
-            <a:pPr algn="ctr" indent="0" marL="0">
-              <a:buNone/>
-            </a:pPr>
-            <a:r>
-              <a:rPr lang="en-US" sz="1500" b="1" spc="200" kern="0" dirty="0">
+            <a:pPr marL="0" indent="0" algn="ctr">
+              <a:buNone/>
+            </a:pPr>
+            <a:r>
+              <a:rPr lang="en-US" sz="1500" b="1" kern="0" spc="200" dirty="0">
                 <a:solidFill>
                   <a:srgbClr val="FFFFFF"/>
                 </a:solidFill>
@@ -6221,7 +6194,7 @@
           <a:bodyPr wrap="square" lIns="0" tIns="0" rIns="0" bIns="0" rtlCol="0" anchor="ctr"/>
           <a:lstStyle/>
           <a:p>
-            <a:pPr algn="l" indent="0" marL="0">
+            <a:pPr marL="0" indent="0" algn="l">
               <a:buNone/>
             </a:pPr>
             <a:r>
@@ -6258,6 +6231,13 @@
           </a:solidFill>
           <a:ln/>
         </p:spPr>
+        <p:txBody>
+          <a:bodyPr/>
+          <a:lstStyle/>
+          <a:p>
+            <a:endParaRPr lang="fr-FR"/>
+          </a:p>
+        </p:txBody>
       </p:sp>
       <p:sp>
         <p:nvSpPr>
@@ -6280,7 +6260,7 @@
           <a:bodyPr wrap="square" lIns="0" tIns="0" rIns="0" bIns="0" rtlCol="0" anchor="t"/>
           <a:lstStyle/>
           <a:p>
-            <a:pPr algn="l" indent="0" marL="0">
+            <a:pPr marL="0" indent="0" algn="l">
               <a:buNone/>
             </a:pPr>
             <a:r>
@@ -6317,6 +6297,13 @@
           </a:solidFill>
           <a:ln/>
         </p:spPr>
+        <p:txBody>
+          <a:bodyPr/>
+          <a:lstStyle/>
+          <a:p>
+            <a:endParaRPr lang="fr-FR"/>
+          </a:p>
+        </p:txBody>
       </p:sp>
       <p:sp>
         <p:nvSpPr>
@@ -6339,7 +6326,7 @@
           <a:bodyPr wrap="square" lIns="0" tIns="0" rIns="0" bIns="0" rtlCol="0" anchor="t"/>
           <a:lstStyle/>
           <a:p>
-            <a:pPr algn="l" indent="0" marL="0">
+            <a:pPr marL="0" indent="0" algn="l">
               <a:buNone/>
             </a:pPr>
             <a:r>
@@ -6376,6 +6363,13 @@
           </a:solidFill>
           <a:ln/>
         </p:spPr>
+        <p:txBody>
+          <a:bodyPr/>
+          <a:lstStyle/>
+          <a:p>
+            <a:endParaRPr lang="fr-FR"/>
+          </a:p>
+        </p:txBody>
       </p:sp>
       <p:sp>
         <p:nvSpPr>
@@ -6398,7 +6392,7 @@
           <a:bodyPr wrap="square" lIns="0" tIns="0" rIns="0" bIns="0" rtlCol="0" anchor="t"/>
           <a:lstStyle/>
           <a:p>
-            <a:pPr algn="l" indent="0" marL="0">
+            <a:pPr marL="0" indent="0" algn="l">
               <a:buNone/>
             </a:pPr>
             <a:r>
@@ -6437,7 +6431,7 @@
           <a:bodyPr wrap="square" lIns="0" tIns="0" rIns="0" bIns="0" rtlCol="0" anchor="ctr"/>
           <a:lstStyle/>
           <a:p>
-            <a:pPr algn="l" indent="0" marL="0">
+            <a:pPr marL="0" indent="0" algn="l">
               <a:buNone/>
             </a:pPr>
             <a:r>
@@ -6476,7 +6470,7 @@
           <a:bodyPr wrap="square" lIns="0" tIns="0" rIns="0" bIns="0" rtlCol="0" anchor="ctr"/>
           <a:lstStyle/>
           <a:p>
-            <a:pPr algn="r" indent="0" marL="0">
+            <a:pPr marL="0" indent="0" algn="r">
               <a:buNone/>
             </a:pPr>
             <a:r>
@@ -6510,6 +6504,7 @@
         <a:solidFill>
           <a:srgbClr val="1A1A24"/>
         </a:solidFill>
+        <a:effectLst/>
       </p:bgPr>
     </p:bg>
     <p:spTree>
@@ -6547,11 +6542,11 @@
           <a:bodyPr wrap="square" lIns="0" tIns="0" rIns="0" bIns="0" rtlCol="0" anchor="ctr"/>
           <a:lstStyle/>
           <a:p>
-            <a:pPr algn="l" indent="0" marL="0">
-              <a:buNone/>
-            </a:pPr>
-            <a:r>
-              <a:rPr lang="en-US" sz="3200" b="1" spc="100" kern="0" dirty="0">
+            <a:pPr marL="0" indent="0" algn="l">
+              <a:buNone/>
+            </a:pPr>
+            <a:r>
+              <a:rPr lang="en-US" sz="3200" b="1" kern="0" spc="100" dirty="0">
                 <a:solidFill>
                   <a:srgbClr val="FFFFFF"/>
                 </a:solidFill>
@@ -6584,6 +6579,13 @@
           </a:solidFill>
           <a:ln/>
         </p:spPr>
+        <p:txBody>
+          <a:bodyPr/>
+          <a:lstStyle/>
+          <a:p>
+            <a:endParaRPr lang="fr-FR"/>
+          </a:p>
+        </p:txBody>
       </p:sp>
       <p:sp>
         <p:nvSpPr>
@@ -6604,6 +6606,13 @@
           </a:solidFill>
           <a:ln/>
         </p:spPr>
+        <p:txBody>
+          <a:bodyPr/>
+          <a:lstStyle/>
+          <a:p>
+            <a:endParaRPr lang="fr-FR"/>
+          </a:p>
+        </p:txBody>
       </p:sp>
       <p:sp>
         <p:nvSpPr>
@@ -6626,7 +6635,7 @@
           <a:bodyPr wrap="square" lIns="0" tIns="0" rIns="0" bIns="0" rtlCol="0" anchor="t"/>
           <a:lstStyle/>
           <a:p>
-            <a:pPr algn="l" indent="0" marL="0">
+            <a:pPr marL="0" indent="0" algn="l">
               <a:buNone/>
             </a:pPr>
             <a:r>
@@ -6640,9 +6649,6 @@
               </a:rPr>
               <a:t>JWT signé</a:t>
             </a:r>
-            <a:pPr algn="l" indent="0" marL="0">
-              <a:buNone/>
-            </a:pPr>
             <a:r>
               <a:rPr lang="en-US" sz="1400" dirty="0">
                 <a:solidFill>
@@ -6677,6 +6683,13 @@
           </a:solidFill>
           <a:ln/>
         </p:spPr>
+        <p:txBody>
+          <a:bodyPr/>
+          <a:lstStyle/>
+          <a:p>
+            <a:endParaRPr lang="fr-FR"/>
+          </a:p>
+        </p:txBody>
       </p:sp>
       <p:sp>
         <p:nvSpPr>
@@ -6699,7 +6712,7 @@
           <a:bodyPr wrap="square" lIns="0" tIns="0" rIns="0" bIns="0" rtlCol="0" anchor="t"/>
           <a:lstStyle/>
           <a:p>
-            <a:pPr algn="l" indent="0" marL="0">
+            <a:pPr marL="0" indent="0" algn="l">
               <a:buNone/>
             </a:pPr>
             <a:r>
@@ -6713,9 +6726,6 @@
               </a:rPr>
               <a:t>Cookie httpOnly</a:t>
             </a:r>
-            <a:pPr algn="l" indent="0" marL="0">
-              <a:buNone/>
-            </a:pPr>
             <a:r>
               <a:rPr lang="en-US" sz="1400" dirty="0">
                 <a:solidFill>
@@ -6750,6 +6760,13 @@
           </a:solidFill>
           <a:ln/>
         </p:spPr>
+        <p:txBody>
+          <a:bodyPr/>
+          <a:lstStyle/>
+          <a:p>
+            <a:endParaRPr lang="fr-FR"/>
+          </a:p>
+        </p:txBody>
       </p:sp>
       <p:sp>
         <p:nvSpPr>
@@ -6772,7 +6789,7 @@
           <a:bodyPr wrap="square" lIns="0" tIns="0" rIns="0" bIns="0" rtlCol="0" anchor="t"/>
           <a:lstStyle/>
           <a:p>
-            <a:pPr algn="l" indent="0" marL="0">
+            <a:pPr marL="0" indent="0" algn="l">
               <a:buNone/>
             </a:pPr>
             <a:r>
@@ -6786,9 +6803,6 @@
               </a:rPr>
               <a:t>Sessions en base</a:t>
             </a:r>
-            <a:pPr algn="l" indent="0" marL="0">
-              <a:buNone/>
-            </a:pPr>
             <a:r>
               <a:rPr lang="en-US" sz="1400" dirty="0">
                 <a:solidFill>
@@ -6823,6 +6837,13 @@
           </a:solidFill>
           <a:ln/>
         </p:spPr>
+        <p:txBody>
+          <a:bodyPr/>
+          <a:lstStyle/>
+          <a:p>
+            <a:endParaRPr lang="fr-FR"/>
+          </a:p>
+        </p:txBody>
       </p:sp>
       <p:sp>
         <p:nvSpPr>
@@ -6845,7 +6866,7 @@
           <a:bodyPr wrap="square" lIns="0" tIns="0" rIns="0" bIns="0" rtlCol="0" anchor="t"/>
           <a:lstStyle/>
           <a:p>
-            <a:pPr algn="l" indent="0" marL="0">
+            <a:pPr marL="0" indent="0" algn="l">
               <a:buNone/>
             </a:pPr>
             <a:r>
@@ -6859,9 +6880,6 @@
               </a:rPr>
               <a:t>RBAC serveur</a:t>
             </a:r>
-            <a:pPr algn="l" indent="0" marL="0">
-              <a:buNone/>
-            </a:pPr>
             <a:r>
               <a:rPr lang="en-US" sz="1400" dirty="0">
                 <a:solidFill>
@@ -6903,6 +6921,13 @@
             <a:prstDash val="solid"/>
           </a:ln>
         </p:spPr>
+        <p:txBody>
+          <a:bodyPr/>
+          <a:lstStyle/>
+          <a:p>
+            <a:endParaRPr lang="fr-FR"/>
+          </a:p>
+        </p:txBody>
       </p:sp>
       <p:sp>
         <p:nvSpPr>
@@ -6925,7 +6950,7 @@
           <a:bodyPr wrap="square" lIns="0" tIns="0" rIns="0" bIns="0" rtlCol="0" anchor="ctr"/>
           <a:lstStyle/>
           <a:p>
-            <a:pPr algn="ctr" indent="0" marL="0">
+            <a:pPr marL="0" indent="0" algn="ctr">
               <a:buNone/>
             </a:pPr>
             <a:r>
@@ -6964,7 +6989,7 @@
           <a:bodyPr wrap="square" lIns="0" tIns="0" rIns="0" bIns="0" rtlCol="0" anchor="ctr"/>
           <a:lstStyle/>
           <a:p>
-            <a:pPr algn="ctr" indent="0" marL="0">
+            <a:pPr marL="0" indent="0" algn="ctr">
               <a:buNone/>
             </a:pPr>
             <a:r>
@@ -7008,6 +7033,13 @@
             <a:prstDash val="solid"/>
           </a:ln>
         </p:spPr>
+        <p:txBody>
+          <a:bodyPr/>
+          <a:lstStyle/>
+          <a:p>
+            <a:endParaRPr lang="fr-FR"/>
+          </a:p>
+        </p:txBody>
       </p:sp>
       <p:sp>
         <p:nvSpPr>
@@ -7030,7 +7062,7 @@
           <a:bodyPr wrap="square" lIns="0" tIns="0" rIns="0" bIns="0" rtlCol="0" anchor="ctr"/>
           <a:lstStyle/>
           <a:p>
-            <a:pPr algn="ctr" indent="0" marL="0">
+            <a:pPr marL="0" indent="0" algn="ctr">
               <a:buNone/>
             </a:pPr>
             <a:r>
@@ -7069,7 +7101,7 @@
           <a:bodyPr wrap="square" lIns="0" tIns="0" rIns="0" bIns="0" rtlCol="0" anchor="ctr"/>
           <a:lstStyle/>
           <a:p>
-            <a:pPr algn="ctr" indent="0" marL="0">
+            <a:pPr marL="0" indent="0" algn="ctr">
               <a:buNone/>
             </a:pPr>
             <a:r>
@@ -7113,6 +7145,13 @@
             <a:prstDash val="solid"/>
           </a:ln>
         </p:spPr>
+        <p:txBody>
+          <a:bodyPr/>
+          <a:lstStyle/>
+          <a:p>
+            <a:endParaRPr lang="fr-FR"/>
+          </a:p>
+        </p:txBody>
       </p:sp>
       <p:sp>
         <p:nvSpPr>
@@ -7135,7 +7174,7 @@
           <a:bodyPr wrap="square" lIns="0" tIns="0" rIns="0" bIns="0" rtlCol="0" anchor="ctr"/>
           <a:lstStyle/>
           <a:p>
-            <a:pPr algn="ctr" indent="0" marL="0">
+            <a:pPr marL="0" indent="0" algn="ctr">
               <a:buNone/>
             </a:pPr>
             <a:r>
@@ -7174,7 +7213,7 @@
           <a:bodyPr wrap="square" lIns="0" tIns="0" rIns="0" bIns="0" rtlCol="0" anchor="ctr"/>
           <a:lstStyle/>
           <a:p>
-            <a:pPr algn="ctr" indent="0" marL="0">
+            <a:pPr marL="0" indent="0" algn="ctr">
               <a:buNone/>
             </a:pPr>
             <a:r>
@@ -7218,6 +7257,13 @@
             <a:prstDash val="solid"/>
           </a:ln>
         </p:spPr>
+        <p:txBody>
+          <a:bodyPr/>
+          <a:lstStyle/>
+          <a:p>
+            <a:endParaRPr lang="fr-FR"/>
+          </a:p>
+        </p:txBody>
       </p:sp>
       <p:sp>
         <p:nvSpPr>
@@ -7240,7 +7286,7 @@
           <a:bodyPr wrap="square" lIns="0" tIns="0" rIns="0" bIns="0" rtlCol="0" anchor="ctr"/>
           <a:lstStyle/>
           <a:p>
-            <a:pPr algn="ctr" indent="0" marL="0">
+            <a:pPr marL="0" indent="0" algn="ctr">
               <a:buNone/>
             </a:pPr>
             <a:r>
@@ -7279,7 +7325,7 @@
           <a:bodyPr wrap="square" lIns="0" tIns="0" rIns="0" bIns="0" rtlCol="0" anchor="ctr"/>
           <a:lstStyle/>
           <a:p>
-            <a:pPr algn="l" indent="0" marL="0">
+            <a:pPr marL="0" indent="0" algn="l">
               <a:buNone/>
             </a:pPr>
             <a:r>
@@ -7318,7 +7364,7 @@
           <a:bodyPr wrap="square" lIns="0" tIns="0" rIns="0" bIns="0" rtlCol="0" anchor="ctr"/>
           <a:lstStyle/>
           <a:p>
-            <a:pPr algn="r" indent="0" marL="0">
+            <a:pPr marL="0" indent="0" algn="r">
               <a:buNone/>
             </a:pPr>
             <a:r>
@@ -7352,6 +7398,7 @@
         <a:solidFill>
           <a:srgbClr val="1A1A24"/>
         </a:solidFill>
+        <a:effectLst/>
       </p:bgPr>
     </p:bg>
     <p:spTree>
@@ -7389,11 +7436,11 @@
           <a:bodyPr wrap="square" lIns="0" tIns="0" rIns="0" bIns="0" rtlCol="0" anchor="ctr"/>
           <a:lstStyle/>
           <a:p>
-            <a:pPr algn="l" indent="0" marL="0">
-              <a:buNone/>
-            </a:pPr>
-            <a:r>
-              <a:rPr lang="en-US" sz="3200" b="1" spc="100" kern="0" dirty="0">
+            <a:pPr marL="0" indent="0" algn="l">
+              <a:buNone/>
+            </a:pPr>
+            <a:r>
+              <a:rPr lang="en-US" sz="3200" b="1" kern="0" spc="100" dirty="0">
                 <a:solidFill>
                   <a:srgbClr val="FFFFFF"/>
                 </a:solidFill>
@@ -7426,6 +7473,13 @@
           </a:solidFill>
           <a:ln/>
         </p:spPr>
+        <p:txBody>
+          <a:bodyPr/>
+          <a:lstStyle/>
+          <a:p>
+            <a:endParaRPr lang="fr-FR"/>
+          </a:p>
+        </p:txBody>
       </p:sp>
       <p:sp>
         <p:nvSpPr>
@@ -7446,6 +7500,13 @@
           </a:solidFill>
           <a:ln/>
         </p:spPr>
+        <p:txBody>
+          <a:bodyPr/>
+          <a:lstStyle/>
+          <a:p>
+            <a:endParaRPr lang="fr-FR"/>
+          </a:p>
+        </p:txBody>
       </p:sp>
       <p:sp>
         <p:nvSpPr>
@@ -7468,7 +7529,7 @@
           <a:bodyPr wrap="square" lIns="0" tIns="0" rIns="0" bIns="0" rtlCol="0" anchor="t"/>
           <a:lstStyle/>
           <a:p>
-            <a:pPr algn="l" indent="0" marL="0">
+            <a:pPr marL="0" indent="0" algn="l">
               <a:buNone/>
             </a:pPr>
             <a:r>
@@ -7482,9 +7543,6 @@
               </a:rPr>
               <a:t>Validation Zod (backend)</a:t>
             </a:r>
-            <a:pPr algn="l" indent="0" marL="0">
-              <a:buNone/>
-            </a:pPr>
             <a:r>
               <a:rPr lang="en-US" sz="1400" dirty="0">
                 <a:solidFill>
@@ -7519,6 +7577,13 @@
           </a:solidFill>
           <a:ln/>
         </p:spPr>
+        <p:txBody>
+          <a:bodyPr/>
+          <a:lstStyle/>
+          <a:p>
+            <a:endParaRPr lang="fr-FR"/>
+          </a:p>
+        </p:txBody>
       </p:sp>
       <p:sp>
         <p:nvSpPr>
@@ -7541,7 +7606,7 @@
           <a:bodyPr wrap="square" lIns="0" tIns="0" rIns="0" bIns="0" rtlCol="0" anchor="t"/>
           <a:lstStyle/>
           <a:p>
-            <a:pPr algn="l" indent="0" marL="0">
+            <a:pPr marL="0" indent="0" algn="l">
               <a:buNone/>
             </a:pPr>
             <a:r>
@@ -7555,9 +7620,6 @@
               </a:rPr>
               <a:t>Injection SQL</a:t>
             </a:r>
-            <a:pPr algn="l" indent="0" marL="0">
-              <a:buNone/>
-            </a:pPr>
             <a:r>
               <a:rPr lang="en-US" sz="1400" dirty="0">
                 <a:solidFill>
@@ -7592,6 +7654,13 @@
           </a:solidFill>
           <a:ln/>
         </p:spPr>
+        <p:txBody>
+          <a:bodyPr/>
+          <a:lstStyle/>
+          <a:p>
+            <a:endParaRPr lang="fr-FR"/>
+          </a:p>
+        </p:txBody>
       </p:sp>
       <p:sp>
         <p:nvSpPr>
@@ -7614,7 +7683,7 @@
           <a:bodyPr wrap="square" lIns="0" tIns="0" rIns="0" bIns="0" rtlCol="0" anchor="t"/>
           <a:lstStyle/>
           <a:p>
-            <a:pPr algn="l" indent="0" marL="0">
+            <a:pPr marL="0" indent="0" algn="l">
               <a:buNone/>
             </a:pPr>
             <a:r>
@@ -7628,9 +7697,6 @@
               </a:rPr>
               <a:t>Rate limiting</a:t>
             </a:r>
-            <a:pPr algn="l" indent="0" marL="0">
-              <a:buNone/>
-            </a:pPr>
             <a:r>
               <a:rPr lang="en-US" sz="1400" dirty="0">
                 <a:solidFill>
@@ -7665,6 +7731,13 @@
           </a:solidFill>
           <a:ln/>
         </p:spPr>
+        <p:txBody>
+          <a:bodyPr/>
+          <a:lstStyle/>
+          <a:p>
+            <a:endParaRPr lang="fr-FR"/>
+          </a:p>
+        </p:txBody>
       </p:sp>
       <p:sp>
         <p:nvSpPr>
@@ -7687,7 +7760,7 @@
           <a:bodyPr wrap="square" lIns="0" tIns="0" rIns="0" bIns="0" rtlCol="0" anchor="t"/>
           <a:lstStyle/>
           <a:p>
-            <a:pPr algn="l" indent="0" marL="0">
+            <a:pPr marL="0" indent="0" algn="l">
               <a:buNone/>
             </a:pPr>
             <a:r>
@@ -7701,9 +7774,6 @@
               </a:rPr>
               <a:t>Upload sécurisé</a:t>
             </a:r>
-            <a:pPr algn="l" indent="0" marL="0">
-              <a:buNone/>
-            </a:pPr>
             <a:r>
               <a:rPr lang="en-US" sz="1400" dirty="0">
                 <a:solidFill>
@@ -7738,6 +7808,13 @@
           </a:solidFill>
           <a:ln/>
         </p:spPr>
+        <p:txBody>
+          <a:bodyPr/>
+          <a:lstStyle/>
+          <a:p>
+            <a:endParaRPr lang="fr-FR"/>
+          </a:p>
+        </p:txBody>
       </p:sp>
       <p:sp>
         <p:nvSpPr>
@@ -7760,7 +7837,7 @@
           <a:bodyPr wrap="square" lIns="0" tIns="0" rIns="0" bIns="0" rtlCol="0" anchor="t"/>
           <a:lstStyle/>
           <a:p>
-            <a:pPr algn="l" indent="0" marL="0">
+            <a:pPr marL="0" indent="0" algn="l">
               <a:buNone/>
             </a:pPr>
             <a:r>
@@ -7774,9 +7851,6 @@
               </a:rPr>
               <a:t>Hachage bcrypt</a:t>
             </a:r>
-            <a:pPr algn="l" indent="0" marL="0">
-              <a:buNone/>
-            </a:pPr>
             <a:r>
               <a:rPr lang="en-US" sz="1400" dirty="0">
                 <a:solidFill>
@@ -7811,6 +7885,13 @@
           </a:solidFill>
           <a:ln/>
         </p:spPr>
+        <p:txBody>
+          <a:bodyPr/>
+          <a:lstStyle/>
+          <a:p>
+            <a:endParaRPr lang="fr-FR"/>
+          </a:p>
+        </p:txBody>
       </p:sp>
       <p:sp>
         <p:nvSpPr>
@@ -7833,7 +7914,7 @@
           <a:bodyPr wrap="square" lIns="0" tIns="0" rIns="0" bIns="0" rtlCol="0" anchor="t"/>
           <a:lstStyle/>
           <a:p>
-            <a:pPr algn="l" indent="0" marL="0">
+            <a:pPr marL="0" indent="0" algn="l">
               <a:buNone/>
             </a:pPr>
             <a:r>
@@ -7847,9 +7928,6 @@
               </a:rPr>
               <a:t>CORS</a:t>
             </a:r>
-            <a:pPr algn="l" indent="0" marL="0">
-              <a:buNone/>
-            </a:pPr>
             <a:r>
               <a:rPr lang="en-US" sz="1400" dirty="0">
                 <a:solidFill>
@@ -7884,6 +7962,13 @@
           </a:solidFill>
           <a:ln/>
         </p:spPr>
+        <p:txBody>
+          <a:bodyPr/>
+          <a:lstStyle/>
+          <a:p>
+            <a:endParaRPr lang="fr-FR"/>
+          </a:p>
+        </p:txBody>
       </p:sp>
       <p:sp>
         <p:nvSpPr>
@@ -7906,7 +7991,7 @@
           <a:bodyPr wrap="square" lIns="0" tIns="0" rIns="0" bIns="0" rtlCol="0" anchor="t"/>
           <a:lstStyle/>
           <a:p>
-            <a:pPr algn="l" indent="0" marL="0">
+            <a:pPr marL="0" indent="0" algn="l">
               <a:buNone/>
             </a:pPr>
             <a:r>
@@ -7920,9 +8005,6 @@
               </a:rPr>
               <a:t>Secrets hors code</a:t>
             </a:r>
-            <a:pPr algn="l" indent="0" marL="0">
-              <a:buNone/>
-            </a:pPr>
             <a:r>
               <a:rPr lang="en-US" sz="1400" dirty="0">
                 <a:solidFill>
@@ -7959,7 +8041,7 @@
           <a:bodyPr wrap="square" lIns="0" tIns="0" rIns="0" bIns="0" rtlCol="0" anchor="ctr"/>
           <a:lstStyle/>
           <a:p>
-            <a:pPr algn="l" indent="0" marL="0">
+            <a:pPr marL="0" indent="0" algn="l">
               <a:buNone/>
             </a:pPr>
             <a:r>
@@ -7998,7 +8080,7 @@
           <a:bodyPr wrap="square" lIns="0" tIns="0" rIns="0" bIns="0" rtlCol="0" anchor="ctr"/>
           <a:lstStyle/>
           <a:p>
-            <a:pPr algn="r" indent="0" marL="0">
+            <a:pPr marL="0" indent="0" algn="r">
               <a:buNone/>
             </a:pPr>
             <a:r>
@@ -8032,6 +8114,7 @@
         <a:solidFill>
           <a:srgbClr val="1A1A24"/>
         </a:solidFill>
+        <a:effectLst/>
       </p:bgPr>
     </p:bg>
     <p:spTree>
@@ -8069,11 +8152,11 @@
           <a:bodyPr wrap="square" lIns="0" tIns="0" rIns="0" bIns="0" rtlCol="0" anchor="ctr"/>
           <a:lstStyle/>
           <a:p>
-            <a:pPr algn="l" indent="0" marL="0">
-              <a:buNone/>
-            </a:pPr>
-            <a:r>
-              <a:rPr lang="en-US" sz="3200" b="1" spc="100" kern="0" dirty="0">
+            <a:pPr marL="0" indent="0" algn="l">
+              <a:buNone/>
+            </a:pPr>
+            <a:r>
+              <a:rPr lang="en-US" sz="3200" b="1" kern="0" spc="100" dirty="0">
                 <a:solidFill>
                   <a:srgbClr val="FFFFFF"/>
                 </a:solidFill>
@@ -8106,6 +8189,13 @@
           </a:solidFill>
           <a:ln/>
         </p:spPr>
+        <p:txBody>
+          <a:bodyPr/>
+          <a:lstStyle/>
+          <a:p>
+            <a:endParaRPr lang="fr-FR"/>
+          </a:p>
+        </p:txBody>
       </p:sp>
       <p:sp>
         <p:nvSpPr>
@@ -8128,11 +8218,11 @@
           <a:bodyPr wrap="square" lIns="0" tIns="0" rIns="0" bIns="0" rtlCol="0" anchor="ctr"/>
           <a:lstStyle/>
           <a:p>
-            <a:pPr algn="l" indent="0" marL="0">
-              <a:buNone/>
-            </a:pPr>
-            <a:r>
-              <a:rPr lang="en-US" sz="1500" b="1" spc="100" kern="0" dirty="0">
+            <a:pPr marL="0" indent="0" algn="l">
+              <a:buNone/>
+            </a:pPr>
+            <a:r>
+              <a:rPr lang="en-US" sz="1500" b="1" kern="0" spc="100" dirty="0">
                 <a:solidFill>
                   <a:srgbClr val="C1121F"/>
                 </a:solidFill>
@@ -8170,6 +8260,13 @@
             <a:prstDash val="solid"/>
           </a:ln>
         </p:spPr>
+        <p:txBody>
+          <a:bodyPr/>
+          <a:lstStyle/>
+          <a:p>
+            <a:endParaRPr lang="fr-FR"/>
+          </a:p>
+        </p:txBody>
       </p:sp>
       <p:sp>
         <p:nvSpPr>
@@ -8192,7 +8289,7 @@
           <a:bodyPr wrap="square" lIns="0" tIns="0" rIns="0" bIns="0" rtlCol="0" anchor="ctr"/>
           <a:lstStyle/>
           <a:p>
-            <a:pPr algn="ctr" indent="0" marL="0">
+            <a:pPr marL="0" indent="0" algn="ctr">
               <a:buNone/>
             </a:pPr>
             <a:r>
@@ -8234,6 +8331,13 @@
             <a:prstDash val="solid"/>
           </a:ln>
         </p:spPr>
+        <p:txBody>
+          <a:bodyPr/>
+          <a:lstStyle/>
+          <a:p>
+            <a:endParaRPr lang="fr-FR"/>
+          </a:p>
+        </p:txBody>
       </p:sp>
       <p:sp>
         <p:nvSpPr>
@@ -8256,7 +8360,7 @@
           <a:bodyPr wrap="square" lIns="0" tIns="0" rIns="0" bIns="0" rtlCol="0" anchor="ctr"/>
           <a:lstStyle/>
           <a:p>
-            <a:pPr algn="ctr" indent="0" marL="0">
+            <a:pPr marL="0" indent="0" algn="ctr">
               <a:buNone/>
             </a:pPr>
             <a:r>
@@ -8298,6 +8402,13 @@
             <a:prstDash val="solid"/>
           </a:ln>
         </p:spPr>
+        <p:txBody>
+          <a:bodyPr/>
+          <a:lstStyle/>
+          <a:p>
+            <a:endParaRPr lang="fr-FR"/>
+          </a:p>
+        </p:txBody>
       </p:sp>
       <p:sp>
         <p:nvSpPr>
@@ -8320,7 +8431,7 @@
           <a:bodyPr wrap="square" lIns="0" tIns="0" rIns="0" bIns="0" rtlCol="0" anchor="ctr"/>
           <a:lstStyle/>
           <a:p>
-            <a:pPr algn="ctr" indent="0" marL="0">
+            <a:pPr marL="0" indent="0" algn="ctr">
               <a:buNone/>
             </a:pPr>
             <a:r>
@@ -8359,7 +8470,7 @@
           <a:bodyPr wrap="square" lIns="0" tIns="0" rIns="0" bIns="0" rtlCol="0" anchor="ctr"/>
           <a:lstStyle/>
           <a:p>
-            <a:pPr algn="ctr" indent="0" marL="0">
+            <a:pPr marL="0" indent="0" algn="ctr">
               <a:buNone/>
             </a:pPr>
             <a:r>
@@ -8379,14 +8490,14 @@
       </p:sp>
       <p:sp>
         <p:nvSpPr>
-          <p:cNvPr id="12" name="Text 10"/>
-          <p:cNvSpPr/>
-          <p:nvPr/>
-        </p:nvSpPr>
-        <p:spPr>
-          <a:xfrm>
-            <a:off x="5852160" y="1965960"/>
-            <a:ext cx="1828800" cy="822960"/>
+          <p:cNvPr id="13" name="Text 11"/>
+          <p:cNvSpPr/>
+          <p:nvPr/>
+        </p:nvSpPr>
+        <p:spPr>
+          <a:xfrm>
+            <a:off x="5833872" y="4817969"/>
+            <a:ext cx="5669280" cy="1000000"/>
           </a:xfrm>
           <a:prstGeom prst="rect">
             <a:avLst/>
@@ -8398,34 +8509,34 @@
           <a:bodyPr wrap="square" lIns="0" tIns="0" rIns="0" bIns="0" rtlCol="0" anchor="ctr"/>
           <a:lstStyle/>
           <a:p>
-            <a:pPr algn="l" indent="0" marL="0">
-              <a:buNone/>
-            </a:pPr>
-            <a:r>
-              <a:rPr lang="en-US" sz="4600" b="1" dirty="0">
-                <a:solidFill>
-                  <a:srgbClr val="C1121F"/>
-                </a:solidFill>
-                <a:latin typeface="Oswald" pitchFamily="34" charset="0"/>
-                <a:ea typeface="Oswald" pitchFamily="34" charset="-122"/>
-                <a:cs typeface="Oswald" pitchFamily="34" charset="-120"/>
-              </a:rPr>
-              <a:t>241</a:t>
-            </a:r>
-            <a:endParaRPr lang="en-US" sz="4600" dirty="0"/>
-          </a:p>
-        </p:txBody>
-      </p:sp>
-      <p:sp>
-        <p:nvSpPr>
-          <p:cNvPr id="13" name="Text 11"/>
-          <p:cNvSpPr/>
-          <p:nvPr/>
-        </p:nvSpPr>
-        <p:spPr>
-          <a:xfrm>
-            <a:off x="7635240" y="2331720"/>
-            <a:ext cx="3657600" cy="457200"/>
+            <a:pPr marL="0" indent="0" algn="l">
+              <a:buNone/>
+            </a:pPr>
+            <a:r>
+              <a:rPr lang="en-US" sz="1100" b="0" dirty="0">
+                <a:solidFill>
+                  <a:srgbClr val="E8B439"/>
+                </a:solidFill>
+                <a:latin typeface="Inter" pitchFamily="34" charset="0"/>
+                <a:ea typeface="Inter" pitchFamily="34" charset="-122"/>
+                <a:cs typeface="Inter" pitchFamily="34" charset="-120"/>
+              </a:rPr>
+              <a:t>Tous les cas passent. Écart mineur — cas 409 (ARTIST_FEATURED_LIMIT) : le test vérifie le code et le message, mais pas la suppression effective du fichier image sur le disque. Piste d'amélioration future.</a:t>
+            </a:r>
+            <a:endParaRPr lang="en-US" sz="1800" dirty="0"/>
+          </a:p>
+        </p:txBody>
+      </p:sp>
+      <p:sp>
+        <p:nvSpPr>
+          <p:cNvPr id="14" name="Text 12"/>
+          <p:cNvSpPr/>
+          <p:nvPr/>
+        </p:nvSpPr>
+        <p:spPr>
+          <a:xfrm>
+            <a:off x="5833872" y="2046849"/>
+            <a:ext cx="5669280" cy="457200"/>
           </a:xfrm>
           <a:prstGeom prst="rect">
             <a:avLst/>
@@ -8437,33 +8548,33 @@
           <a:bodyPr wrap="square" lIns="0" tIns="0" rIns="0" bIns="0" rtlCol="0" anchor="ctr"/>
           <a:lstStyle/>
           <a:p>
-            <a:pPr algn="l" indent="0" marL="0">
-              <a:buNone/>
-            </a:pPr>
-            <a:r>
-              <a:rPr lang="en-US" sz="1800" dirty="0">
-                <a:solidFill>
-                  <a:srgbClr val="FFFFFF"/>
-                </a:solidFill>
-                <a:latin typeface="Inter" pitchFamily="34" charset="0"/>
-                <a:ea typeface="Inter" pitchFamily="34" charset="-122"/>
-                <a:cs typeface="Inter" pitchFamily="34" charset="-120"/>
-              </a:rPr>
-              <a:t>tests passés</a:t>
-            </a:r>
-            <a:endParaRPr lang="en-US" sz="1800" dirty="0"/>
-          </a:p>
-        </p:txBody>
-      </p:sp>
-      <p:sp>
-        <p:nvSpPr>
-          <p:cNvPr id="14" name="Text 12"/>
-          <p:cNvSpPr/>
-          <p:nvPr/>
-        </p:nvSpPr>
-        <p:spPr>
-          <a:xfrm>
-            <a:off x="5870448" y="2788920"/>
+            <a:pPr marL="0" indent="0" algn="l">
+              <a:buNone/>
+            </a:pPr>
+            <a:r>
+              <a:rPr lang="en-US" sz="1100" b="0" dirty="0">
+                <a:solidFill>
+                  <a:srgbClr val="C7C7D1"/>
+                </a:solidFill>
+                <a:latin typeface="Inter" pitchFamily="34" charset="0"/>
+                <a:ea typeface="Inter" pitchFamily="34" charset="-122"/>
+                <a:cs typeface="Inter" pitchFamily="34" charset="-120"/>
+              </a:rPr>
+              <a:t>Fonctionnalité la plus représentative : upload multipart · validation Zod · conversion sharp/WebP · écriture transactionnelle (artists + concerts). Données extraites du test d'intégration réel (Vitest + Supertest).</a:t>
+            </a:r>
+            <a:endParaRPr lang="en-US" sz="1300" dirty="0"/>
+          </a:p>
+        </p:txBody>
+      </p:sp>
+      <p:sp>
+        <p:nvSpPr>
+          <p:cNvPr id="15" name="Text 13"/>
+          <p:cNvSpPr/>
+          <p:nvPr/>
+        </p:nvSpPr>
+        <p:spPr>
+          <a:xfrm>
+            <a:off x="5833872" y="1726809"/>
             <a:ext cx="5669280" cy="320040"/>
           </a:xfrm>
           <a:prstGeom prst="rect">
@@ -8476,50 +8587,11 @@
           <a:bodyPr wrap="square" lIns="0" tIns="0" rIns="0" bIns="0" rtlCol="0" anchor="ctr"/>
           <a:lstStyle/>
           <a:p>
-            <a:pPr algn="l" indent="0" marL="0">
-              <a:buNone/>
-            </a:pPr>
-            <a:r>
-              <a:rPr lang="en-US" sz="1300" dirty="0">
-                <a:solidFill>
-                  <a:srgbClr val="C7C7D1"/>
-                </a:solidFill>
-                <a:latin typeface="Inter" pitchFamily="34" charset="0"/>
-                <a:ea typeface="Inter" pitchFamily="34" charset="-122"/>
-                <a:cs typeface="Inter" pitchFamily="34" charset="-120"/>
-              </a:rPr>
-              <a:t>backend 132 · frontend 109 · 39 fichiers · aucune régression</a:t>
-            </a:r>
-            <a:endParaRPr lang="en-US" sz="1300" dirty="0"/>
-          </a:p>
-        </p:txBody>
-      </p:sp>
-      <p:sp>
-        <p:nvSpPr>
-          <p:cNvPr id="15" name="Text 13"/>
-          <p:cNvSpPr/>
-          <p:nvPr/>
-        </p:nvSpPr>
-        <p:spPr>
-          <a:xfrm>
-            <a:off x="5852160" y="3383280"/>
-            <a:ext cx="5029200" cy="320040"/>
-          </a:xfrm>
-          <a:prstGeom prst="rect">
-            <a:avLst/>
-          </a:prstGeom>
-          <a:noFill/>
-          <a:ln/>
-        </p:spPr>
-        <p:txBody>
-          <a:bodyPr wrap="square" lIns="0" tIns="0" rIns="0" bIns="0" rtlCol="0" anchor="ctr"/>
-          <a:lstStyle/>
-          <a:p>
-            <a:pPr algn="l" indent="0" marL="0">
-              <a:buNone/>
-            </a:pPr>
-            <a:r>
-              <a:rPr lang="en-US" sz="1500" b="1" spc="100" kern="0" dirty="0">
+            <a:pPr marL="0" indent="0" algn="l">
+              <a:buNone/>
+            </a:pPr>
+            <a:r>
+              <a:rPr lang="en-US" sz="1500" b="1" kern="0" spc="100" dirty="0">
                 <a:solidFill>
                   <a:srgbClr val="C1121F"/>
                 </a:solidFill>
@@ -8542,31 +8614,49 @@
           <p:nvPr>
             <p:extLst>
               <p:ext uri="{D42A27DB-BD31-4B8C-83A1-F6EECF244321}">
-                <p14:modId xmlns:p14="http://schemas.microsoft.com/office/powerpoint/2010/main" val="1579011935"/>
+                <p14:modId xmlns:p14="http://schemas.microsoft.com/office/powerpoint/2010/main" val="2740082065"/>
               </p:ext>
             </p:extLst>
           </p:nvPr>
         </p:nvGraphicFramePr>
         <p:xfrm>
-          <a:off x="5852160" y="3794760"/>
-          <a:ext cx="5669280" cy="914400"/>
+          <a:off x="5833872" y="2549769"/>
+          <a:ext cx="5669280" cy="2080260"/>
         </p:xfrm>
         <a:graphic>
           <a:graphicData uri="http://schemas.openxmlformats.org/drawingml/2006/table">
             <a:tbl>
               <a:tblPr/>
               <a:tblGrid>
-                <a:gridCol w="2377440"/>
-                <a:gridCol w="1828800"/>
-                <a:gridCol w="1463040"/>
+                <a:gridCol w="2377440">
+                  <a:extLst>
+                    <a:ext uri="{9D8B030D-6E8A-4147-A177-3AD203B41FA5}">
+                      <a16:colId xmlns:a16="http://schemas.microsoft.com/office/drawing/2014/main" val="20000"/>
+                    </a:ext>
+                  </a:extLst>
+                </a:gridCol>
+                <a:gridCol w="1828800">
+                  <a:extLst>
+                    <a:ext uri="{9D8B030D-6E8A-4147-A177-3AD203B41FA5}">
+                      <a16:colId xmlns:a16="http://schemas.microsoft.com/office/drawing/2014/main" val="20001"/>
+                    </a:ext>
+                  </a:extLst>
+                </a:gridCol>
+                <a:gridCol w="1463040">
+                  <a:extLst>
+                    <a:ext uri="{9D8B030D-6E8A-4147-A177-3AD203B41FA5}">
+                      <a16:colId xmlns:a16="http://schemas.microsoft.com/office/drawing/2014/main" val="20002"/>
+                    </a:ext>
+                  </a:extLst>
+                </a:gridCol>
               </a:tblGrid>
-              <a:tr h="457200">
+              <a:tr h="297180">
                 <a:tc>
                   <a:txBody>
                     <a:bodyPr/>
                     <a:lstStyle/>
                     <a:p>
-                      <a:pPr algn="l" indent="0" marL="0">
+                      <a:pPr marL="0" indent="0" algn="l">
                         <a:buNone/>
                       </a:pPr>
                       <a:r>
@@ -8634,7 +8724,7 @@
                     <a:bodyPr/>
                     <a:lstStyle/>
                     <a:p>
-                      <a:pPr algn="l" indent="0" marL="0">
+                      <a:pPr marL="0" indent="0" algn="l">
                         <a:buNone/>
                       </a:pPr>
                       <a:r>
@@ -8702,7 +8792,7 @@
                     <a:bodyPr/>
                     <a:lstStyle/>
                     <a:p>
-                      <a:pPr algn="l" indent="0" marL="0">
+                      <a:pPr marL="0" indent="0" algn="l">
                         <a:buNone/>
                       </a:pPr>
                       <a:r>
@@ -8765,14 +8855,19 @@
                     </a:solidFill>
                   </a:tcPr>
                 </a:tc>
+                <a:extLst>
+                  <a:ext uri="{0D108BD9-81ED-4DB2-BD59-A6C34878D82A}">
+                    <a16:rowId xmlns:a16="http://schemas.microsoft.com/office/drawing/2014/main" val="10000"/>
+                  </a:ext>
+                </a:extLst>
               </a:tr>
-              <a:tr h="457200">
+              <a:tr h="297180">
                 <a:tc>
                   <a:txBody>
                     <a:bodyPr/>
                     <a:lstStyle/>
                     <a:p>
-                      <a:pPr algn="l" indent="0" marL="0">
+                      <a:pPr marL="0" indent="0" algn="l">
                         <a:buNone/>
                       </a:pPr>
                       <a:r>
@@ -8840,7 +8935,7 @@
                     <a:bodyPr/>
                     <a:lstStyle/>
                     <a:p>
-                      <a:pPr algn="l" indent="0" marL="0">
+                      <a:pPr marL="0" indent="0" algn="l">
                         <a:buNone/>
                       </a:pPr>
                       <a:r>
@@ -8908,7 +9003,7 @@
                     <a:bodyPr/>
                     <a:lstStyle/>
                     <a:p>
-                      <a:pPr algn="l" indent="0" marL="0">
+                      <a:pPr marL="0" indent="0" algn="l">
                         <a:buNone/>
                       </a:pPr>
                       <a:r>
@@ -8971,14 +9066,19 @@
                     </a:solidFill>
                   </a:tcPr>
                 </a:tc>
+                <a:extLst>
+                  <a:ext uri="{0D108BD9-81ED-4DB2-BD59-A6C34878D82A}">
+                    <a16:rowId xmlns:a16="http://schemas.microsoft.com/office/drawing/2014/main" val="10001"/>
+                  </a:ext>
+                </a:extLst>
               </a:tr>
-              <a:tr h="457200">
+              <a:tr h="297180">
                 <a:tc>
                   <a:txBody>
                     <a:bodyPr/>
                     <a:lstStyle/>
                     <a:p>
-                      <a:pPr algn="l" indent="0" marL="0">
+                      <a:pPr marL="0" indent="0" algn="l">
                         <a:buNone/>
                       </a:pPr>
                       <a:r>
@@ -9046,7 +9146,7 @@
                     <a:bodyPr/>
                     <a:lstStyle/>
                     <a:p>
-                      <a:pPr algn="l" indent="0" marL="0">
+                      <a:pPr marL="0" indent="0" algn="l">
                         <a:buNone/>
                       </a:pPr>
                       <a:r>
@@ -9114,7 +9214,7 @@
                     <a:bodyPr/>
                     <a:lstStyle/>
                     <a:p>
-                      <a:pPr algn="l" indent="0" marL="0">
+                      <a:pPr marL="0" indent="0" algn="l">
                         <a:buNone/>
                       </a:pPr>
                       <a:r>
@@ -9177,6 +9277,855 @@
                     </a:solidFill>
                   </a:tcPr>
                 </a:tc>
+                <a:extLst>
+                  <a:ext uri="{0D108BD9-81ED-4DB2-BD59-A6C34878D82A}">
+                    <a16:rowId xmlns:a16="http://schemas.microsoft.com/office/drawing/2014/main" val="10002"/>
+                  </a:ext>
+                </a:extLst>
+              </a:tr>
+              <a:tr h="297180">
+                <a:tc>
+                  <a:txBody>
+                    <a:bodyPr/>
+                    <a:lstStyle/>
+                    <a:p>
+                      <a:pPr marL="0" indent="0" algn="l">
+                        <a:buNone/>
+                      </a:pPr>
+                      <a:r>
+                        <a:rPr lang="en-US" sz="1300" dirty="0">
+                          <a:solidFill>
+                            <a:srgbClr val="C7C7D1"/>
+                          </a:solidFill>
+                          <a:latin typeface="Inter" pitchFamily="34" charset="0"/>
+                          <a:ea typeface="Inter" pitchFamily="34" charset="-122"/>
+                          <a:cs typeface="Inter" pitchFamily="34" charset="-120"/>
+                        </a:rPr>
+                        <a:t>Corps invalide (Zod)</a:t>
+                      </a:r>
+                      <a:endParaRPr lang="en-US" sz="1300" dirty="0">
+                        <a:latin typeface="Inter" charset="0"/>
+                        <a:ea typeface="Inter" charset="0"/>
+                        <a:cs typeface="Inter" charset="0"/>
+                      </a:endParaRPr>
+                    </a:p>
+                  </a:txBody>
+                  <a:tcPr marL="101600" marR="101600" marT="25400" marB="25400" anchor="ctr">
+                    <a:lnL w="12700" cap="flat" cmpd="sng" algn="ctr">
+                      <a:solidFill>
+                        <a:srgbClr val="2E2E3C"/>
+                      </a:solidFill>
+                      <a:prstDash val="solid"/>
+                      <a:round/>
+                      <a:headEnd type="none" w="med" len="med"/>
+                      <a:tailEnd type="none" w="med" len="med"/>
+                    </a:lnL>
+                    <a:lnR w="12700" cap="flat" cmpd="sng" algn="ctr">
+                      <a:solidFill>
+                        <a:srgbClr val="2E2E3C"/>
+                      </a:solidFill>
+                      <a:prstDash val="solid"/>
+                      <a:round/>
+                      <a:headEnd type="none" w="med" len="med"/>
+                      <a:tailEnd type="none" w="med" len="med"/>
+                    </a:lnR>
+                    <a:lnT w="12700" cap="flat" cmpd="sng" algn="ctr">
+                      <a:solidFill>
+                        <a:srgbClr val="2E2E3C"/>
+                      </a:solidFill>
+                      <a:prstDash val="solid"/>
+                      <a:round/>
+                      <a:headEnd type="none" w="med" len="med"/>
+                      <a:tailEnd type="none" w="med" len="med"/>
+                    </a:lnT>
+                    <a:lnB w="12700" cap="flat" cmpd="sng" algn="ctr">
+                      <a:solidFill>
+                        <a:srgbClr val="2E2E3C"/>
+                      </a:solidFill>
+                      <a:prstDash val="solid"/>
+                      <a:round/>
+                      <a:headEnd type="none" w="med" len="med"/>
+                      <a:tailEnd type="none" w="med" len="med"/>
+                    </a:lnB>
+                    <a:solidFill>
+                      <a:srgbClr val="1A1A24"/>
+                    </a:solidFill>
+                  </a:tcPr>
+                </a:tc>
+                <a:tc>
+                  <a:txBody>
+                    <a:bodyPr/>
+                    <a:lstStyle/>
+                    <a:p>
+                      <a:pPr marL="0" indent="0" algn="l">
+                        <a:buNone/>
+                      </a:pPr>
+                      <a:r>
+                        <a:rPr lang="en-US" sz="1300" dirty="0">
+                          <a:solidFill>
+                            <a:srgbClr val="C7C7D1"/>
+                          </a:solidFill>
+                          <a:latin typeface="Inter" pitchFamily="34" charset="0"/>
+                          <a:ea typeface="Inter" pitchFamily="34" charset="-122"/>
+                          <a:cs typeface="Inter" pitchFamily="34" charset="-120"/>
+                        </a:rPr>
+                        <a:t>HTTP 400</a:t>
+                      </a:r>
+                      <a:endParaRPr lang="en-US" sz="1300" dirty="0">
+                        <a:latin typeface="Inter" charset="0"/>
+                        <a:ea typeface="Inter" charset="0"/>
+                        <a:cs typeface="Inter" charset="0"/>
+                      </a:endParaRPr>
+                    </a:p>
+                  </a:txBody>
+                  <a:tcPr marL="101600" marR="101600" marT="25400" marB="25400" anchor="ctr">
+                    <a:lnL w="12700" cap="flat" cmpd="sng" algn="ctr">
+                      <a:solidFill>
+                        <a:srgbClr val="2E2E3C"/>
+                      </a:solidFill>
+                      <a:prstDash val="solid"/>
+                      <a:round/>
+                      <a:headEnd type="none" w="med" len="med"/>
+                      <a:tailEnd type="none" w="med" len="med"/>
+                    </a:lnL>
+                    <a:lnR w="12700" cap="flat" cmpd="sng" algn="ctr">
+                      <a:solidFill>
+                        <a:srgbClr val="2E2E3C"/>
+                      </a:solidFill>
+                      <a:prstDash val="solid"/>
+                      <a:round/>
+                      <a:headEnd type="none" w="med" len="med"/>
+                      <a:tailEnd type="none" w="med" len="med"/>
+                    </a:lnR>
+                    <a:lnT w="12700" cap="flat" cmpd="sng" algn="ctr">
+                      <a:solidFill>
+                        <a:srgbClr val="2E2E3C"/>
+                      </a:solidFill>
+                      <a:prstDash val="solid"/>
+                      <a:round/>
+                      <a:headEnd type="none" w="med" len="med"/>
+                      <a:tailEnd type="none" w="med" len="med"/>
+                    </a:lnT>
+                    <a:lnB w="12700" cap="flat" cmpd="sng" algn="ctr">
+                      <a:solidFill>
+                        <a:srgbClr val="2E2E3C"/>
+                      </a:solidFill>
+                      <a:prstDash val="solid"/>
+                      <a:round/>
+                      <a:headEnd type="none" w="med" len="med"/>
+                      <a:tailEnd type="none" w="med" len="med"/>
+                    </a:lnB>
+                    <a:solidFill>
+                      <a:srgbClr val="1A1A24"/>
+                    </a:solidFill>
+                  </a:tcPr>
+                </a:tc>
+                <a:tc>
+                  <a:txBody>
+                    <a:bodyPr/>
+                    <a:lstStyle/>
+                    <a:p>
+                      <a:pPr marL="0" indent="0" algn="l">
+                        <a:buNone/>
+                      </a:pPr>
+                      <a:r>
+                        <a:rPr lang="en-US" sz="1300" dirty="0">
+                          <a:solidFill>
+                            <a:srgbClr val="C1121F"/>
+                          </a:solidFill>
+                          <a:latin typeface="Inter" pitchFamily="34" charset="0"/>
+                          <a:ea typeface="Inter" pitchFamily="34" charset="-122"/>
+                          <a:cs typeface="Inter" pitchFamily="34" charset="-120"/>
+                        </a:rPr>
+                        <a:t>400 ✓</a:t>
+                      </a:r>
+                      <a:endParaRPr lang="en-US" sz="1300" dirty="0">
+                        <a:latin typeface="Inter" charset="0"/>
+                        <a:ea typeface="Inter" charset="0"/>
+                        <a:cs typeface="Inter" charset="0"/>
+                      </a:endParaRPr>
+                    </a:p>
+                  </a:txBody>
+                  <a:tcPr marL="101600" marR="101600" marT="25400" marB="25400" anchor="ctr">
+                    <a:lnL w="12700" cap="flat" cmpd="sng" algn="ctr">
+                      <a:solidFill>
+                        <a:srgbClr val="2E2E3C"/>
+                      </a:solidFill>
+                      <a:prstDash val="solid"/>
+                      <a:round/>
+                      <a:headEnd type="none" w="med" len="med"/>
+                      <a:tailEnd type="none" w="med" len="med"/>
+                    </a:lnL>
+                    <a:lnR w="12700" cap="flat" cmpd="sng" algn="ctr">
+                      <a:solidFill>
+                        <a:srgbClr val="2E2E3C"/>
+                      </a:solidFill>
+                      <a:prstDash val="solid"/>
+                      <a:round/>
+                      <a:headEnd type="none" w="med" len="med"/>
+                      <a:tailEnd type="none" w="med" len="med"/>
+                    </a:lnR>
+                    <a:lnT w="12700" cap="flat" cmpd="sng" algn="ctr">
+                      <a:solidFill>
+                        <a:srgbClr val="2E2E3C"/>
+                      </a:solidFill>
+                      <a:prstDash val="solid"/>
+                      <a:round/>
+                      <a:headEnd type="none" w="med" len="med"/>
+                      <a:tailEnd type="none" w="med" len="med"/>
+                    </a:lnT>
+                    <a:lnB w="12700" cap="flat" cmpd="sng" algn="ctr">
+                      <a:solidFill>
+                        <a:srgbClr val="2E2E3C"/>
+                      </a:solidFill>
+                      <a:prstDash val="solid"/>
+                      <a:round/>
+                      <a:headEnd type="none" w="med" len="med"/>
+                      <a:tailEnd type="none" w="med" len="med"/>
+                    </a:lnB>
+                    <a:solidFill>
+                      <a:srgbClr val="1A1A24"/>
+                    </a:solidFill>
+                  </a:tcPr>
+                </a:tc>
+                <a:extLst>
+                  <a:ext uri="{0D108BD9-81ED-4DB2-BD59-A6C34878D82A}">
+                    <a16:rowId xmlns:a16="http://schemas.microsoft.com/office/drawing/2014/main" val="363351719"/>
+                  </a:ext>
+                </a:extLst>
+              </a:tr>
+              <a:tr h="297180">
+                <a:tc>
+                  <a:txBody>
+                    <a:bodyPr/>
+                    <a:lstStyle/>
+                    <a:p>
+                      <a:pPr marL="0" indent="0" algn="l">
+                        <a:buNone/>
+                      </a:pPr>
+                      <a:r>
+                        <a:rPr lang="en-US" sz="1300" dirty="0">
+                          <a:solidFill>
+                            <a:srgbClr val="C7C7D1"/>
+                          </a:solidFill>
+                          <a:latin typeface="Inter" pitchFamily="34" charset="0"/>
+                          <a:ea typeface="Inter" pitchFamily="34" charset="-122"/>
+                          <a:cs typeface="Inter" pitchFamily="34" charset="-120"/>
+                        </a:rPr>
+                        <a:t>3ᵉ « featured »</a:t>
+                      </a:r>
+                      <a:endParaRPr lang="en-US" sz="1300" dirty="0">
+                        <a:latin typeface="Inter" charset="0"/>
+                        <a:ea typeface="Inter" charset="0"/>
+                        <a:cs typeface="Inter" charset="0"/>
+                      </a:endParaRPr>
+                    </a:p>
+                  </a:txBody>
+                  <a:tcPr marL="101600" marR="101600" marT="25400" marB="25400" anchor="ctr">
+                    <a:lnL w="12700" cap="flat" cmpd="sng" algn="ctr">
+                      <a:solidFill>
+                        <a:srgbClr val="2E2E3C"/>
+                      </a:solidFill>
+                      <a:prstDash val="solid"/>
+                      <a:round/>
+                      <a:headEnd type="none" w="med" len="med"/>
+                      <a:tailEnd type="none" w="med" len="med"/>
+                    </a:lnL>
+                    <a:lnR w="12700" cap="flat" cmpd="sng" algn="ctr">
+                      <a:solidFill>
+                        <a:srgbClr val="2E2E3C"/>
+                      </a:solidFill>
+                      <a:prstDash val="solid"/>
+                      <a:round/>
+                      <a:headEnd type="none" w="med" len="med"/>
+                      <a:tailEnd type="none" w="med" len="med"/>
+                    </a:lnR>
+                    <a:lnT w="12700" cap="flat" cmpd="sng" algn="ctr">
+                      <a:solidFill>
+                        <a:srgbClr val="2E2E3C"/>
+                      </a:solidFill>
+                      <a:prstDash val="solid"/>
+                      <a:round/>
+                      <a:headEnd type="none" w="med" len="med"/>
+                      <a:tailEnd type="none" w="med" len="med"/>
+                    </a:lnT>
+                    <a:lnB w="12700" cap="flat" cmpd="sng" algn="ctr">
+                      <a:solidFill>
+                        <a:srgbClr val="2E2E3C"/>
+                      </a:solidFill>
+                      <a:prstDash val="solid"/>
+                      <a:round/>
+                      <a:headEnd type="none" w="med" len="med"/>
+                      <a:tailEnd type="none" w="med" len="med"/>
+                    </a:lnB>
+                    <a:solidFill>
+                      <a:srgbClr val="1A1A24"/>
+                    </a:solidFill>
+                  </a:tcPr>
+                </a:tc>
+                <a:tc>
+                  <a:txBody>
+                    <a:bodyPr/>
+                    <a:lstStyle/>
+                    <a:p>
+                      <a:pPr marL="0" indent="0" algn="l">
+                        <a:buNone/>
+                      </a:pPr>
+                      <a:r>
+                        <a:rPr lang="en-US" sz="1300" dirty="0">
+                          <a:solidFill>
+                            <a:srgbClr val="C7C7D1"/>
+                          </a:solidFill>
+                          <a:latin typeface="Inter" pitchFamily="34" charset="0"/>
+                          <a:ea typeface="Inter" pitchFamily="34" charset="-122"/>
+                          <a:cs typeface="Inter" pitchFamily="34" charset="-120"/>
+                        </a:rPr>
+                        <a:t>HTTP 409</a:t>
+                      </a:r>
+                      <a:endParaRPr lang="en-US" sz="1300" dirty="0">
+                        <a:latin typeface="Inter" charset="0"/>
+                        <a:ea typeface="Inter" charset="0"/>
+                        <a:cs typeface="Inter" charset="0"/>
+                      </a:endParaRPr>
+                    </a:p>
+                  </a:txBody>
+                  <a:tcPr marL="101600" marR="101600" marT="25400" marB="25400" anchor="ctr">
+                    <a:lnL w="12700" cap="flat" cmpd="sng" algn="ctr">
+                      <a:solidFill>
+                        <a:srgbClr val="2E2E3C"/>
+                      </a:solidFill>
+                      <a:prstDash val="solid"/>
+                      <a:round/>
+                      <a:headEnd type="none" w="med" len="med"/>
+                      <a:tailEnd type="none" w="med" len="med"/>
+                    </a:lnL>
+                    <a:lnR w="12700" cap="flat" cmpd="sng" algn="ctr">
+                      <a:solidFill>
+                        <a:srgbClr val="2E2E3C"/>
+                      </a:solidFill>
+                      <a:prstDash val="solid"/>
+                      <a:round/>
+                      <a:headEnd type="none" w="med" len="med"/>
+                      <a:tailEnd type="none" w="med" len="med"/>
+                    </a:lnR>
+                    <a:lnT w="12700" cap="flat" cmpd="sng" algn="ctr">
+                      <a:solidFill>
+                        <a:srgbClr val="2E2E3C"/>
+                      </a:solidFill>
+                      <a:prstDash val="solid"/>
+                      <a:round/>
+                      <a:headEnd type="none" w="med" len="med"/>
+                      <a:tailEnd type="none" w="med" len="med"/>
+                    </a:lnT>
+                    <a:lnB w="12700" cap="flat" cmpd="sng" algn="ctr">
+                      <a:solidFill>
+                        <a:srgbClr val="2E2E3C"/>
+                      </a:solidFill>
+                      <a:prstDash val="solid"/>
+                      <a:round/>
+                      <a:headEnd type="none" w="med" len="med"/>
+                      <a:tailEnd type="none" w="med" len="med"/>
+                    </a:lnB>
+                    <a:solidFill>
+                      <a:srgbClr val="1A1A24"/>
+                    </a:solidFill>
+                  </a:tcPr>
+                </a:tc>
+                <a:tc>
+                  <a:txBody>
+                    <a:bodyPr/>
+                    <a:lstStyle/>
+                    <a:p>
+                      <a:pPr marL="0" indent="0" algn="l">
+                        <a:buNone/>
+                      </a:pPr>
+                      <a:r>
+                        <a:rPr lang="en-US" sz="1300" dirty="0">
+                          <a:solidFill>
+                            <a:srgbClr val="C1121F"/>
+                          </a:solidFill>
+                          <a:latin typeface="Inter" pitchFamily="34" charset="0"/>
+                          <a:ea typeface="Inter" pitchFamily="34" charset="-122"/>
+                          <a:cs typeface="Inter" pitchFamily="34" charset="-120"/>
+                        </a:rPr>
+                        <a:t>409 ✓</a:t>
+                      </a:r>
+                      <a:endParaRPr lang="en-US" sz="1300" dirty="0">
+                        <a:latin typeface="Inter" charset="0"/>
+                        <a:ea typeface="Inter" charset="0"/>
+                        <a:cs typeface="Inter" charset="0"/>
+                      </a:endParaRPr>
+                    </a:p>
+                  </a:txBody>
+                  <a:tcPr marL="101600" marR="101600" marT="25400" marB="25400" anchor="ctr">
+                    <a:lnL w="12700" cap="flat" cmpd="sng" algn="ctr">
+                      <a:solidFill>
+                        <a:srgbClr val="2E2E3C"/>
+                      </a:solidFill>
+                      <a:prstDash val="solid"/>
+                      <a:round/>
+                      <a:headEnd type="none" w="med" len="med"/>
+                      <a:tailEnd type="none" w="med" len="med"/>
+                    </a:lnL>
+                    <a:lnR w="12700" cap="flat" cmpd="sng" algn="ctr">
+                      <a:solidFill>
+                        <a:srgbClr val="2E2E3C"/>
+                      </a:solidFill>
+                      <a:prstDash val="solid"/>
+                      <a:round/>
+                      <a:headEnd type="none" w="med" len="med"/>
+                      <a:tailEnd type="none" w="med" len="med"/>
+                    </a:lnR>
+                    <a:lnT w="12700" cap="flat" cmpd="sng" algn="ctr">
+                      <a:solidFill>
+                        <a:srgbClr val="2E2E3C"/>
+                      </a:solidFill>
+                      <a:prstDash val="solid"/>
+                      <a:round/>
+                      <a:headEnd type="none" w="med" len="med"/>
+                      <a:tailEnd type="none" w="med" len="med"/>
+                    </a:lnT>
+                    <a:lnB w="12700" cap="flat" cmpd="sng" algn="ctr">
+                      <a:solidFill>
+                        <a:srgbClr val="2E2E3C"/>
+                      </a:solidFill>
+                      <a:prstDash val="solid"/>
+                      <a:round/>
+                      <a:headEnd type="none" w="med" len="med"/>
+                      <a:tailEnd type="none" w="med" len="med"/>
+                    </a:lnB>
+                    <a:solidFill>
+                      <a:srgbClr val="1A1A24"/>
+                    </a:solidFill>
+                  </a:tcPr>
+                </a:tc>
+                <a:extLst>
+                  <a:ext uri="{0D108BD9-81ED-4DB2-BD59-A6C34878D82A}">
+                    <a16:rowId xmlns:a16="http://schemas.microsoft.com/office/drawing/2014/main" val="3237814003"/>
+                  </a:ext>
+                </a:extLst>
+              </a:tr>
+              <a:tr h="297180">
+                <a:tc>
+                  <a:txBody>
+                    <a:bodyPr/>
+                    <a:lstStyle/>
+                    <a:p>
+                      <a:pPr marL="0" indent="0" algn="l">
+                        <a:buNone/>
+                      </a:pPr>
+                      <a:r>
+                        <a:rPr lang="en-US" sz="1300" dirty="0">
+                          <a:solidFill>
+                            <a:srgbClr val="C7C7D1"/>
+                          </a:solidFill>
+                          <a:latin typeface="Inter" pitchFamily="34" charset="0"/>
+                          <a:ea typeface="Inter" pitchFamily="34" charset="-122"/>
+                          <a:cs typeface="Inter" pitchFamily="34" charset="-120"/>
+                        </a:rPr>
+                        <a:t>Rôle non autorisé</a:t>
+                      </a:r>
+                      <a:endParaRPr lang="en-US" sz="1300" dirty="0">
+                        <a:latin typeface="Inter" charset="0"/>
+                        <a:ea typeface="Inter" charset="0"/>
+                        <a:cs typeface="Inter" charset="0"/>
+                      </a:endParaRPr>
+                    </a:p>
+                  </a:txBody>
+                  <a:tcPr marL="101600" marR="101600" marT="25400" marB="25400" anchor="ctr">
+                    <a:lnL w="12700" cap="flat" cmpd="sng" algn="ctr">
+                      <a:solidFill>
+                        <a:srgbClr val="2E2E3C"/>
+                      </a:solidFill>
+                      <a:prstDash val="solid"/>
+                      <a:round/>
+                      <a:headEnd type="none" w="med" len="med"/>
+                      <a:tailEnd type="none" w="med" len="med"/>
+                    </a:lnL>
+                    <a:lnR w="12700" cap="flat" cmpd="sng" algn="ctr">
+                      <a:solidFill>
+                        <a:srgbClr val="2E2E3C"/>
+                      </a:solidFill>
+                      <a:prstDash val="solid"/>
+                      <a:round/>
+                      <a:headEnd type="none" w="med" len="med"/>
+                      <a:tailEnd type="none" w="med" len="med"/>
+                    </a:lnR>
+                    <a:lnT w="12700" cap="flat" cmpd="sng" algn="ctr">
+                      <a:solidFill>
+                        <a:srgbClr val="2E2E3C"/>
+                      </a:solidFill>
+                      <a:prstDash val="solid"/>
+                      <a:round/>
+                      <a:headEnd type="none" w="med" len="med"/>
+                      <a:tailEnd type="none" w="med" len="med"/>
+                    </a:lnT>
+                    <a:lnB w="12700" cap="flat" cmpd="sng" algn="ctr">
+                      <a:solidFill>
+                        <a:srgbClr val="2E2E3C"/>
+                      </a:solidFill>
+                      <a:prstDash val="solid"/>
+                      <a:round/>
+                      <a:headEnd type="none" w="med" len="med"/>
+                      <a:tailEnd type="none" w="med" len="med"/>
+                    </a:lnB>
+                    <a:solidFill>
+                      <a:srgbClr val="1A1A24"/>
+                    </a:solidFill>
+                  </a:tcPr>
+                </a:tc>
+                <a:tc>
+                  <a:txBody>
+                    <a:bodyPr/>
+                    <a:lstStyle/>
+                    <a:p>
+                      <a:pPr marL="0" indent="0" algn="l">
+                        <a:buNone/>
+                      </a:pPr>
+                      <a:r>
+                        <a:rPr lang="en-US" sz="1300" dirty="0">
+                          <a:solidFill>
+                            <a:srgbClr val="C7C7D1"/>
+                          </a:solidFill>
+                          <a:latin typeface="Inter" pitchFamily="34" charset="0"/>
+                          <a:ea typeface="Inter" pitchFamily="34" charset="-122"/>
+                          <a:cs typeface="Inter" pitchFamily="34" charset="-120"/>
+                        </a:rPr>
+                        <a:t>HTTP 403</a:t>
+                      </a:r>
+                      <a:endParaRPr lang="en-US" sz="1300" dirty="0">
+                        <a:latin typeface="Inter" charset="0"/>
+                        <a:ea typeface="Inter" charset="0"/>
+                        <a:cs typeface="Inter" charset="0"/>
+                      </a:endParaRPr>
+                    </a:p>
+                  </a:txBody>
+                  <a:tcPr marL="101600" marR="101600" marT="25400" marB="25400" anchor="ctr">
+                    <a:lnL w="12700" cap="flat" cmpd="sng" algn="ctr">
+                      <a:solidFill>
+                        <a:srgbClr val="2E2E3C"/>
+                      </a:solidFill>
+                      <a:prstDash val="solid"/>
+                      <a:round/>
+                      <a:headEnd type="none" w="med" len="med"/>
+                      <a:tailEnd type="none" w="med" len="med"/>
+                    </a:lnL>
+                    <a:lnR w="12700" cap="flat" cmpd="sng" algn="ctr">
+                      <a:solidFill>
+                        <a:srgbClr val="2E2E3C"/>
+                      </a:solidFill>
+                      <a:prstDash val="solid"/>
+                      <a:round/>
+                      <a:headEnd type="none" w="med" len="med"/>
+                      <a:tailEnd type="none" w="med" len="med"/>
+                    </a:lnR>
+                    <a:lnT w="12700" cap="flat" cmpd="sng" algn="ctr">
+                      <a:solidFill>
+                        <a:srgbClr val="2E2E3C"/>
+                      </a:solidFill>
+                      <a:prstDash val="solid"/>
+                      <a:round/>
+                      <a:headEnd type="none" w="med" len="med"/>
+                      <a:tailEnd type="none" w="med" len="med"/>
+                    </a:lnT>
+                    <a:lnB w="12700" cap="flat" cmpd="sng" algn="ctr">
+                      <a:solidFill>
+                        <a:srgbClr val="2E2E3C"/>
+                      </a:solidFill>
+                      <a:prstDash val="solid"/>
+                      <a:round/>
+                      <a:headEnd type="none" w="med" len="med"/>
+                      <a:tailEnd type="none" w="med" len="med"/>
+                    </a:lnB>
+                    <a:solidFill>
+                      <a:srgbClr val="1A1A24"/>
+                    </a:solidFill>
+                  </a:tcPr>
+                </a:tc>
+                <a:tc>
+                  <a:txBody>
+                    <a:bodyPr/>
+                    <a:lstStyle/>
+                    <a:p>
+                      <a:pPr marL="0" indent="0" algn="l">
+                        <a:buNone/>
+                      </a:pPr>
+                      <a:r>
+                        <a:rPr lang="en-US" sz="1300" dirty="0">
+                          <a:solidFill>
+                            <a:srgbClr val="C1121F"/>
+                          </a:solidFill>
+                          <a:latin typeface="Inter" pitchFamily="34" charset="0"/>
+                          <a:ea typeface="Inter" pitchFamily="34" charset="-122"/>
+                          <a:cs typeface="Inter" pitchFamily="34" charset="-120"/>
+                        </a:rPr>
+                        <a:t>403 ✓</a:t>
+                      </a:r>
+                      <a:endParaRPr lang="en-US" sz="1300" dirty="0">
+                        <a:latin typeface="Inter" charset="0"/>
+                        <a:ea typeface="Inter" charset="0"/>
+                        <a:cs typeface="Inter" charset="0"/>
+                      </a:endParaRPr>
+                    </a:p>
+                  </a:txBody>
+                  <a:tcPr marL="101600" marR="101600" marT="25400" marB="25400" anchor="ctr">
+                    <a:lnL w="12700" cap="flat" cmpd="sng" algn="ctr">
+                      <a:solidFill>
+                        <a:srgbClr val="2E2E3C"/>
+                      </a:solidFill>
+                      <a:prstDash val="solid"/>
+                      <a:round/>
+                      <a:headEnd type="none" w="med" len="med"/>
+                      <a:tailEnd type="none" w="med" len="med"/>
+                    </a:lnL>
+                    <a:lnR w="12700" cap="flat" cmpd="sng" algn="ctr">
+                      <a:solidFill>
+                        <a:srgbClr val="2E2E3C"/>
+                      </a:solidFill>
+                      <a:prstDash val="solid"/>
+                      <a:round/>
+                      <a:headEnd type="none" w="med" len="med"/>
+                      <a:tailEnd type="none" w="med" len="med"/>
+                    </a:lnR>
+                    <a:lnT w="12700" cap="flat" cmpd="sng" algn="ctr">
+                      <a:solidFill>
+                        <a:srgbClr val="2E2E3C"/>
+                      </a:solidFill>
+                      <a:prstDash val="solid"/>
+                      <a:round/>
+                      <a:headEnd type="none" w="med" len="med"/>
+                      <a:tailEnd type="none" w="med" len="med"/>
+                    </a:lnT>
+                    <a:lnB w="12700" cap="flat" cmpd="sng" algn="ctr">
+                      <a:solidFill>
+                        <a:srgbClr val="2E2E3C"/>
+                      </a:solidFill>
+                      <a:prstDash val="solid"/>
+                      <a:round/>
+                      <a:headEnd type="none" w="med" len="med"/>
+                      <a:tailEnd type="none" w="med" len="med"/>
+                    </a:lnB>
+                    <a:solidFill>
+                      <a:srgbClr val="1A1A24"/>
+                    </a:solidFill>
+                  </a:tcPr>
+                </a:tc>
+                <a:extLst>
+                  <a:ext uri="{0D108BD9-81ED-4DB2-BD59-A6C34878D82A}">
+                    <a16:rowId xmlns:a16="http://schemas.microsoft.com/office/drawing/2014/main" val="2603436458"/>
+                  </a:ext>
+                </a:extLst>
+              </a:tr>
+              <a:tr h="297180">
+                <a:tc>
+                  <a:txBody>
+                    <a:bodyPr/>
+                    <a:lstStyle/>
+                    <a:p>
+                      <a:pPr marL="0" indent="0" algn="l">
+                        <a:buNone/>
+                      </a:pPr>
+                      <a:r>
+                        <a:rPr lang="en-US" sz="1300" dirty="0">
+                          <a:solidFill>
+                            <a:srgbClr val="C7C7D1"/>
+                          </a:solidFill>
+                          <a:latin typeface="Inter" pitchFamily="34" charset="0"/>
+                          <a:ea typeface="Inter" pitchFamily="34" charset="-122"/>
+                          <a:cs typeface="Inter" pitchFamily="34" charset="-120"/>
+                        </a:rPr>
+                        <a:t>Auth absente</a:t>
+                      </a:r>
+                      <a:endParaRPr lang="en-US" sz="1300" dirty="0">
+                        <a:latin typeface="Inter" charset="0"/>
+                        <a:ea typeface="Inter" charset="0"/>
+                        <a:cs typeface="Inter" charset="0"/>
+                      </a:endParaRPr>
+                    </a:p>
+                  </a:txBody>
+                  <a:tcPr marL="101600" marR="101600" marT="25400" marB="25400" anchor="ctr">
+                    <a:lnL w="12700" cap="flat" cmpd="sng" algn="ctr">
+                      <a:solidFill>
+                        <a:srgbClr val="2E2E3C"/>
+                      </a:solidFill>
+                      <a:prstDash val="solid"/>
+                      <a:round/>
+                      <a:headEnd type="none" w="med" len="med"/>
+                      <a:tailEnd type="none" w="med" len="med"/>
+                    </a:lnL>
+                    <a:lnR w="12700" cap="flat" cmpd="sng" algn="ctr">
+                      <a:solidFill>
+                        <a:srgbClr val="2E2E3C"/>
+                      </a:solidFill>
+                      <a:prstDash val="solid"/>
+                      <a:round/>
+                      <a:headEnd type="none" w="med" len="med"/>
+                      <a:tailEnd type="none" w="med" len="med"/>
+                    </a:lnR>
+                    <a:lnT w="12700" cap="flat" cmpd="sng" algn="ctr">
+                      <a:solidFill>
+                        <a:srgbClr val="2E2E3C"/>
+                      </a:solidFill>
+                      <a:prstDash val="solid"/>
+                      <a:round/>
+                      <a:headEnd type="none" w="med" len="med"/>
+                      <a:tailEnd type="none" w="med" len="med"/>
+                    </a:lnT>
+                    <a:lnB w="12700" cap="flat" cmpd="sng" algn="ctr">
+                      <a:solidFill>
+                        <a:srgbClr val="2E2E3C"/>
+                      </a:solidFill>
+                      <a:prstDash val="solid"/>
+                      <a:round/>
+                      <a:headEnd type="none" w="med" len="med"/>
+                      <a:tailEnd type="none" w="med" len="med"/>
+                    </a:lnB>
+                    <a:solidFill>
+                      <a:srgbClr val="1A1A24"/>
+                    </a:solidFill>
+                  </a:tcPr>
+                </a:tc>
+                <a:tc>
+                  <a:txBody>
+                    <a:bodyPr/>
+                    <a:lstStyle/>
+                    <a:p>
+                      <a:pPr marL="0" indent="0" algn="l">
+                        <a:buNone/>
+                      </a:pPr>
+                      <a:r>
+                        <a:rPr lang="en-US" sz="1300" dirty="0">
+                          <a:solidFill>
+                            <a:srgbClr val="C7C7D1"/>
+                          </a:solidFill>
+                          <a:latin typeface="Inter" pitchFamily="34" charset="0"/>
+                          <a:ea typeface="Inter" pitchFamily="34" charset="-122"/>
+                          <a:cs typeface="Inter" pitchFamily="34" charset="-120"/>
+                        </a:rPr>
+                        <a:t>HTTP 401</a:t>
+                      </a:r>
+                      <a:endParaRPr lang="en-US" sz="1300" dirty="0">
+                        <a:latin typeface="Inter" charset="0"/>
+                        <a:ea typeface="Inter" charset="0"/>
+                        <a:cs typeface="Inter" charset="0"/>
+                      </a:endParaRPr>
+                    </a:p>
+                  </a:txBody>
+                  <a:tcPr marL="101600" marR="101600" marT="25400" marB="25400" anchor="ctr">
+                    <a:lnL w="12700" cap="flat" cmpd="sng" algn="ctr">
+                      <a:solidFill>
+                        <a:srgbClr val="2E2E3C"/>
+                      </a:solidFill>
+                      <a:prstDash val="solid"/>
+                      <a:round/>
+                      <a:headEnd type="none" w="med" len="med"/>
+                      <a:tailEnd type="none" w="med" len="med"/>
+                    </a:lnL>
+                    <a:lnR w="12700" cap="flat" cmpd="sng" algn="ctr">
+                      <a:solidFill>
+                        <a:srgbClr val="2E2E3C"/>
+                      </a:solidFill>
+                      <a:prstDash val="solid"/>
+                      <a:round/>
+                      <a:headEnd type="none" w="med" len="med"/>
+                      <a:tailEnd type="none" w="med" len="med"/>
+                    </a:lnR>
+                    <a:lnT w="12700" cap="flat" cmpd="sng" algn="ctr">
+                      <a:solidFill>
+                        <a:srgbClr val="2E2E3C"/>
+                      </a:solidFill>
+                      <a:prstDash val="solid"/>
+                      <a:round/>
+                      <a:headEnd type="none" w="med" len="med"/>
+                      <a:tailEnd type="none" w="med" len="med"/>
+                    </a:lnT>
+                    <a:lnB w="12700" cap="flat" cmpd="sng" algn="ctr">
+                      <a:solidFill>
+                        <a:srgbClr val="2E2E3C"/>
+                      </a:solidFill>
+                      <a:prstDash val="solid"/>
+                      <a:round/>
+                      <a:headEnd type="none" w="med" len="med"/>
+                      <a:tailEnd type="none" w="med" len="med"/>
+                    </a:lnB>
+                    <a:solidFill>
+                      <a:srgbClr val="1A1A24"/>
+                    </a:solidFill>
+                  </a:tcPr>
+                </a:tc>
+                <a:tc>
+                  <a:txBody>
+                    <a:bodyPr/>
+                    <a:lstStyle/>
+                    <a:p>
+                      <a:pPr marL="0" indent="0" algn="l">
+                        <a:buNone/>
+                      </a:pPr>
+                      <a:r>
+                        <a:rPr lang="en-US" sz="1300" dirty="0">
+                          <a:solidFill>
+                            <a:srgbClr val="C1121F"/>
+                          </a:solidFill>
+                          <a:latin typeface="Inter" pitchFamily="34" charset="0"/>
+                          <a:ea typeface="Inter" pitchFamily="34" charset="-122"/>
+                          <a:cs typeface="Inter" pitchFamily="34" charset="-120"/>
+                        </a:rPr>
+                        <a:t>401 ✓</a:t>
+                      </a:r>
+                      <a:endParaRPr lang="en-US" sz="1300" dirty="0">
+                        <a:latin typeface="Inter" charset="0"/>
+                        <a:ea typeface="Inter" charset="0"/>
+                        <a:cs typeface="Inter" charset="0"/>
+                      </a:endParaRPr>
+                    </a:p>
+                  </a:txBody>
+                  <a:tcPr marL="101600" marR="101600" marT="25400" marB="25400" anchor="ctr">
+                    <a:lnL w="12700" cap="flat" cmpd="sng" algn="ctr">
+                      <a:solidFill>
+                        <a:srgbClr val="2E2E3C"/>
+                      </a:solidFill>
+                      <a:prstDash val="solid"/>
+                      <a:round/>
+                      <a:headEnd type="none" w="med" len="med"/>
+                      <a:tailEnd type="none" w="med" len="med"/>
+                    </a:lnL>
+                    <a:lnR w="12700" cap="flat" cmpd="sng" algn="ctr">
+                      <a:solidFill>
+                        <a:srgbClr val="2E2E3C"/>
+                      </a:solidFill>
+                      <a:prstDash val="solid"/>
+                      <a:round/>
+                      <a:headEnd type="none" w="med" len="med"/>
+                      <a:tailEnd type="none" w="med" len="med"/>
+                    </a:lnR>
+                    <a:lnT w="12700" cap="flat" cmpd="sng" algn="ctr">
+                      <a:solidFill>
+                        <a:srgbClr val="2E2E3C"/>
+                      </a:solidFill>
+                      <a:prstDash val="solid"/>
+                      <a:round/>
+                      <a:headEnd type="none" w="med" len="med"/>
+                      <a:tailEnd type="none" w="med" len="med"/>
+                    </a:lnT>
+                    <a:lnB w="12700" cap="flat" cmpd="sng" algn="ctr">
+                      <a:solidFill>
+                        <a:srgbClr val="2E2E3C"/>
+                      </a:solidFill>
+                      <a:prstDash val="solid"/>
+                      <a:round/>
+                      <a:headEnd type="none" w="med" len="med"/>
+                      <a:tailEnd type="none" w="med" len="med"/>
+                    </a:lnB>
+                    <a:solidFill>
+                      <a:srgbClr val="1A1A24"/>
+                    </a:solidFill>
+                  </a:tcPr>
+                </a:tc>
+                <a:extLst>
+                  <a:ext uri="{0D108BD9-81ED-4DB2-BD59-A6C34878D82A}">
+                    <a16:rowId xmlns:a16="http://schemas.microsoft.com/office/drawing/2014/main" val="2154465313"/>
+                  </a:ext>
+                </a:extLst>
               </a:tr>
             </a:tbl>
           </a:graphicData>
@@ -9203,7 +10152,7 @@
           <a:bodyPr wrap="square" lIns="0" tIns="0" rIns="0" bIns="0" rtlCol="0" anchor="ctr"/>
           <a:lstStyle/>
           <a:p>
-            <a:pPr algn="l" indent="0" marL="0">
+            <a:pPr marL="0" indent="0" algn="l">
               <a:buNone/>
             </a:pPr>
             <a:r>
@@ -9242,7 +10191,7 @@
           <a:bodyPr wrap="square" lIns="0" tIns="0" rIns="0" bIns="0" rtlCol="0" anchor="ctr"/>
           <a:lstStyle/>
           <a:p>
-            <a:pPr algn="r" indent="0" marL="0">
+            <a:pPr marL="0" indent="0" algn="r">
               <a:buNone/>
             </a:pPr>
             <a:r>
@@ -9276,6 +10225,7 @@
         <a:solidFill>
           <a:srgbClr val="1A1A24"/>
         </a:solidFill>
+        <a:effectLst/>
       </p:bgPr>
     </p:bg>
     <p:spTree>
@@ -9313,11 +10263,11 @@
           <a:bodyPr wrap="square" lIns="0" tIns="0" rIns="0" bIns="0" rtlCol="0" anchor="ctr"/>
           <a:lstStyle/>
           <a:p>
-            <a:pPr algn="l" indent="0" marL="0">
-              <a:buNone/>
-            </a:pPr>
-            <a:r>
-              <a:rPr lang="en-US" sz="3200" b="1" spc="100" kern="0" dirty="0">
+            <a:pPr marL="0" indent="0" algn="l">
+              <a:buNone/>
+            </a:pPr>
+            <a:r>
+              <a:rPr lang="en-US" sz="3200" b="1" kern="0" spc="100" dirty="0">
                 <a:solidFill>
                   <a:srgbClr val="FFFFFF"/>
                 </a:solidFill>
@@ -9350,6 +10300,13 @@
           </a:solidFill>
           <a:ln/>
         </p:spPr>
+        <p:txBody>
+          <a:bodyPr/>
+          <a:lstStyle/>
+          <a:p>
+            <a:endParaRPr lang="fr-FR"/>
+          </a:p>
+        </p:txBody>
       </p:sp>
       <p:sp>
         <p:nvSpPr>
@@ -9372,7 +10329,7 @@
           <a:bodyPr wrap="square" lIns="0" tIns="0" rIns="0" bIns="0" rtlCol="0" anchor="ctr"/>
           <a:lstStyle/>
           <a:p>
-            <a:pPr algn="l" indent="0" marL="0">
+            <a:pPr marL="0" indent="0" algn="l">
               <a:buNone/>
             </a:pPr>
             <a:r>
@@ -9411,7 +10368,7 @@
           <a:bodyPr wrap="square" lIns="0" tIns="0" rIns="0" bIns="0" rtlCol="0" anchor="ctr"/>
           <a:lstStyle/>
           <a:p>
-            <a:pPr algn="l" indent="0" marL="0">
+            <a:pPr marL="0" indent="0" algn="l">
               <a:buNone/>
             </a:pPr>
             <a:r>
@@ -9450,7 +10407,7 @@
           <a:bodyPr wrap="square" lIns="0" tIns="0" rIns="0" bIns="0" rtlCol="0" anchor="ctr"/>
           <a:lstStyle/>
           <a:p>
-            <a:pPr algn="l" indent="0" marL="0">
+            <a:pPr marL="0" indent="0" algn="l">
               <a:buNone/>
             </a:pPr>
             <a:r>
@@ -9489,7 +10446,7 @@
           <a:bodyPr wrap="square" lIns="0" tIns="0" rIns="0" bIns="0" rtlCol="0" anchor="ctr"/>
           <a:lstStyle/>
           <a:p>
-            <a:pPr algn="l" indent="0" marL="0">
+            <a:pPr marL="0" indent="0" algn="l">
               <a:buNone/>
             </a:pPr>
             <a:r>
@@ -9528,7 +10485,7 @@
           <a:bodyPr wrap="square" lIns="0" tIns="0" rIns="0" bIns="0" rtlCol="0" anchor="ctr"/>
           <a:lstStyle/>
           <a:p>
-            <a:pPr algn="l" indent="0" marL="0">
+            <a:pPr marL="0" indent="0" algn="l">
               <a:buNone/>
             </a:pPr>
             <a:r>
@@ -9567,7 +10524,7 @@
           <a:bodyPr wrap="square" lIns="0" tIns="0" rIns="0" bIns="0" rtlCol="0" anchor="ctr"/>
           <a:lstStyle/>
           <a:p>
-            <a:pPr algn="l" indent="0" marL="0">
+            <a:pPr marL="0" indent="0" algn="l">
               <a:buNone/>
             </a:pPr>
             <a:r>
@@ -9579,7 +10536,7 @@
                 <a:ea typeface="Inter" pitchFamily="34" charset="-122"/>
                 <a:cs typeface="Inter" pitchFamily="34" charset="-120"/>
               </a:rPr>
-              <a:t>Conception (UML, maquettes, BDD)</a:t>
+              <a:t>Conception (UML, Merise, maquettes, BDD)</a:t>
             </a:r>
             <a:endParaRPr lang="en-US" sz="1800" dirty="0"/>
           </a:p>
@@ -9606,7 +10563,7 @@
           <a:bodyPr wrap="square" lIns="0" tIns="0" rIns="0" bIns="0" rtlCol="0" anchor="ctr"/>
           <a:lstStyle/>
           <a:p>
-            <a:pPr algn="l" indent="0" marL="0">
+            <a:pPr marL="0" indent="0" algn="l">
               <a:buNone/>
             </a:pPr>
             <a:r>
@@ -9645,7 +10602,7 @@
           <a:bodyPr wrap="square" lIns="0" tIns="0" rIns="0" bIns="0" rtlCol="0" anchor="ctr"/>
           <a:lstStyle/>
           <a:p>
-            <a:pPr algn="l" indent="0" marL="0">
+            <a:pPr marL="0" indent="0" algn="l">
               <a:buNone/>
             </a:pPr>
             <a:r>
@@ -9684,7 +10641,7 @@
           <a:bodyPr wrap="square" lIns="0" tIns="0" rIns="0" bIns="0" rtlCol="0" anchor="ctr"/>
           <a:lstStyle/>
           <a:p>
-            <a:pPr algn="l" indent="0" marL="0">
+            <a:pPr marL="0" indent="0" algn="l">
               <a:buNone/>
             </a:pPr>
             <a:r>
@@ -9723,7 +10680,7 @@
           <a:bodyPr wrap="square" lIns="0" tIns="0" rIns="0" bIns="0" rtlCol="0" anchor="ctr"/>
           <a:lstStyle/>
           <a:p>
-            <a:pPr algn="l" indent="0" marL="0">
+            <a:pPr marL="0" indent="0" algn="l">
               <a:buNone/>
             </a:pPr>
             <a:r>
@@ -9762,7 +10719,7 @@
           <a:bodyPr wrap="square" lIns="0" tIns="0" rIns="0" bIns="0" rtlCol="0" anchor="ctr"/>
           <a:lstStyle/>
           <a:p>
-            <a:pPr algn="l" indent="0" marL="0">
+            <a:pPr marL="0" indent="0" algn="l">
               <a:buNone/>
             </a:pPr>
             <a:r>
@@ -9801,7 +10758,7 @@
           <a:bodyPr wrap="square" lIns="0" tIns="0" rIns="0" bIns="0" rtlCol="0" anchor="ctr"/>
           <a:lstStyle/>
           <a:p>
-            <a:pPr algn="l" indent="0" marL="0">
+            <a:pPr marL="0" indent="0" algn="l">
               <a:buNone/>
             </a:pPr>
             <a:r>
@@ -9840,7 +10797,7 @@
           <a:bodyPr wrap="square" lIns="0" tIns="0" rIns="0" bIns="0" rtlCol="0" anchor="ctr"/>
           <a:lstStyle/>
           <a:p>
-            <a:pPr algn="l" indent="0" marL="0">
+            <a:pPr marL="0" indent="0" algn="l">
               <a:buNone/>
             </a:pPr>
             <a:r>
@@ -9879,7 +10836,7 @@
           <a:bodyPr wrap="square" lIns="0" tIns="0" rIns="0" bIns="0" rtlCol="0" anchor="ctr"/>
           <a:lstStyle/>
           <a:p>
-            <a:pPr algn="l" indent="0" marL="0">
+            <a:pPr marL="0" indent="0" algn="l">
               <a:buNone/>
             </a:pPr>
             <a:r>
@@ -9918,7 +10875,7 @@
           <a:bodyPr wrap="square" lIns="0" tIns="0" rIns="0" bIns="0" rtlCol="0" anchor="ctr"/>
           <a:lstStyle/>
           <a:p>
-            <a:pPr algn="l" indent="0" marL="0">
+            <a:pPr marL="0" indent="0" algn="l">
               <a:buNone/>
             </a:pPr>
             <a:r>
@@ -9957,7 +10914,7 @@
           <a:bodyPr wrap="square" lIns="0" tIns="0" rIns="0" bIns="0" rtlCol="0" anchor="ctr"/>
           <a:lstStyle/>
           <a:p>
-            <a:pPr algn="l" indent="0" marL="0">
+            <a:pPr marL="0" indent="0" algn="l">
               <a:buNone/>
             </a:pPr>
             <a:r>
@@ -9996,7 +10953,7 @@
           <a:bodyPr wrap="square" lIns="0" tIns="0" rIns="0" bIns="0" rtlCol="0" anchor="ctr"/>
           <a:lstStyle/>
           <a:p>
-            <a:pPr algn="l" indent="0" marL="0">
+            <a:pPr marL="0" indent="0" algn="l">
               <a:buNone/>
             </a:pPr>
             <a:r>
@@ -10035,7 +10992,7 @@
           <a:bodyPr wrap="square" lIns="0" tIns="0" rIns="0" bIns="0" rtlCol="0" anchor="ctr"/>
           <a:lstStyle/>
           <a:p>
-            <a:pPr algn="l" indent="0" marL="0">
+            <a:pPr marL="0" indent="0" algn="l">
               <a:buNone/>
             </a:pPr>
             <a:r>
@@ -10074,7 +11031,7 @@
           <a:bodyPr wrap="square" lIns="0" tIns="0" rIns="0" bIns="0" rtlCol="0" anchor="ctr"/>
           <a:lstStyle/>
           <a:p>
-            <a:pPr algn="l" indent="0" marL="0">
+            <a:pPr marL="0" indent="0" algn="l">
               <a:buNone/>
             </a:pPr>
             <a:r>
@@ -10113,7 +11070,7 @@
           <a:bodyPr wrap="square" lIns="0" tIns="0" rIns="0" bIns="0" rtlCol="0" anchor="ctr"/>
           <a:lstStyle/>
           <a:p>
-            <a:pPr algn="l" indent="0" marL="0">
+            <a:pPr marL="0" indent="0" algn="l">
               <a:buNone/>
             </a:pPr>
             <a:r>
@@ -10152,7 +11109,7 @@
           <a:bodyPr wrap="square" lIns="0" tIns="0" rIns="0" bIns="0" rtlCol="0" anchor="ctr"/>
           <a:lstStyle/>
           <a:p>
-            <a:pPr algn="l" indent="0" marL="0">
+            <a:pPr marL="0" indent="0" algn="l">
               <a:buNone/>
             </a:pPr>
             <a:r>
@@ -10191,7 +11148,7 @@
           <a:bodyPr wrap="square" lIns="0" tIns="0" rIns="0" bIns="0" rtlCol="0" anchor="ctr"/>
           <a:lstStyle/>
           <a:p>
-            <a:pPr algn="r" indent="0" marL="0">
+            <a:pPr marL="0" indent="0" algn="r">
               <a:buNone/>
             </a:pPr>
             <a:r>
@@ -10225,6 +11182,7 @@
         <a:solidFill>
           <a:srgbClr val="1A1A24"/>
         </a:solidFill>
+        <a:effectLst/>
       </p:bgPr>
     </p:bg>
     <p:spTree>
@@ -10262,11 +11220,11 @@
           <a:bodyPr wrap="square" lIns="0" tIns="0" rIns="0" bIns="0" rtlCol="0" anchor="ctr"/>
           <a:lstStyle/>
           <a:p>
-            <a:pPr algn="l" indent="0" marL="0">
-              <a:buNone/>
-            </a:pPr>
-            <a:r>
-              <a:rPr lang="en-US" sz="3200" b="1" spc="100" kern="0" dirty="0">
+            <a:pPr marL="0" indent="0" algn="l">
+              <a:buNone/>
+            </a:pPr>
+            <a:r>
+              <a:rPr lang="en-US" sz="3200" b="1" kern="0" spc="100" dirty="0">
                 <a:solidFill>
                   <a:srgbClr val="FFFFFF"/>
                 </a:solidFill>
@@ -10299,6 +11257,13 @@
           </a:solidFill>
           <a:ln/>
         </p:spPr>
+        <p:txBody>
+          <a:bodyPr/>
+          <a:lstStyle/>
+          <a:p>
+            <a:endParaRPr lang="fr-FR"/>
+          </a:p>
+        </p:txBody>
       </p:sp>
       <p:sp>
         <p:nvSpPr>
@@ -10319,6 +11284,13 @@
           </a:solidFill>
           <a:ln/>
         </p:spPr>
+        <p:txBody>
+          <a:bodyPr/>
+          <a:lstStyle/>
+          <a:p>
+            <a:endParaRPr lang="fr-FR"/>
+          </a:p>
+        </p:txBody>
       </p:sp>
       <p:sp>
         <p:nvSpPr>
@@ -10341,7 +11313,7 @@
           <a:bodyPr wrap="square" lIns="0" tIns="0" rIns="0" bIns="0" rtlCol="0" anchor="t"/>
           <a:lstStyle/>
           <a:p>
-            <a:pPr algn="l" indent="0" marL="0">
+            <a:pPr marL="0" indent="0" algn="l">
               <a:buNone/>
             </a:pPr>
             <a:r>
@@ -10355,9 +11327,6 @@
               </a:rPr>
               <a:t>Docker Compose</a:t>
             </a:r>
-            <a:pPr algn="l" indent="0" marL="0">
-              <a:buNone/>
-            </a:pPr>
             <a:r>
               <a:rPr lang="en-US" sz="1400" dirty="0">
                 <a:solidFill>
@@ -10392,6 +11361,13 @@
           </a:solidFill>
           <a:ln/>
         </p:spPr>
+        <p:txBody>
+          <a:bodyPr/>
+          <a:lstStyle/>
+          <a:p>
+            <a:endParaRPr lang="fr-FR"/>
+          </a:p>
+        </p:txBody>
       </p:sp>
       <p:sp>
         <p:nvSpPr>
@@ -10414,7 +11390,7 @@
           <a:bodyPr wrap="square" lIns="0" tIns="0" rIns="0" bIns="0" rtlCol="0" anchor="t"/>
           <a:lstStyle/>
           <a:p>
-            <a:pPr algn="l" indent="0" marL="0">
+            <a:pPr marL="0" indent="0" algn="l">
               <a:buNone/>
             </a:pPr>
             <a:r>
@@ -10428,9 +11404,6 @@
               </a:rPr>
               <a:t>CI GitHub Actions</a:t>
             </a:r>
-            <a:pPr algn="l" indent="0" marL="0">
-              <a:buNone/>
-            </a:pPr>
             <a:r>
               <a:rPr lang="en-US" sz="1400" dirty="0">
                 <a:solidFill>
@@ -10465,6 +11438,13 @@
           </a:solidFill>
           <a:ln/>
         </p:spPr>
+        <p:txBody>
+          <a:bodyPr/>
+          <a:lstStyle/>
+          <a:p>
+            <a:endParaRPr lang="fr-FR"/>
+          </a:p>
+        </p:txBody>
       </p:sp>
       <p:sp>
         <p:nvSpPr>
@@ -10487,7 +11467,7 @@
           <a:bodyPr wrap="square" lIns="0" tIns="0" rIns="0" bIns="0" rtlCol="0" anchor="t"/>
           <a:lstStyle/>
           <a:p>
-            <a:pPr algn="l" indent="0" marL="0">
+            <a:pPr marL="0" indent="0" algn="l">
               <a:buNone/>
             </a:pPr>
             <a:r>
@@ -10501,9 +11481,6 @@
               </a:rPr>
               <a:t>Reproductible</a:t>
             </a:r>
-            <a:pPr algn="l" indent="0" marL="0">
-              <a:buNone/>
-            </a:pPr>
             <a:r>
               <a:rPr lang="en-US" sz="1400" dirty="0">
                 <a:solidFill>
@@ -10538,6 +11515,13 @@
           </a:solidFill>
           <a:ln/>
         </p:spPr>
+        <p:txBody>
+          <a:bodyPr/>
+          <a:lstStyle/>
+          <a:p>
+            <a:endParaRPr lang="fr-FR"/>
+          </a:p>
+        </p:txBody>
       </p:sp>
       <p:sp>
         <p:nvSpPr>
@@ -10560,7 +11544,7 @@
           <a:bodyPr wrap="square" lIns="0" tIns="0" rIns="0" bIns="0" rtlCol="0" anchor="t"/>
           <a:lstStyle/>
           <a:p>
-            <a:pPr algn="l" indent="0" marL="0">
+            <a:pPr marL="0" indent="0" algn="l">
               <a:buNone/>
             </a:pPr>
             <a:r>
@@ -10574,9 +11558,6 @@
               </a:rPr>
               <a:t>Déploiement prod</a:t>
             </a:r>
-            <a:pPr algn="l" indent="0" marL="0">
-              <a:buNone/>
-            </a:pPr>
             <a:r>
               <a:rPr lang="en-US" sz="1400" dirty="0">
                 <a:solidFill>
@@ -10618,6 +11599,13 @@
             <a:prstDash val="solid"/>
           </a:ln>
         </p:spPr>
+        <p:txBody>
+          <a:bodyPr/>
+          <a:lstStyle/>
+          <a:p>
+            <a:endParaRPr lang="fr-FR"/>
+          </a:p>
+        </p:txBody>
       </p:sp>
       <p:sp>
         <p:nvSpPr>
@@ -10640,7 +11628,7 @@
           <a:bodyPr wrap="square" lIns="0" tIns="0" rIns="0" bIns="0" rtlCol="0" anchor="ctr"/>
           <a:lstStyle/>
           <a:p>
-            <a:pPr algn="ctr" indent="0" marL="0">
+            <a:pPr marL="0" indent="0" algn="ctr">
               <a:buNone/>
             </a:pPr>
             <a:r>
@@ -10679,7 +11667,7 @@
           <a:bodyPr wrap="square" lIns="0" tIns="0" rIns="0" bIns="0" rtlCol="0" anchor="ctr"/>
           <a:lstStyle/>
           <a:p>
-            <a:pPr algn="ctr" indent="0" marL="0">
+            <a:pPr marL="0" indent="0" algn="ctr">
               <a:buNone/>
             </a:pPr>
             <a:r>
@@ -10723,6 +11711,13 @@
             <a:prstDash val="solid"/>
           </a:ln>
         </p:spPr>
+        <p:txBody>
+          <a:bodyPr/>
+          <a:lstStyle/>
+          <a:p>
+            <a:endParaRPr lang="fr-FR"/>
+          </a:p>
+        </p:txBody>
       </p:sp>
       <p:sp>
         <p:nvSpPr>
@@ -10745,7 +11740,7 @@
           <a:bodyPr wrap="square" lIns="0" tIns="0" rIns="0" bIns="0" rtlCol="0" anchor="ctr"/>
           <a:lstStyle/>
           <a:p>
-            <a:pPr algn="ctr" indent="0" marL="0">
+            <a:pPr marL="0" indent="0" algn="ctr">
               <a:buNone/>
             </a:pPr>
             <a:r>
@@ -10762,7 +11757,7 @@
             <a:endParaRPr lang="en-US" sz="1250" dirty="0"/>
           </a:p>
           <a:p>
-            <a:pPr algn="ctr" indent="0" marL="0">
+            <a:pPr marL="0" indent="0" algn="ctr">
               <a:buNone/>
             </a:pPr>
             <a:r>
@@ -10806,6 +11801,13 @@
             <a:prstDash val="solid"/>
           </a:ln>
         </p:spPr>
+        <p:txBody>
+          <a:bodyPr/>
+          <a:lstStyle/>
+          <a:p>
+            <a:endParaRPr lang="fr-FR"/>
+          </a:p>
+        </p:txBody>
       </p:sp>
       <p:sp>
         <p:nvSpPr>
@@ -10828,7 +11830,7 @@
           <a:bodyPr wrap="square" lIns="0" tIns="0" rIns="0" bIns="0" rtlCol="0" anchor="ctr"/>
           <a:lstStyle/>
           <a:p>
-            <a:pPr algn="ctr" indent="0" marL="0">
+            <a:pPr marL="0" indent="0" algn="ctr">
               <a:buNone/>
             </a:pPr>
             <a:r>
@@ -10845,7 +11847,7 @@
             <a:endParaRPr lang="en-US" sz="1250" dirty="0"/>
           </a:p>
           <a:p>
-            <a:pPr algn="ctr" indent="0" marL="0">
+            <a:pPr marL="0" indent="0" algn="ctr">
               <a:buNone/>
             </a:pPr>
             <a:r>
@@ -10884,7 +11886,7 @@
           <a:bodyPr wrap="square" lIns="0" tIns="0" rIns="0" bIns="0" rtlCol="0" anchor="ctr"/>
           <a:lstStyle/>
           <a:p>
-            <a:pPr algn="ctr" indent="0" marL="0">
+            <a:pPr marL="0" indent="0" algn="ctr">
               <a:buNone/>
             </a:pPr>
             <a:r>
@@ -10928,6 +11930,13 @@
             <a:prstDash val="solid"/>
           </a:ln>
         </p:spPr>
+        <p:txBody>
+          <a:bodyPr/>
+          <a:lstStyle/>
+          <a:p>
+            <a:endParaRPr lang="fr-FR"/>
+          </a:p>
+        </p:txBody>
       </p:sp>
       <p:sp>
         <p:nvSpPr>
@@ -10950,7 +11959,7 @@
           <a:bodyPr wrap="square" lIns="0" tIns="0" rIns="0" bIns="0" rtlCol="0" anchor="ctr"/>
           <a:lstStyle/>
           <a:p>
-            <a:pPr algn="ctr" indent="0" marL="0">
+            <a:pPr marL="0" indent="0" algn="ctr">
               <a:buNone/>
             </a:pPr>
             <a:r>
@@ -10989,7 +11998,7 @@
           <a:bodyPr wrap="square" lIns="0" tIns="0" rIns="0" bIns="0" rtlCol="0" anchor="ctr"/>
           <a:lstStyle/>
           <a:p>
-            <a:pPr algn="l" indent="0" marL="0">
+            <a:pPr marL="0" indent="0" algn="l">
               <a:buNone/>
             </a:pPr>
             <a:r>
@@ -11028,7 +12037,7 @@
           <a:bodyPr wrap="square" lIns="0" tIns="0" rIns="0" bIns="0" rtlCol="0" anchor="ctr"/>
           <a:lstStyle/>
           <a:p>
-            <a:pPr algn="r" indent="0" marL="0">
+            <a:pPr marL="0" indent="0" algn="r">
               <a:buNone/>
             </a:pPr>
             <a:r>
@@ -11062,6 +12071,7 @@
         <a:solidFill>
           <a:srgbClr val="1A1A24"/>
         </a:solidFill>
+        <a:effectLst/>
       </p:bgPr>
     </p:bg>
     <p:spTree>
@@ -11099,11 +12109,11 @@
           <a:bodyPr wrap="square" lIns="0" tIns="0" rIns="0" bIns="0" rtlCol="0" anchor="ctr"/>
           <a:lstStyle/>
           <a:p>
-            <a:pPr algn="l" indent="0" marL="0">
-              <a:buNone/>
-            </a:pPr>
-            <a:r>
-              <a:rPr lang="en-US" sz="3200" b="1" spc="100" kern="0" dirty="0">
+            <a:pPr marL="0" indent="0" algn="l">
+              <a:buNone/>
+            </a:pPr>
+            <a:r>
+              <a:rPr lang="en-US" sz="3200" b="1" kern="0" spc="100" dirty="0">
                 <a:solidFill>
                   <a:srgbClr val="FFFFFF"/>
                 </a:solidFill>
@@ -11136,6 +12146,13 @@
           </a:solidFill>
           <a:ln/>
         </p:spPr>
+        <p:txBody>
+          <a:bodyPr/>
+          <a:lstStyle/>
+          <a:p>
+            <a:endParaRPr lang="fr-FR"/>
+          </a:p>
+        </p:txBody>
       </p:sp>
       <p:sp>
         <p:nvSpPr>
@@ -11161,17 +12178,24 @@
             <a:prstDash val="solid"/>
           </a:ln>
         </p:spPr>
+        <p:txBody>
+          <a:bodyPr/>
+          <a:lstStyle/>
+          <a:p>
+            <a:endParaRPr lang="fr-FR"/>
+          </a:p>
+        </p:txBody>
       </p:sp>
       <p:pic>
         <p:nvPicPr>
-          <p:cNvPr id="5" name="Image 0" descr="feedly.png">    </p:cNvPr>
+          <p:cNvPr id="5" name="Image 0" descr="feedly.png"/>
           <p:cNvPicPr>
             <a:picLocks noChangeAspect="1"/>
           </p:cNvPicPr>
           <p:nvPr/>
         </p:nvPicPr>
         <p:blipFill>
-          <a:blip r:embed="rId1"/>
+          <a:blip r:embed="rId3"/>
           <a:stretch>
             <a:fillRect/>
           </a:stretch>
@@ -11207,7 +12231,7 @@
           <a:bodyPr wrap="square" lIns="0" tIns="0" rIns="0" bIns="0" rtlCol="0" anchor="ctr"/>
           <a:lstStyle/>
           <a:p>
-            <a:pPr algn="ctr" indent="0" marL="0">
+            <a:pPr marL="0" indent="0" algn="ctr">
               <a:buNone/>
             </a:pPr>
             <a:r>
@@ -11246,11 +12270,11 @@
           <a:bodyPr wrap="square" lIns="0" tIns="0" rIns="0" bIns="0" rtlCol="0" anchor="ctr"/>
           <a:lstStyle/>
           <a:p>
-            <a:pPr algn="l" indent="0" marL="0">
-              <a:buNone/>
-            </a:pPr>
-            <a:r>
-              <a:rPr lang="en-US" sz="1500" b="1" spc="100" kern="0" dirty="0">
+            <a:pPr marL="0" indent="0" algn="l">
+              <a:buNone/>
+            </a:pPr>
+            <a:r>
+              <a:rPr lang="en-US" sz="1500" b="1" kern="0" spc="100" dirty="0">
                 <a:solidFill>
                   <a:srgbClr val="C1121F"/>
                 </a:solidFill>
@@ -11290,6 +12314,13 @@
             <a:prstDash val="solid"/>
           </a:ln>
         </p:spPr>
+        <p:txBody>
+          <a:bodyPr/>
+          <a:lstStyle/>
+          <a:p>
+            <a:endParaRPr lang="fr-FR"/>
+          </a:p>
+        </p:txBody>
       </p:sp>
       <p:sp>
         <p:nvSpPr>
@@ -11312,7 +12343,7 @@
           <a:bodyPr wrap="square" lIns="0" tIns="0" rIns="0" bIns="0" rtlCol="0" anchor="ctr"/>
           <a:lstStyle/>
           <a:p>
-            <a:pPr algn="l" indent="0" marL="0">
+            <a:pPr marL="0" indent="0" algn="l">
               <a:buNone/>
             </a:pPr>
             <a:r>
@@ -11351,7 +12382,7 @@
           <a:bodyPr wrap="square" lIns="0" tIns="0" rIns="0" bIns="0" rtlCol="0" anchor="t"/>
           <a:lstStyle/>
           <a:p>
-            <a:pPr algn="l" indent="0" marL="0">
+            <a:pPr marL="0" indent="0" algn="l">
               <a:buNone/>
             </a:pPr>
             <a:r>
@@ -11395,6 +12426,13 @@
             <a:prstDash val="solid"/>
           </a:ln>
         </p:spPr>
+        <p:txBody>
+          <a:bodyPr/>
+          <a:lstStyle/>
+          <a:p>
+            <a:endParaRPr lang="fr-FR"/>
+          </a:p>
+        </p:txBody>
       </p:sp>
       <p:sp>
         <p:nvSpPr>
@@ -11417,7 +12455,7 @@
           <a:bodyPr wrap="square" lIns="0" tIns="0" rIns="0" bIns="0" rtlCol="0" anchor="ctr"/>
           <a:lstStyle/>
           <a:p>
-            <a:pPr algn="l" indent="0" marL="0">
+            <a:pPr marL="0" indent="0" algn="l">
               <a:buNone/>
             </a:pPr>
             <a:r>
@@ -11456,7 +12494,7 @@
           <a:bodyPr wrap="square" lIns="0" tIns="0" rIns="0" bIns="0" rtlCol="0" anchor="t"/>
           <a:lstStyle/>
           <a:p>
-            <a:pPr algn="l" indent="0" marL="0">
+            <a:pPr marL="0" indent="0" algn="l">
               <a:buNone/>
             </a:pPr>
             <a:r>
@@ -11495,7 +12533,7 @@
           <a:bodyPr wrap="square" lIns="0" tIns="0" rIns="0" bIns="0" rtlCol="0" anchor="ctr"/>
           <a:lstStyle/>
           <a:p>
-            <a:pPr algn="l" indent="0" marL="0">
+            <a:pPr marL="0" indent="0" algn="l">
               <a:buNone/>
             </a:pPr>
             <a:r>
@@ -11534,7 +12572,7 @@
           <a:bodyPr wrap="square" lIns="0" tIns="0" rIns="0" bIns="0" rtlCol="0" anchor="ctr"/>
           <a:lstStyle/>
           <a:p>
-            <a:pPr algn="r" indent="0" marL="0">
+            <a:pPr marL="0" indent="0" algn="r">
               <a:buNone/>
             </a:pPr>
             <a:r>
@@ -11568,6 +12606,7 @@
         <a:solidFill>
           <a:srgbClr val="1A1A24"/>
         </a:solidFill>
+        <a:effectLst/>
       </p:bgPr>
     </p:bg>
     <p:spTree>
@@ -11605,11 +12644,11 @@
           <a:bodyPr wrap="square" lIns="0" tIns="0" rIns="0" bIns="0" rtlCol="0" anchor="ctr"/>
           <a:lstStyle/>
           <a:p>
-            <a:pPr algn="l" indent="0" marL="0">
-              <a:buNone/>
-            </a:pPr>
-            <a:r>
-              <a:rPr lang="en-US" sz="3200" b="1" spc="100" kern="0" dirty="0">
+            <a:pPr marL="0" indent="0" algn="l">
+              <a:buNone/>
+            </a:pPr>
+            <a:r>
+              <a:rPr lang="en-US" sz="3200" b="1" kern="0" spc="100" dirty="0">
                 <a:solidFill>
                   <a:srgbClr val="FFFFFF"/>
                 </a:solidFill>
@@ -11642,6 +12681,13 @@
           </a:solidFill>
           <a:ln/>
         </p:spPr>
+        <p:txBody>
+          <a:bodyPr/>
+          <a:lstStyle/>
+          <a:p>
+            <a:endParaRPr lang="fr-FR"/>
+          </a:p>
+        </p:txBody>
       </p:sp>
       <p:sp>
         <p:nvSpPr>
@@ -11669,6 +12715,13 @@
             <a:prstDash val="solid"/>
           </a:ln>
         </p:spPr>
+        <p:txBody>
+          <a:bodyPr/>
+          <a:lstStyle/>
+          <a:p>
+            <a:endParaRPr lang="fr-FR"/>
+          </a:p>
+        </p:txBody>
       </p:sp>
       <p:sp>
         <p:nvSpPr>
@@ -11691,7 +12744,7 @@
           <a:bodyPr wrap="square" lIns="0" tIns="0" rIns="0" bIns="0" rtlCol="0" anchor="ctr"/>
           <a:lstStyle/>
           <a:p>
-            <a:pPr algn="l" indent="0" marL="0">
+            <a:pPr marL="0" indent="0" algn="l">
               <a:buNone/>
             </a:pPr>
             <a:r>
@@ -11730,7 +12783,7 @@
           <a:bodyPr wrap="square" lIns="0" tIns="0" rIns="0" bIns="0" rtlCol="0" anchor="t"/>
           <a:lstStyle/>
           <a:p>
-            <a:pPr algn="l" indent="0" marL="0">
+            <a:pPr marL="0" indent="0" algn="l">
               <a:buNone/>
             </a:pPr>
             <a:r>
@@ -11774,6 +12827,13 @@
             <a:prstDash val="solid"/>
           </a:ln>
         </p:spPr>
+        <p:txBody>
+          <a:bodyPr/>
+          <a:lstStyle/>
+          <a:p>
+            <a:endParaRPr lang="fr-FR"/>
+          </a:p>
+        </p:txBody>
       </p:sp>
       <p:sp>
         <p:nvSpPr>
@@ -11796,7 +12856,7 @@
           <a:bodyPr wrap="square" lIns="0" tIns="0" rIns="0" bIns="0" rtlCol="0" anchor="ctr"/>
           <a:lstStyle/>
           <a:p>
-            <a:pPr algn="l" indent="0" marL="0">
+            <a:pPr marL="0" indent="0" algn="l">
               <a:buNone/>
             </a:pPr>
             <a:r>
@@ -11835,7 +12895,7 @@
           <a:bodyPr wrap="square" lIns="0" tIns="0" rIns="0" bIns="0" rtlCol="0" anchor="t"/>
           <a:lstStyle/>
           <a:p>
-            <a:pPr algn="l" indent="0" marL="0">
+            <a:pPr marL="0" indent="0" algn="l">
               <a:buNone/>
             </a:pPr>
             <a:r>
@@ -11879,6 +12939,13 @@
             <a:prstDash val="solid"/>
           </a:ln>
         </p:spPr>
+        <p:txBody>
+          <a:bodyPr/>
+          <a:lstStyle/>
+          <a:p>
+            <a:endParaRPr lang="fr-FR"/>
+          </a:p>
+        </p:txBody>
       </p:sp>
       <p:sp>
         <p:nvSpPr>
@@ -11901,7 +12968,7 @@
           <a:bodyPr wrap="square" lIns="0" tIns="0" rIns="0" bIns="0" rtlCol="0" anchor="ctr"/>
           <a:lstStyle/>
           <a:p>
-            <a:pPr algn="l" indent="0" marL="0">
+            <a:pPr marL="0" indent="0" algn="l">
               <a:buNone/>
             </a:pPr>
             <a:r>
@@ -11940,7 +13007,7 @@
           <a:bodyPr wrap="square" lIns="0" tIns="0" rIns="0" bIns="0" rtlCol="0" anchor="t"/>
           <a:lstStyle/>
           <a:p>
-            <a:pPr algn="l" indent="0" marL="0">
+            <a:pPr marL="0" indent="0" algn="l">
               <a:buNone/>
             </a:pPr>
             <a:r>
@@ -11979,7 +13046,7 @@
           <a:bodyPr wrap="square" lIns="0" tIns="0" rIns="0" bIns="0" rtlCol="0" anchor="ctr"/>
           <a:lstStyle/>
           <a:p>
-            <a:pPr algn="l" indent="0" marL="0">
+            <a:pPr marL="0" indent="0" algn="l">
               <a:buNone/>
             </a:pPr>
             <a:r>
@@ -12018,7 +13085,7 @@
           <a:bodyPr wrap="square" lIns="0" tIns="0" rIns="0" bIns="0" rtlCol="0" anchor="ctr"/>
           <a:lstStyle/>
           <a:p>
-            <a:pPr algn="r" indent="0" marL="0">
+            <a:pPr marL="0" indent="0" algn="r">
               <a:buNone/>
             </a:pPr>
             <a:r>
@@ -12052,6 +13119,7 @@
         <a:solidFill>
           <a:srgbClr val="1A1A24"/>
         </a:solidFill>
+        <a:effectLst/>
       </p:bgPr>
     </p:bg>
     <p:spTree>
@@ -12089,11 +13157,11 @@
           <a:bodyPr wrap="square" lIns="0" tIns="0" rIns="0" bIns="0" rtlCol="0" anchor="ctr"/>
           <a:lstStyle/>
           <a:p>
-            <a:pPr algn="l" indent="0" marL="0">
-              <a:buNone/>
-            </a:pPr>
-            <a:r>
-              <a:rPr lang="en-US" sz="3200" b="1" spc="100" kern="0" dirty="0">
+            <a:pPr marL="0" indent="0" algn="l">
+              <a:buNone/>
+            </a:pPr>
+            <a:r>
+              <a:rPr lang="en-US" sz="3200" b="1" kern="0" spc="100" dirty="0">
                 <a:solidFill>
                   <a:srgbClr val="FFFFFF"/>
                 </a:solidFill>
@@ -12126,6 +13194,13 @@
           </a:solidFill>
           <a:ln/>
         </p:spPr>
+        <p:txBody>
+          <a:bodyPr/>
+          <a:lstStyle/>
+          <a:p>
+            <a:endParaRPr lang="fr-FR"/>
+          </a:p>
+        </p:txBody>
       </p:sp>
       <p:sp>
         <p:nvSpPr>
@@ -12148,11 +13223,11 @@
           <a:bodyPr wrap="square" lIns="0" tIns="0" rIns="0" bIns="0" rtlCol="0" anchor="ctr"/>
           <a:lstStyle/>
           <a:p>
-            <a:pPr algn="l" indent="0" marL="0">
-              <a:buNone/>
-            </a:pPr>
-            <a:r>
-              <a:rPr lang="en-US" sz="1500" b="1" spc="100" kern="0" dirty="0">
+            <a:pPr marL="0" indent="0" algn="l">
+              <a:buNone/>
+            </a:pPr>
+            <a:r>
+              <a:rPr lang="en-US" sz="1500" b="1" kern="0" spc="100" dirty="0">
                 <a:solidFill>
                   <a:srgbClr val="C1121F"/>
                 </a:solidFill>
@@ -12187,7 +13262,7 @@
           <a:bodyPr wrap="square" lIns="0" tIns="0" rIns="0" bIns="0" rtlCol="0" anchor="t"/>
           <a:lstStyle/>
           <a:p>
-            <a:pPr algn="l" indent="0" marL="0">
+            <a:pPr marL="0" indent="0" algn="l">
               <a:buNone/>
             </a:pPr>
             <a:r>
@@ -12226,11 +13301,11 @@
           <a:bodyPr wrap="square" lIns="0" tIns="0" rIns="0" bIns="0" rtlCol="0" anchor="ctr"/>
           <a:lstStyle/>
           <a:p>
-            <a:pPr algn="l" indent="0" marL="0">
-              <a:buNone/>
-            </a:pPr>
-            <a:r>
-              <a:rPr lang="en-US" sz="1500" b="1" spc="100" kern="0" dirty="0">
+            <a:pPr marL="0" indent="0" algn="l">
+              <a:buNone/>
+            </a:pPr>
+            <a:r>
+              <a:rPr lang="en-US" sz="1500" b="1" kern="0" spc="100" dirty="0">
                 <a:solidFill>
                   <a:srgbClr val="C1121F"/>
                 </a:solidFill>
@@ -12265,7 +13340,7 @@
           <a:bodyPr wrap="square" lIns="0" tIns="0" rIns="0" bIns="0" rtlCol="0" anchor="t"/>
           <a:lstStyle/>
           <a:p>
-            <a:pPr algn="l" indent="0" marL="0">
+            <a:pPr marL="0" indent="0" algn="l">
               <a:buNone/>
             </a:pPr>
             <a:r>
@@ -12304,11 +13379,11 @@
           <a:bodyPr wrap="square" lIns="0" tIns="0" rIns="0" bIns="0" rtlCol="0" anchor="ctr"/>
           <a:lstStyle/>
           <a:p>
-            <a:pPr algn="l" indent="0" marL="0">
-              <a:buNone/>
-            </a:pPr>
-            <a:r>
-              <a:rPr lang="en-US" sz="1500" b="1" spc="100" kern="0" dirty="0">
+            <a:pPr marL="0" indent="0" algn="l">
+              <a:buNone/>
+            </a:pPr>
+            <a:r>
+              <a:rPr lang="en-US" sz="1500" b="1" kern="0" spc="100" dirty="0">
                 <a:solidFill>
                   <a:srgbClr val="C1121F"/>
                 </a:solidFill>
@@ -12343,7 +13418,7 @@
           <a:bodyPr wrap="square" lIns="0" tIns="0" rIns="0" bIns="0" rtlCol="0" anchor="t"/>
           <a:lstStyle/>
           <a:p>
-            <a:pPr algn="l" indent="0" marL="0">
+            <a:pPr marL="0" indent="0" algn="l">
               <a:buNone/>
             </a:pPr>
             <a:r>
@@ -12382,7 +13457,7 @@
           <a:bodyPr wrap="square" lIns="0" tIns="0" rIns="0" bIns="0" rtlCol="0" anchor="ctr"/>
           <a:lstStyle/>
           <a:p>
-            <a:pPr algn="l" indent="0" marL="0">
+            <a:pPr marL="0" indent="0" algn="l">
               <a:buNone/>
             </a:pPr>
             <a:r>
@@ -12421,11 +13496,11 @@
           <a:bodyPr wrap="square" lIns="0" tIns="0" rIns="0" bIns="0" rtlCol="0" anchor="ctr"/>
           <a:lstStyle/>
           <a:p>
-            <a:pPr algn="l" indent="0" marL="0">
-              <a:buNone/>
-            </a:pPr>
-            <a:r>
-              <a:rPr lang="en-US" sz="1500" b="1" spc="100" kern="0" dirty="0">
+            <a:pPr marL="0" indent="0" algn="l">
+              <a:buNone/>
+            </a:pPr>
+            <a:r>
+              <a:rPr lang="en-US" sz="1500" b="1" kern="0" spc="100" dirty="0">
                 <a:solidFill>
                   <a:srgbClr val="C1121F"/>
                 </a:solidFill>
@@ -12458,6 +13533,13 @@
           </a:solidFill>
           <a:ln/>
         </p:spPr>
+        <p:txBody>
+          <a:bodyPr/>
+          <a:lstStyle/>
+          <a:p>
+            <a:endParaRPr lang="fr-FR"/>
+          </a:p>
+        </p:txBody>
       </p:sp>
       <p:sp>
         <p:nvSpPr>
@@ -12480,7 +13562,7 @@
           <a:bodyPr wrap="square" lIns="0" tIns="0" rIns="0" bIns="0" rtlCol="0" anchor="t"/>
           <a:lstStyle/>
           <a:p>
-            <a:pPr algn="l" indent="0" marL="0">
+            <a:pPr marL="0" indent="0" algn="l">
               <a:buNone/>
             </a:pPr>
             <a:r>
@@ -12517,6 +13599,13 @@
           </a:solidFill>
           <a:ln/>
         </p:spPr>
+        <p:txBody>
+          <a:bodyPr/>
+          <a:lstStyle/>
+          <a:p>
+            <a:endParaRPr lang="fr-FR"/>
+          </a:p>
+        </p:txBody>
       </p:sp>
       <p:sp>
         <p:nvSpPr>
@@ -12539,7 +13628,7 @@
           <a:bodyPr wrap="square" lIns="0" tIns="0" rIns="0" bIns="0" rtlCol="0" anchor="t"/>
           <a:lstStyle/>
           <a:p>
-            <a:pPr algn="l" indent="0" marL="0">
+            <a:pPr marL="0" indent="0" algn="l">
               <a:buNone/>
             </a:pPr>
             <a:r>
@@ -12551,7 +13640,7 @@
                 <a:ea typeface="Inter" pitchFamily="34" charset="-122"/>
                 <a:cs typeface="Inter" pitchFamily="34" charset="-120"/>
               </a:rPr>
-              <a:t>Stockage objet externe pour les images</a:t>
+              <a:t>Lien sécurisé à token pour créer son mot de passe (au lieu du provisoire par mail)</a:t>
             </a:r>
             <a:endParaRPr lang="en-US" sz="1400" dirty="0"/>
           </a:p>
@@ -12576,6 +13665,13 @@
           </a:solidFill>
           <a:ln/>
         </p:spPr>
+        <p:txBody>
+          <a:bodyPr/>
+          <a:lstStyle/>
+          <a:p>
+            <a:endParaRPr lang="fr-FR"/>
+          </a:p>
+        </p:txBody>
       </p:sp>
       <p:sp>
         <p:nvSpPr>
@@ -12598,7 +13694,7 @@
           <a:bodyPr wrap="square" lIns="0" tIns="0" rIns="0" bIns="0" rtlCol="0" anchor="t"/>
           <a:lstStyle/>
           <a:p>
-            <a:pPr algn="l" indent="0" marL="0">
+            <a:pPr marL="0" indent="0" algn="l">
               <a:buNone/>
             </a:pPr>
             <a:r>
@@ -12635,6 +13731,13 @@
           </a:solidFill>
           <a:ln/>
         </p:spPr>
+        <p:txBody>
+          <a:bodyPr/>
+          <a:lstStyle/>
+          <a:p>
+            <a:endParaRPr lang="fr-FR"/>
+          </a:p>
+        </p:txBody>
       </p:sp>
       <p:sp>
         <p:nvSpPr>
@@ -12657,7 +13760,7 @@
           <a:bodyPr wrap="square" lIns="0" tIns="0" rIns="0" bIns="0" rtlCol="0" anchor="t"/>
           <a:lstStyle/>
           <a:p>
-            <a:pPr algn="l" indent="0" marL="0">
+            <a:pPr marL="0" indent="0" algn="l">
               <a:buNone/>
             </a:pPr>
             <a:r>
@@ -12694,6 +13797,13 @@
           </a:solidFill>
           <a:ln/>
         </p:spPr>
+        <p:txBody>
+          <a:bodyPr/>
+          <a:lstStyle/>
+          <a:p>
+            <a:endParaRPr lang="fr-FR"/>
+          </a:p>
+        </p:txBody>
       </p:sp>
       <p:sp>
         <p:nvSpPr>
@@ -12716,7 +13826,7 @@
           <a:bodyPr wrap="square" lIns="0" tIns="0" rIns="0" bIns="0" rtlCol="0" anchor="t"/>
           <a:lstStyle/>
           <a:p>
-            <a:pPr algn="l" indent="0" marL="0">
+            <a:pPr marL="0" indent="0" algn="l">
               <a:buNone/>
             </a:pPr>
             <a:r>
@@ -12728,7 +13838,7 @@
                 <a:ea typeface="Inter" pitchFamily="34" charset="-122"/>
                 <a:cs typeface="Inter" pitchFamily="34" charset="-120"/>
               </a:rPr>
-              <a:t>Statistiques de fréquentation</a:t>
+              <a:t>Règles métier validées en backend (erreurs 409 au lieu de 500)</a:t>
             </a:r>
             <a:endParaRPr lang="en-US" sz="1400" dirty="0"/>
           </a:p>
@@ -12755,7 +13865,7 @@
           <a:bodyPr wrap="square" lIns="0" tIns="0" rIns="0" bIns="0" rtlCol="0" anchor="ctr"/>
           <a:lstStyle/>
           <a:p>
-            <a:pPr algn="l" indent="0" marL="0">
+            <a:pPr marL="0" indent="0" algn="l">
               <a:buNone/>
             </a:pPr>
             <a:r>
@@ -12794,7 +13904,7 @@
           <a:bodyPr wrap="square" lIns="0" tIns="0" rIns="0" bIns="0" rtlCol="0" anchor="ctr"/>
           <a:lstStyle/>
           <a:p>
-            <a:pPr algn="r" indent="0" marL="0">
+            <a:pPr marL="0" indent="0" algn="r">
               <a:buNone/>
             </a:pPr>
             <a:r>
@@ -12828,6 +13938,7 @@
         <a:solidFill>
           <a:srgbClr val="1A1A24"/>
         </a:solidFill>
+        <a:effectLst/>
       </p:bgPr>
     </p:bg>
     <p:spTree>
@@ -12865,11 +13976,11 @@
           <a:bodyPr wrap="square" lIns="0" tIns="0" rIns="0" bIns="0" rtlCol="0" anchor="ctr"/>
           <a:lstStyle/>
           <a:p>
-            <a:pPr algn="l" indent="0" marL="0">
-              <a:buNone/>
-            </a:pPr>
-            <a:r>
-              <a:rPr lang="en-US" sz="5200" b="1" spc="100" kern="0" dirty="0">
+            <a:pPr marL="0" indent="0" algn="l">
+              <a:buNone/>
+            </a:pPr>
+            <a:r>
+              <a:rPr lang="en-US" sz="5200" b="1" kern="0" spc="100" dirty="0">
                 <a:solidFill>
                   <a:srgbClr val="FFFFFF"/>
                 </a:solidFill>
@@ -12902,6 +14013,13 @@
           </a:solidFill>
           <a:ln/>
         </p:spPr>
+        <p:txBody>
+          <a:bodyPr/>
+          <a:lstStyle/>
+          <a:p>
+            <a:endParaRPr lang="fr-FR"/>
+          </a:p>
+        </p:txBody>
       </p:sp>
       <p:sp>
         <p:nvSpPr>
@@ -12924,7 +14042,7 @@
           <a:bodyPr wrap="square" lIns="0" tIns="0" rIns="0" bIns="0" rtlCol="0" anchor="ctr"/>
           <a:lstStyle/>
           <a:p>
-            <a:pPr algn="l" indent="0" marL="0">
+            <a:pPr marL="0" indent="0" algn="l">
               <a:buNone/>
             </a:pPr>
             <a:r>
@@ -12963,7 +14081,7 @@
           <a:bodyPr wrap="square" lIns="0" tIns="0" rIns="0" bIns="0" rtlCol="0" anchor="ctr"/>
           <a:lstStyle/>
           <a:p>
-            <a:pPr algn="l" indent="0" marL="0">
+            <a:pPr marL="0" indent="0" algn="l">
               <a:buNone/>
             </a:pPr>
             <a:r>
@@ -13002,7 +14120,7 @@
           <a:bodyPr wrap="square" lIns="0" tIns="0" rIns="0" bIns="0" rtlCol="0" anchor="ctr"/>
           <a:lstStyle/>
           <a:p>
-            <a:pPr algn="l" indent="0" marL="0">
+            <a:pPr marL="0" indent="0" algn="l">
               <a:buNone/>
             </a:pPr>
             <a:r>
@@ -13041,7 +14159,7 @@
           <a:bodyPr wrap="square" lIns="0" tIns="0" rIns="0" bIns="0" rtlCol="0" anchor="ctr"/>
           <a:lstStyle/>
           <a:p>
-            <a:pPr algn="r" indent="0" marL="0">
+            <a:pPr marL="0" indent="0" algn="r">
               <a:buNone/>
             </a:pPr>
             <a:r>
@@ -13075,6 +14193,7 @@
         <a:solidFill>
           <a:srgbClr val="1A1A24"/>
         </a:solidFill>
+        <a:effectLst/>
       </p:bgPr>
     </p:bg>
     <p:spTree>
@@ -13112,11 +14231,11 @@
           <a:bodyPr wrap="square" lIns="0" tIns="0" rIns="0" bIns="0" rtlCol="0" anchor="ctr"/>
           <a:lstStyle/>
           <a:p>
-            <a:pPr algn="l" indent="0" marL="0">
-              <a:buNone/>
-            </a:pPr>
-            <a:r>
-              <a:rPr lang="en-US" sz="3200" b="1" spc="100" kern="0" dirty="0">
+            <a:pPr marL="0" indent="0" algn="l">
+              <a:buNone/>
+            </a:pPr>
+            <a:r>
+              <a:rPr lang="en-US" sz="3200" b="1" kern="0" spc="100" dirty="0">
                 <a:solidFill>
                   <a:srgbClr val="FFFFFF"/>
                 </a:solidFill>
@@ -13149,6 +14268,13 @@
           </a:solidFill>
           <a:ln/>
         </p:spPr>
+        <p:txBody>
+          <a:bodyPr/>
+          <a:lstStyle/>
+          <a:p>
+            <a:endParaRPr lang="fr-FR"/>
+          </a:p>
+        </p:txBody>
       </p:sp>
       <p:sp>
         <p:nvSpPr>
@@ -13169,6 +14295,13 @@
           </a:solidFill>
           <a:ln/>
         </p:spPr>
+        <p:txBody>
+          <a:bodyPr/>
+          <a:lstStyle/>
+          <a:p>
+            <a:endParaRPr lang="fr-FR"/>
+          </a:p>
+        </p:txBody>
       </p:sp>
       <p:sp>
         <p:nvSpPr>
@@ -13191,7 +14324,7 @@
           <a:bodyPr wrap="square" lIns="0" tIns="0" rIns="0" bIns="0" rtlCol="0" anchor="t"/>
           <a:lstStyle/>
           <a:p>
-            <a:pPr algn="l" indent="0" marL="0">
+            <a:pPr marL="0" indent="0" algn="l">
               <a:buNone/>
             </a:pPr>
             <a:r>
@@ -13228,6 +14361,13 @@
           </a:solidFill>
           <a:ln/>
         </p:spPr>
+        <p:txBody>
+          <a:bodyPr/>
+          <a:lstStyle/>
+          <a:p>
+            <a:endParaRPr lang="fr-FR"/>
+          </a:p>
+        </p:txBody>
       </p:sp>
       <p:sp>
         <p:nvSpPr>
@@ -13238,7 +14378,7 @@
         <p:spPr>
           <a:xfrm>
             <a:off x="896112" y="3246120"/>
-            <a:ext cx="5852160" cy="411480"/>
+            <a:ext cx="6647688" cy="411480"/>
           </a:xfrm>
           <a:prstGeom prst="rect">
             <a:avLst/>
@@ -13250,7 +14390,7 @@
           <a:bodyPr wrap="square" lIns="0" tIns="0" rIns="0" bIns="0" rtlCol="0" anchor="t"/>
           <a:lstStyle/>
           <a:p>
-            <a:pPr algn="l" indent="0" marL="0">
+            <a:pPr marL="0" indent="0" algn="l">
               <a:buNone/>
             </a:pPr>
             <a:r>
@@ -13262,7 +14402,7 @@
                 <a:ea typeface="Inter" pitchFamily="34" charset="-122"/>
                 <a:cs typeface="Inter" pitchFamily="34" charset="-120"/>
               </a:rPr>
-              <a:t>Aucune page d’actualités → communication 1 à 2 fois par an</a:t>
+              <a:t>Aucune page d’actualités → communication 1 à 2 fois par an </a:t>
             </a:r>
             <a:endParaRPr lang="en-US" sz="1600" dirty="0"/>
           </a:p>
@@ -13287,6 +14427,13 @@
           </a:solidFill>
           <a:ln/>
         </p:spPr>
+        <p:txBody>
+          <a:bodyPr/>
+          <a:lstStyle/>
+          <a:p>
+            <a:endParaRPr lang="fr-FR"/>
+          </a:p>
+        </p:txBody>
       </p:sp>
       <p:sp>
         <p:nvSpPr>
@@ -13309,7 +14456,7 @@
           <a:bodyPr wrap="square" lIns="0" tIns="0" rIns="0" bIns="0" rtlCol="0" anchor="t"/>
           <a:lstStyle/>
           <a:p>
-            <a:pPr algn="l" indent="0" marL="0">
+            <a:pPr marL="0" indent="0" algn="l">
               <a:buNone/>
             </a:pPr>
             <a:r>
@@ -13335,7 +14482,7 @@
         </p:nvSpPr>
         <p:spPr>
           <a:xfrm>
-            <a:off x="7790688" y="1801368"/>
+            <a:off x="7790688" y="1246785"/>
             <a:ext cx="3621024" cy="1999335"/>
           </a:xfrm>
           <a:prstGeom prst="rect">
@@ -13351,24 +14498,31 @@
             <a:prstDash val="solid"/>
           </a:ln>
         </p:spPr>
+        <p:txBody>
+          <a:bodyPr/>
+          <a:lstStyle/>
+          <a:p>
+            <a:endParaRPr lang="fr-FR"/>
+          </a:p>
+        </p:txBody>
       </p:sp>
       <p:pic>
         <p:nvPicPr>
-          <p:cNvPr id="11" name="Image 0" descr="old_accueil.png">    </p:cNvPr>
+          <p:cNvPr id="11" name="Image 0" descr="old_accueil.png"/>
           <p:cNvPicPr>
             <a:picLocks noChangeAspect="1"/>
           </p:cNvPicPr>
           <p:nvPr/>
         </p:nvPicPr>
         <p:blipFill>
-          <a:blip r:embed="rId1"/>
+          <a:blip r:embed="rId3"/>
           <a:stretch>
             <a:fillRect/>
           </a:stretch>
         </p:blipFill>
         <p:spPr>
           <a:xfrm>
-            <a:off x="7818120" y="1828800"/>
+            <a:off x="7818120" y="1274217"/>
             <a:ext cx="3566160" cy="1944471"/>
           </a:xfrm>
           <a:prstGeom prst="rect">
@@ -13400,17 +14554,24 @@
             <a:prstDash val="solid"/>
           </a:ln>
         </p:spPr>
+        <p:txBody>
+          <a:bodyPr/>
+          <a:lstStyle/>
+          <a:p>
+            <a:endParaRPr lang="fr-FR"/>
+          </a:p>
+        </p:txBody>
       </p:sp>
       <p:pic>
         <p:nvPicPr>
-          <p:cNvPr id="13" name="Image 1" descr="old_prog.png">    </p:cNvPr>
+          <p:cNvPr id="13" name="Image 1" descr="old_prog.png"/>
           <p:cNvPicPr>
             <a:picLocks noChangeAspect="1"/>
           </p:cNvPicPr>
           <p:nvPr/>
         </p:nvPicPr>
         <p:blipFill>
-          <a:blip r:embed="rId2"/>
+          <a:blip r:embed="rId4"/>
           <a:stretch>
             <a:fillRect/>
           </a:stretch>
@@ -13433,7 +14594,7 @@
         </p:nvSpPr>
         <p:spPr>
           <a:xfrm>
-            <a:off x="7543800" y="5897880"/>
+            <a:off x="7543800" y="3370935"/>
             <a:ext cx="4114800" cy="320040"/>
           </a:xfrm>
           <a:prstGeom prst="rect">
@@ -13446,7 +14607,7 @@
           <a:bodyPr wrap="square" lIns="0" tIns="0" rIns="0" bIns="0" rtlCol="0" anchor="ctr"/>
           <a:lstStyle/>
           <a:p>
-            <a:pPr algn="ctr" indent="0" marL="0">
+            <a:pPr marL="0" indent="0" algn="ctr">
               <a:buNone/>
             </a:pPr>
             <a:r>
@@ -13485,7 +14646,7 @@
           <a:bodyPr wrap="square" lIns="0" tIns="0" rIns="0" bIns="0" rtlCol="0" anchor="ctr"/>
           <a:lstStyle/>
           <a:p>
-            <a:pPr algn="l" indent="0" marL="0">
+            <a:pPr marL="0" indent="0" algn="l">
               <a:buNone/>
             </a:pPr>
             <a:r>
@@ -13524,7 +14685,7 @@
           <a:bodyPr wrap="square" lIns="0" tIns="0" rIns="0" bIns="0" rtlCol="0" anchor="ctr"/>
           <a:lstStyle/>
           <a:p>
-            <a:pPr algn="r" indent="0" marL="0">
+            <a:pPr marL="0" indent="0" algn="r">
               <a:buNone/>
             </a:pPr>
             <a:r>
@@ -13558,6 +14719,7 @@
         <a:solidFill>
           <a:srgbClr val="1A1A24"/>
         </a:solidFill>
+        <a:effectLst/>
       </p:bgPr>
     </p:bg>
     <p:spTree>
@@ -13595,11 +14757,11 @@
           <a:bodyPr wrap="square" lIns="0" tIns="0" rIns="0" bIns="0" rtlCol="0" anchor="ctr"/>
           <a:lstStyle/>
           <a:p>
-            <a:pPr algn="l" indent="0" marL="0">
-              <a:buNone/>
-            </a:pPr>
-            <a:r>
-              <a:rPr lang="en-US" sz="3200" b="1" spc="100" kern="0" dirty="0">
+            <a:pPr marL="0" indent="0" algn="l">
+              <a:buNone/>
+            </a:pPr>
+            <a:r>
+              <a:rPr lang="en-US" sz="3200" b="1" kern="0" spc="100" dirty="0">
                 <a:solidFill>
                   <a:srgbClr val="FFFFFF"/>
                 </a:solidFill>
@@ -13632,6 +14794,13 @@
           </a:solidFill>
           <a:ln/>
         </p:spPr>
+        <p:txBody>
+          <a:bodyPr/>
+          <a:lstStyle/>
+          <a:p>
+            <a:endParaRPr lang="fr-FR"/>
+          </a:p>
+        </p:txBody>
       </p:sp>
       <p:sp>
         <p:nvSpPr>
@@ -13654,11 +14823,11 @@
           <a:bodyPr wrap="square" lIns="0" tIns="0" rIns="0" bIns="0" rtlCol="0" anchor="ctr"/>
           <a:lstStyle/>
           <a:p>
-            <a:pPr algn="l" indent="0" marL="0">
-              <a:buNone/>
-            </a:pPr>
-            <a:r>
-              <a:rPr lang="en-US" sz="1500" b="1" spc="100" kern="0" dirty="0">
+            <a:pPr marL="0" indent="0" algn="l">
+              <a:buNone/>
+            </a:pPr>
+            <a:r>
+              <a:rPr lang="en-US" sz="1500" b="1" kern="0" spc="100" dirty="0">
                 <a:solidFill>
                   <a:srgbClr val="C1121F"/>
                 </a:solidFill>
@@ -13691,6 +14860,13 @@
           </a:solidFill>
           <a:ln/>
         </p:spPr>
+        <p:txBody>
+          <a:bodyPr/>
+          <a:lstStyle/>
+          <a:p>
+            <a:endParaRPr lang="fr-FR"/>
+          </a:p>
+        </p:txBody>
       </p:sp>
       <p:sp>
         <p:nvSpPr>
@@ -13713,7 +14889,7 @@
           <a:bodyPr wrap="square" lIns="0" tIns="0" rIns="0" bIns="0" rtlCol="0" anchor="t"/>
           <a:lstStyle/>
           <a:p>
-            <a:pPr algn="l" indent="0" marL="0">
+            <a:pPr marL="0" indent="0" algn="l">
               <a:buNone/>
             </a:pPr>
             <a:r>
@@ -13750,6 +14926,13 @@
           </a:solidFill>
           <a:ln/>
         </p:spPr>
+        <p:txBody>
+          <a:bodyPr/>
+          <a:lstStyle/>
+          <a:p>
+            <a:endParaRPr lang="fr-FR"/>
+          </a:p>
+        </p:txBody>
       </p:sp>
       <p:sp>
         <p:nvSpPr>
@@ -13772,7 +14955,7 @@
           <a:bodyPr wrap="square" lIns="0" tIns="0" rIns="0" bIns="0" rtlCol="0" anchor="t"/>
           <a:lstStyle/>
           <a:p>
-            <a:pPr algn="l" indent="0" marL="0">
+            <a:pPr marL="0" indent="0" algn="l">
               <a:buNone/>
             </a:pPr>
             <a:r>
@@ -13809,6 +14992,13 @@
           </a:solidFill>
           <a:ln/>
         </p:spPr>
+        <p:txBody>
+          <a:bodyPr/>
+          <a:lstStyle/>
+          <a:p>
+            <a:endParaRPr lang="fr-FR"/>
+          </a:p>
+        </p:txBody>
       </p:sp>
       <p:sp>
         <p:nvSpPr>
@@ -13831,7 +15021,7 @@
           <a:bodyPr wrap="square" lIns="0" tIns="0" rIns="0" bIns="0" rtlCol="0" anchor="t"/>
           <a:lstStyle/>
           <a:p>
-            <a:pPr algn="l" indent="0" marL="0">
+            <a:pPr marL="0" indent="0" algn="l">
               <a:buNone/>
             </a:pPr>
             <a:r>
@@ -13868,6 +15058,13 @@
           </a:solidFill>
           <a:ln/>
         </p:spPr>
+        <p:txBody>
+          <a:bodyPr/>
+          <a:lstStyle/>
+          <a:p>
+            <a:endParaRPr lang="fr-FR"/>
+          </a:p>
+        </p:txBody>
       </p:sp>
       <p:sp>
         <p:nvSpPr>
@@ -13890,7 +15087,7 @@
           <a:bodyPr wrap="square" lIns="0" tIns="0" rIns="0" bIns="0" rtlCol="0" anchor="t"/>
           <a:lstStyle/>
           <a:p>
-            <a:pPr algn="l" indent="0" marL="0">
+            <a:pPr marL="0" indent="0" algn="l">
               <a:buNone/>
             </a:pPr>
             <a:r>
@@ -13927,6 +15124,13 @@
           </a:solidFill>
           <a:ln/>
         </p:spPr>
+        <p:txBody>
+          <a:bodyPr/>
+          <a:lstStyle/>
+          <a:p>
+            <a:endParaRPr lang="fr-FR"/>
+          </a:p>
+        </p:txBody>
       </p:sp>
       <p:sp>
         <p:nvSpPr>
@@ -13949,7 +15153,7 @@
           <a:bodyPr wrap="square" lIns="0" tIns="0" rIns="0" bIns="0" rtlCol="0" anchor="t"/>
           <a:lstStyle/>
           <a:p>
-            <a:pPr algn="l" indent="0" marL="0">
+            <a:pPr marL="0" indent="0" algn="l">
               <a:buNone/>
             </a:pPr>
             <a:r>
@@ -13988,11 +15192,11 @@
           <a:bodyPr wrap="square" lIns="0" tIns="0" rIns="0" bIns="0" rtlCol="0" anchor="ctr"/>
           <a:lstStyle/>
           <a:p>
-            <a:pPr algn="l" indent="0" marL="0">
-              <a:buNone/>
-            </a:pPr>
-            <a:r>
-              <a:rPr lang="en-US" sz="1500" b="1" spc="100" kern="0" dirty="0">
+            <a:pPr marL="0" indent="0" algn="l">
+              <a:buNone/>
+            </a:pPr>
+            <a:r>
+              <a:rPr lang="en-US" sz="1500" b="1" kern="0" spc="100" dirty="0">
                 <a:solidFill>
                   <a:srgbClr val="C1121F"/>
                 </a:solidFill>
@@ -14027,7 +15231,7 @@
           <a:bodyPr wrap="square" lIns="0" tIns="0" rIns="0" bIns="0" rtlCol="0" anchor="ctr"/>
           <a:lstStyle/>
           <a:p>
-            <a:pPr algn="l" indent="0" marL="0">
+            <a:pPr marL="0" indent="0" algn="l">
               <a:buNone/>
             </a:pPr>
             <a:r>
@@ -14064,6 +15268,13 @@
           </a:solidFill>
           <a:ln/>
         </p:spPr>
+        <p:txBody>
+          <a:bodyPr/>
+          <a:lstStyle/>
+          <a:p>
+            <a:endParaRPr lang="fr-FR"/>
+          </a:p>
+        </p:txBody>
       </p:sp>
       <p:sp>
         <p:nvSpPr>
@@ -14086,7 +15297,7 @@
           <a:bodyPr wrap="square" lIns="0" tIns="0" rIns="0" bIns="0" rtlCol="0" anchor="t"/>
           <a:lstStyle/>
           <a:p>
-            <a:pPr algn="l" indent="0" marL="0">
+            <a:pPr marL="0" indent="0" algn="l">
               <a:buNone/>
             </a:pPr>
             <a:r>
@@ -14123,6 +15334,13 @@
           </a:solidFill>
           <a:ln/>
         </p:spPr>
+        <p:txBody>
+          <a:bodyPr/>
+          <a:lstStyle/>
+          <a:p>
+            <a:endParaRPr lang="fr-FR"/>
+          </a:p>
+        </p:txBody>
       </p:sp>
       <p:sp>
         <p:nvSpPr>
@@ -14145,7 +15363,7 @@
           <a:bodyPr wrap="square" lIns="0" tIns="0" rIns="0" bIns="0" rtlCol="0" anchor="t"/>
           <a:lstStyle/>
           <a:p>
-            <a:pPr algn="l" indent="0" marL="0">
+            <a:pPr marL="0" indent="0" algn="l">
               <a:buNone/>
             </a:pPr>
             <a:r>
@@ -14182,6 +15400,13 @@
           </a:solidFill>
           <a:ln/>
         </p:spPr>
+        <p:txBody>
+          <a:bodyPr/>
+          <a:lstStyle/>
+          <a:p>
+            <a:endParaRPr lang="fr-FR"/>
+          </a:p>
+        </p:txBody>
       </p:sp>
       <p:sp>
         <p:nvSpPr>
@@ -14204,7 +15429,7 @@
           <a:bodyPr wrap="square" lIns="0" tIns="0" rIns="0" bIns="0" rtlCol="0" anchor="t"/>
           <a:lstStyle/>
           <a:p>
-            <a:pPr algn="l" indent="0" marL="0">
+            <a:pPr marL="0" indent="0" algn="l">
               <a:buNone/>
             </a:pPr>
             <a:r>
@@ -14241,6 +15466,13 @@
           </a:solidFill>
           <a:ln/>
         </p:spPr>
+        <p:txBody>
+          <a:bodyPr/>
+          <a:lstStyle/>
+          <a:p>
+            <a:endParaRPr lang="fr-FR"/>
+          </a:p>
+        </p:txBody>
       </p:sp>
       <p:sp>
         <p:nvSpPr>
@@ -14263,7 +15495,7 @@
           <a:bodyPr wrap="square" lIns="0" tIns="0" rIns="0" bIns="0" rtlCol="0" anchor="t"/>
           <a:lstStyle/>
           <a:p>
-            <a:pPr algn="l" indent="0" marL="0">
+            <a:pPr marL="0" indent="0" algn="l">
               <a:buNone/>
             </a:pPr>
             <a:r>
@@ -14302,7 +15534,7 @@
           <a:bodyPr wrap="square" lIns="0" tIns="0" rIns="0" bIns="0" rtlCol="0" anchor="ctr"/>
           <a:lstStyle/>
           <a:p>
-            <a:pPr algn="l" indent="0" marL="0">
+            <a:pPr marL="0" indent="0" algn="l">
               <a:buNone/>
             </a:pPr>
             <a:r>
@@ -14339,6 +15571,13 @@
           </a:solidFill>
           <a:ln/>
         </p:spPr>
+        <p:txBody>
+          <a:bodyPr/>
+          <a:lstStyle/>
+          <a:p>
+            <a:endParaRPr lang="fr-FR"/>
+          </a:p>
+        </p:txBody>
       </p:sp>
       <p:sp>
         <p:nvSpPr>
@@ -14361,7 +15600,7 @@
           <a:bodyPr wrap="square" lIns="0" tIns="0" rIns="0" bIns="0" rtlCol="0" anchor="t"/>
           <a:lstStyle/>
           <a:p>
-            <a:pPr algn="l" indent="0" marL="0">
+            <a:pPr marL="0" indent="0" algn="l">
               <a:buNone/>
             </a:pPr>
             <a:r>
@@ -14398,6 +15637,13 @@
           </a:solidFill>
           <a:ln/>
         </p:spPr>
+        <p:txBody>
+          <a:bodyPr/>
+          <a:lstStyle/>
+          <a:p>
+            <a:endParaRPr lang="fr-FR"/>
+          </a:p>
+        </p:txBody>
       </p:sp>
       <p:sp>
         <p:nvSpPr>
@@ -14420,7 +15666,7 @@
           <a:bodyPr wrap="square" lIns="0" tIns="0" rIns="0" bIns="0" rtlCol="0" anchor="t"/>
           <a:lstStyle/>
           <a:p>
-            <a:pPr algn="l" indent="0" marL="0">
+            <a:pPr marL="0" indent="0" algn="l">
               <a:buNone/>
             </a:pPr>
             <a:r>
@@ -14459,7 +15705,7 @@
           <a:bodyPr wrap="square" lIns="0" tIns="0" rIns="0" bIns="0" rtlCol="0" anchor="ctr"/>
           <a:lstStyle/>
           <a:p>
-            <a:pPr algn="l" indent="0" marL="0">
+            <a:pPr marL="0" indent="0" algn="l">
               <a:buNone/>
             </a:pPr>
             <a:r>
@@ -14498,7 +15744,7 @@
           <a:bodyPr wrap="square" lIns="0" tIns="0" rIns="0" bIns="0" rtlCol="0" anchor="ctr"/>
           <a:lstStyle/>
           <a:p>
-            <a:pPr algn="r" indent="0" marL="0">
+            <a:pPr marL="0" indent="0" algn="r">
               <a:buNone/>
             </a:pPr>
             <a:r>
@@ -14532,6 +15778,7 @@
         <a:solidFill>
           <a:srgbClr val="1A1A24"/>
         </a:solidFill>
+        <a:effectLst/>
       </p:bgPr>
     </p:bg>
     <p:spTree>
@@ -14569,11 +15816,11 @@
           <a:bodyPr wrap="square" lIns="0" tIns="0" rIns="0" bIns="0" rtlCol="0" anchor="ctr"/>
           <a:lstStyle/>
           <a:p>
-            <a:pPr algn="l" indent="0" marL="0">
-              <a:buNone/>
-            </a:pPr>
-            <a:r>
-              <a:rPr lang="en-US" sz="3200" b="1" spc="100" kern="0" dirty="0">
+            <a:pPr marL="0" indent="0" algn="l">
+              <a:buNone/>
+            </a:pPr>
+            <a:r>
+              <a:rPr lang="en-US" sz="3200" b="1" kern="0" spc="100" dirty="0">
                 <a:solidFill>
                   <a:srgbClr val="FFFFFF"/>
                 </a:solidFill>
@@ -14606,6 +15853,13 @@
           </a:solidFill>
           <a:ln/>
         </p:spPr>
+        <p:txBody>
+          <a:bodyPr/>
+          <a:lstStyle/>
+          <a:p>
+            <a:endParaRPr lang="fr-FR"/>
+          </a:p>
+        </p:txBody>
       </p:sp>
       <p:sp>
         <p:nvSpPr>
@@ -14628,7 +15882,7 @@
           <a:bodyPr wrap="square" lIns="0" tIns="0" rIns="0" bIns="0" rtlCol="0" anchor="ctr"/>
           <a:lstStyle/>
           <a:p>
-            <a:pPr algn="l" indent="0" marL="0">
+            <a:pPr marL="0" indent="0" algn="l">
               <a:buNone/>
             </a:pPr>
             <a:r>
@@ -14667,7 +15921,7 @@
           <a:bodyPr wrap="square" lIns="0" tIns="0" rIns="0" bIns="0" rtlCol="0" anchor="t"/>
           <a:lstStyle/>
           <a:p>
-            <a:pPr algn="l" indent="0" marL="0">
+            <a:pPr marL="0" indent="0" algn="l">
               <a:buNone/>
             </a:pPr>
             <a:r>
@@ -14706,7 +15960,7 @@
           <a:bodyPr wrap="square" lIns="0" tIns="0" rIns="0" bIns="0" rtlCol="0" anchor="ctr"/>
           <a:lstStyle/>
           <a:p>
-            <a:pPr algn="l" indent="0" marL="0">
+            <a:pPr marL="0" indent="0" algn="l">
               <a:buNone/>
             </a:pPr>
             <a:r>
@@ -14745,7 +15999,7 @@
           <a:bodyPr wrap="square" lIns="0" tIns="0" rIns="0" bIns="0" rtlCol="0" anchor="t"/>
           <a:lstStyle/>
           <a:p>
-            <a:pPr algn="l" indent="0" marL="0">
+            <a:pPr marL="0" indent="0" algn="l">
               <a:buNone/>
             </a:pPr>
             <a:r>
@@ -14784,7 +16038,7 @@
           <a:bodyPr wrap="square" lIns="0" tIns="0" rIns="0" bIns="0" rtlCol="0" anchor="ctr"/>
           <a:lstStyle/>
           <a:p>
-            <a:pPr algn="l" indent="0" marL="0">
+            <a:pPr marL="0" indent="0" algn="l">
               <a:buNone/>
             </a:pPr>
             <a:r>
@@ -14804,7 +16058,7 @@
       </p:sp>
       <p:graphicFrame>
         <p:nvGraphicFramePr>
-          <p:cNvPr id="6" name="Table 0"/>
+          <p:cNvPr id="9" name="Table 0"/>
           <p:cNvGraphicFramePr>
             <a:graphicFrameLocks noGrp="1"/>
           </p:cNvGraphicFramePr>
@@ -14818,17 +16072,41 @@
         </p:nvGraphicFramePr>
         <p:xfrm>
           <a:off x="640080" y="3611880"/>
-          <a:ext cx="10881360" cy="914400"/>
+          <a:ext cx="10881360" cy="2304288"/>
         </p:xfrm>
         <a:graphic>
           <a:graphicData uri="http://schemas.openxmlformats.org/drawingml/2006/table">
             <a:tbl>
               <a:tblPr/>
               <a:tblGrid>
-                <a:gridCol w="5669280"/>
-                <a:gridCol w="1737360"/>
-                <a:gridCol w="1737360"/>
-                <a:gridCol w="1737360"/>
+                <a:gridCol w="5669280">
+                  <a:extLst>
+                    <a:ext uri="{9D8B030D-6E8A-4147-A177-3AD203B41FA5}">
+                      <a16:colId xmlns:a16="http://schemas.microsoft.com/office/drawing/2014/main" val="20000"/>
+                    </a:ext>
+                  </a:extLst>
+                </a:gridCol>
+                <a:gridCol w="1737360">
+                  <a:extLst>
+                    <a:ext uri="{9D8B030D-6E8A-4147-A177-3AD203B41FA5}">
+                      <a16:colId xmlns:a16="http://schemas.microsoft.com/office/drawing/2014/main" val="20001"/>
+                    </a:ext>
+                  </a:extLst>
+                </a:gridCol>
+                <a:gridCol w="1737360">
+                  <a:extLst>
+                    <a:ext uri="{9D8B030D-6E8A-4147-A177-3AD203B41FA5}">
+                      <a16:colId xmlns:a16="http://schemas.microsoft.com/office/drawing/2014/main" val="20002"/>
+                    </a:ext>
+                  </a:extLst>
+                </a:gridCol>
+                <a:gridCol w="1737360">
+                  <a:extLst>
+                    <a:ext uri="{9D8B030D-6E8A-4147-A177-3AD203B41FA5}">
+                      <a16:colId xmlns:a16="http://schemas.microsoft.com/office/drawing/2014/main" val="20003"/>
+                    </a:ext>
+                  </a:extLst>
+                </a:gridCol>
               </a:tblGrid>
               <a:tr h="384048">
                 <a:tc>
@@ -14836,7 +16114,7 @@
                     <a:bodyPr/>
                     <a:lstStyle/>
                     <a:p>
-                      <a:pPr algn="l" indent="0" marL="0">
+                      <a:pPr marL="0" indent="0" algn="l">
                         <a:buNone/>
                       </a:pPr>
                       <a:r>
@@ -14904,7 +16182,7 @@
                     <a:bodyPr/>
                     <a:lstStyle/>
                     <a:p>
-                      <a:pPr algn="ctr" indent="0" marL="0">
+                      <a:pPr marL="0" indent="0" algn="ctr">
                         <a:buNone/>
                       </a:pPr>
                       <a:r>
@@ -14972,7 +16250,7 @@
                     <a:bodyPr/>
                     <a:lstStyle/>
                     <a:p>
-                      <a:pPr algn="ctr" indent="0" marL="0">
+                      <a:pPr marL="0" indent="0" algn="ctr">
                         <a:buNone/>
                       </a:pPr>
                       <a:r>
@@ -15040,7 +16318,7 @@
                     <a:bodyPr/>
                     <a:lstStyle/>
                     <a:p>
-                      <a:pPr algn="ctr" indent="0" marL="0">
+                      <a:pPr marL="0" indent="0" algn="ctr">
                         <a:buNone/>
                       </a:pPr>
                       <a:r>
@@ -15103,6 +16381,11 @@
                     </a:solidFill>
                   </a:tcPr>
                 </a:tc>
+                <a:extLst>
+                  <a:ext uri="{0D108BD9-81ED-4DB2-BD59-A6C34878D82A}">
+                    <a16:rowId xmlns:a16="http://schemas.microsoft.com/office/drawing/2014/main" val="10000"/>
+                  </a:ext>
+                </a:extLst>
               </a:tr>
               <a:tr h="384048">
                 <a:tc>
@@ -15110,7 +16393,7 @@
                     <a:bodyPr/>
                     <a:lstStyle/>
                     <a:p>
-                      <a:pPr algn="l" indent="0" marL="0">
+                      <a:pPr marL="0" indent="0" algn="l">
                         <a:buNone/>
                       </a:pPr>
                       <a:r>
@@ -15178,7 +16461,7 @@
                     <a:bodyPr/>
                     <a:lstStyle/>
                     <a:p>
-                      <a:pPr algn="ctr" indent="0" marL="0">
+                      <a:pPr marL="0" indent="0" algn="ctr">
                         <a:buNone/>
                       </a:pPr>
                       <a:r>
@@ -15246,7 +16529,7 @@
                     <a:bodyPr/>
                     <a:lstStyle/>
                     <a:p>
-                      <a:pPr algn="ctr" indent="0" marL="0">
+                      <a:pPr marL="0" indent="0" algn="ctr">
                         <a:buNone/>
                       </a:pPr>
                       <a:r>
@@ -15314,7 +16597,7 @@
                     <a:bodyPr/>
                     <a:lstStyle/>
                     <a:p>
-                      <a:pPr algn="ctr" indent="0" marL="0">
+                      <a:pPr marL="0" indent="0" algn="ctr">
                         <a:buNone/>
                       </a:pPr>
                       <a:r>
@@ -15377,6 +16660,11 @@
                     </a:solidFill>
                   </a:tcPr>
                 </a:tc>
+                <a:extLst>
+                  <a:ext uri="{0D108BD9-81ED-4DB2-BD59-A6C34878D82A}">
+                    <a16:rowId xmlns:a16="http://schemas.microsoft.com/office/drawing/2014/main" val="10001"/>
+                  </a:ext>
+                </a:extLst>
               </a:tr>
               <a:tr h="384048">
                 <a:tc>
@@ -15384,7 +16672,7 @@
                     <a:bodyPr/>
                     <a:lstStyle/>
                     <a:p>
-                      <a:pPr algn="l" indent="0" marL="0">
+                      <a:pPr marL="0" indent="0" algn="l">
                         <a:buNone/>
                       </a:pPr>
                       <a:r>
@@ -15452,7 +16740,7 @@
                     <a:bodyPr/>
                     <a:lstStyle/>
                     <a:p>
-                      <a:pPr algn="ctr" indent="0" marL="0">
+                      <a:pPr marL="0" indent="0" algn="ctr">
                         <a:buNone/>
                       </a:pPr>
                       <a:r>
@@ -15520,7 +16808,7 @@
                     <a:bodyPr/>
                     <a:lstStyle/>
                     <a:p>
-                      <a:pPr algn="ctr" indent="0" marL="0">
+                      <a:pPr marL="0" indent="0" algn="ctr">
                         <a:buNone/>
                       </a:pPr>
                       <a:r>
@@ -15588,7 +16876,7 @@
                     <a:bodyPr/>
                     <a:lstStyle/>
                     <a:p>
-                      <a:pPr algn="ctr" indent="0" marL="0">
+                      <a:pPr marL="0" indent="0" algn="ctr">
                         <a:buNone/>
                       </a:pPr>
                       <a:r>
@@ -15651,6 +16939,11 @@
                     </a:solidFill>
                   </a:tcPr>
                 </a:tc>
+                <a:extLst>
+                  <a:ext uri="{0D108BD9-81ED-4DB2-BD59-A6C34878D82A}">
+                    <a16:rowId xmlns:a16="http://schemas.microsoft.com/office/drawing/2014/main" val="10002"/>
+                  </a:ext>
+                </a:extLst>
               </a:tr>
               <a:tr h="384048">
                 <a:tc>
@@ -15658,7 +16951,7 @@
                     <a:bodyPr/>
                     <a:lstStyle/>
                     <a:p>
-                      <a:pPr algn="l" indent="0" marL="0">
+                      <a:pPr marL="0" indent="0" algn="l">
                         <a:buNone/>
                       </a:pPr>
                       <a:r>
@@ -15726,7 +17019,7 @@
                     <a:bodyPr/>
                     <a:lstStyle/>
                     <a:p>
-                      <a:pPr algn="ctr" indent="0" marL="0">
+                      <a:pPr marL="0" indent="0" algn="ctr">
                         <a:buNone/>
                       </a:pPr>
                       <a:r>
@@ -15794,7 +17087,7 @@
                     <a:bodyPr/>
                     <a:lstStyle/>
                     <a:p>
-                      <a:pPr algn="ctr" indent="0" marL="0">
+                      <a:pPr marL="0" indent="0" algn="ctr">
                         <a:buNone/>
                       </a:pPr>
                       <a:r>
@@ -15862,7 +17155,7 @@
                     <a:bodyPr/>
                     <a:lstStyle/>
                     <a:p>
-                      <a:pPr algn="ctr" indent="0" marL="0">
+                      <a:pPr marL="0" indent="0" algn="ctr">
                         <a:buNone/>
                       </a:pPr>
                       <a:r>
@@ -15925,6 +17218,11 @@
                     </a:solidFill>
                   </a:tcPr>
                 </a:tc>
+                <a:extLst>
+                  <a:ext uri="{0D108BD9-81ED-4DB2-BD59-A6C34878D82A}">
+                    <a16:rowId xmlns:a16="http://schemas.microsoft.com/office/drawing/2014/main" val="10003"/>
+                  </a:ext>
+                </a:extLst>
               </a:tr>
               <a:tr h="384048">
                 <a:tc>
@@ -15932,7 +17230,7 @@
                     <a:bodyPr/>
                     <a:lstStyle/>
                     <a:p>
-                      <a:pPr algn="l" indent="0" marL="0">
+                      <a:pPr marL="0" indent="0" algn="l">
                         <a:buNone/>
                       </a:pPr>
                       <a:r>
@@ -16000,7 +17298,7 @@
                     <a:bodyPr/>
                     <a:lstStyle/>
                     <a:p>
-                      <a:pPr algn="ctr" indent="0" marL="0">
+                      <a:pPr marL="0" indent="0" algn="ctr">
                         <a:buNone/>
                       </a:pPr>
                       <a:r>
@@ -16068,7 +17366,7 @@
                     <a:bodyPr/>
                     <a:lstStyle/>
                     <a:p>
-                      <a:pPr algn="ctr" indent="0" marL="0">
+                      <a:pPr marL="0" indent="0" algn="ctr">
                         <a:buNone/>
                       </a:pPr>
                       <a:r>
@@ -16136,7 +17434,7 @@
                     <a:bodyPr/>
                     <a:lstStyle/>
                     <a:p>
-                      <a:pPr algn="ctr" indent="0" marL="0">
+                      <a:pPr marL="0" indent="0" algn="ctr">
                         <a:buNone/>
                       </a:pPr>
                       <a:r>
@@ -16199,6 +17497,11 @@
                     </a:solidFill>
                   </a:tcPr>
                 </a:tc>
+                <a:extLst>
+                  <a:ext uri="{0D108BD9-81ED-4DB2-BD59-A6C34878D82A}">
+                    <a16:rowId xmlns:a16="http://schemas.microsoft.com/office/drawing/2014/main" val="10004"/>
+                  </a:ext>
+                </a:extLst>
               </a:tr>
               <a:tr h="384048">
                 <a:tc>
@@ -16206,7 +17509,7 @@
                     <a:bodyPr/>
                     <a:lstStyle/>
                     <a:p>
-                      <a:pPr algn="l" indent="0" marL="0">
+                      <a:pPr marL="0" indent="0" algn="l">
                         <a:buNone/>
                       </a:pPr>
                       <a:r>
@@ -16274,7 +17577,7 @@
                     <a:bodyPr/>
                     <a:lstStyle/>
                     <a:p>
-                      <a:pPr algn="ctr" indent="0" marL="0">
+                      <a:pPr marL="0" indent="0" algn="ctr">
                         <a:buNone/>
                       </a:pPr>
                       <a:r>
@@ -16342,7 +17645,7 @@
                     <a:bodyPr/>
                     <a:lstStyle/>
                     <a:p>
-                      <a:pPr algn="ctr" indent="0" marL="0">
+                      <a:pPr marL="0" indent="0" algn="ctr">
                         <a:buNone/>
                       </a:pPr>
                       <a:r>
@@ -16410,7 +17713,7 @@
                     <a:bodyPr/>
                     <a:lstStyle/>
                     <a:p>
-                      <a:pPr algn="ctr" indent="0" marL="0">
+                      <a:pPr marL="0" indent="0" algn="ctr">
                         <a:buNone/>
                       </a:pPr>
                       <a:r>
@@ -16473,6 +17776,11 @@
                     </a:solidFill>
                   </a:tcPr>
                 </a:tc>
+                <a:extLst>
+                  <a:ext uri="{0D108BD9-81ED-4DB2-BD59-A6C34878D82A}">
+                    <a16:rowId xmlns:a16="http://schemas.microsoft.com/office/drawing/2014/main" val="10005"/>
+                  </a:ext>
+                </a:extLst>
               </a:tr>
             </a:tbl>
           </a:graphicData>
@@ -16499,7 +17807,7 @@
           <a:bodyPr wrap="square" lIns="0" tIns="0" rIns="0" bIns="0" rtlCol="0" anchor="ctr"/>
           <a:lstStyle/>
           <a:p>
-            <a:pPr algn="l" indent="0" marL="0">
+            <a:pPr marL="0" indent="0" algn="l">
               <a:buNone/>
             </a:pPr>
             <a:r>
@@ -16538,7 +17846,7 @@
           <a:bodyPr wrap="square" lIns="0" tIns="0" rIns="0" bIns="0" rtlCol="0" anchor="ctr"/>
           <a:lstStyle/>
           <a:p>
-            <a:pPr algn="r" indent="0" marL="0">
+            <a:pPr marL="0" indent="0" algn="r">
               <a:buNone/>
             </a:pPr>
             <a:r>
@@ -16572,6 +17880,7 @@
         <a:solidFill>
           <a:srgbClr val="1A1A24"/>
         </a:solidFill>
+        <a:effectLst/>
       </p:bgPr>
     </p:bg>
     <p:spTree>
@@ -16609,11 +17918,11 @@
           <a:bodyPr wrap="square" lIns="0" tIns="0" rIns="0" bIns="0" rtlCol="0" anchor="ctr"/>
           <a:lstStyle/>
           <a:p>
-            <a:pPr algn="l" indent="0" marL="0">
-              <a:buNone/>
-            </a:pPr>
-            <a:r>
-              <a:rPr lang="en-US" sz="3200" b="1" spc="100" kern="0" dirty="0">
+            <a:pPr marL="0" indent="0" algn="l">
+              <a:buNone/>
+            </a:pPr>
+            <a:r>
+              <a:rPr lang="en-US" sz="3200" b="1" kern="0" spc="100" dirty="0">
                 <a:solidFill>
                   <a:srgbClr val="FFFFFF"/>
                 </a:solidFill>
@@ -16646,6 +17955,13 @@
           </a:solidFill>
           <a:ln/>
         </p:spPr>
+        <p:txBody>
+          <a:bodyPr/>
+          <a:lstStyle/>
+          <a:p>
+            <a:endParaRPr lang="fr-FR"/>
+          </a:p>
+        </p:txBody>
       </p:sp>
       <p:sp>
         <p:nvSpPr>
@@ -16666,6 +17982,13 @@
           </a:solidFill>
           <a:ln/>
         </p:spPr>
+        <p:txBody>
+          <a:bodyPr/>
+          <a:lstStyle/>
+          <a:p>
+            <a:endParaRPr lang="fr-FR"/>
+          </a:p>
+        </p:txBody>
       </p:sp>
       <p:sp>
         <p:nvSpPr>
@@ -16688,7 +18011,7 @@
           <a:bodyPr wrap="square" lIns="0" tIns="0" rIns="0" bIns="0" rtlCol="0" anchor="t"/>
           <a:lstStyle/>
           <a:p>
-            <a:pPr algn="l" indent="0" marL="0">
+            <a:pPr marL="0" indent="0" algn="l">
               <a:buNone/>
             </a:pPr>
             <a:r>
@@ -16725,6 +18048,13 @@
           </a:solidFill>
           <a:ln/>
         </p:spPr>
+        <p:txBody>
+          <a:bodyPr/>
+          <a:lstStyle/>
+          <a:p>
+            <a:endParaRPr lang="fr-FR"/>
+          </a:p>
+        </p:txBody>
       </p:sp>
       <p:sp>
         <p:nvSpPr>
@@ -16747,7 +18077,7 @@
           <a:bodyPr wrap="square" lIns="0" tIns="0" rIns="0" bIns="0" rtlCol="0" anchor="t"/>
           <a:lstStyle/>
           <a:p>
-            <a:pPr algn="l" indent="0" marL="0">
+            <a:pPr marL="0" indent="0" algn="l">
               <a:buNone/>
             </a:pPr>
             <a:r>
@@ -16784,6 +18114,13 @@
           </a:solidFill>
           <a:ln/>
         </p:spPr>
+        <p:txBody>
+          <a:bodyPr/>
+          <a:lstStyle/>
+          <a:p>
+            <a:endParaRPr lang="fr-FR"/>
+          </a:p>
+        </p:txBody>
       </p:sp>
       <p:sp>
         <p:nvSpPr>
@@ -16806,7 +18143,7 @@
           <a:bodyPr wrap="square" lIns="0" tIns="0" rIns="0" bIns="0" rtlCol="0" anchor="t"/>
           <a:lstStyle/>
           <a:p>
-            <a:pPr algn="l" indent="0" marL="0">
+            <a:pPr marL="0" indent="0" algn="l">
               <a:buNone/>
             </a:pPr>
             <a:r>
@@ -16843,6 +18180,13 @@
           </a:solidFill>
           <a:ln/>
         </p:spPr>
+        <p:txBody>
+          <a:bodyPr/>
+          <a:lstStyle/>
+          <a:p>
+            <a:endParaRPr lang="fr-FR"/>
+          </a:p>
+        </p:txBody>
       </p:sp>
       <p:sp>
         <p:nvSpPr>
@@ -16865,7 +18209,7 @@
           <a:bodyPr wrap="square" lIns="0" tIns="0" rIns="0" bIns="0" rtlCol="0" anchor="t"/>
           <a:lstStyle/>
           <a:p>
-            <a:pPr algn="l" indent="0" marL="0">
+            <a:pPr marL="0" indent="0" algn="l">
               <a:buNone/>
             </a:pPr>
             <a:r>
@@ -16907,17 +18251,24 @@
             <a:prstDash val="solid"/>
           </a:ln>
         </p:spPr>
+        <p:txBody>
+          <a:bodyPr/>
+          <a:lstStyle/>
+          <a:p>
+            <a:endParaRPr lang="fr-FR"/>
+          </a:p>
+        </p:txBody>
       </p:sp>
       <p:pic>
         <p:nvPicPr>
-          <p:cNvPr id="13" name="Image 0" descr="kanban.png">    </p:cNvPr>
+          <p:cNvPr id="13" name="Image 0" descr="kanban.png"/>
           <p:cNvPicPr>
             <a:picLocks noChangeAspect="1"/>
           </p:cNvPicPr>
           <p:nvPr/>
         </p:nvPicPr>
         <p:blipFill>
-          <a:blip r:embed="rId1"/>
+          <a:blip r:embed="rId3"/>
           <a:stretch>
             <a:fillRect/>
           </a:stretch>
@@ -16953,7 +18304,7 @@
           <a:bodyPr wrap="square" lIns="0" tIns="0" rIns="0" bIns="0" rtlCol="0" anchor="ctr"/>
           <a:lstStyle/>
           <a:p>
-            <a:pPr algn="ctr" indent="0" marL="0">
+            <a:pPr marL="0" indent="0" algn="ctr">
               <a:buNone/>
             </a:pPr>
             <a:r>
@@ -16992,7 +18343,7 @@
           <a:bodyPr wrap="square" lIns="0" tIns="0" rIns="0" bIns="0" rtlCol="0" anchor="ctr"/>
           <a:lstStyle/>
           <a:p>
-            <a:pPr algn="l" indent="0" marL="0">
+            <a:pPr marL="0" indent="0" algn="l">
               <a:buNone/>
             </a:pPr>
             <a:r>
@@ -17031,7 +18382,7 @@
           <a:bodyPr wrap="square" lIns="0" tIns="0" rIns="0" bIns="0" rtlCol="0" anchor="ctr"/>
           <a:lstStyle/>
           <a:p>
-            <a:pPr algn="r" indent="0" marL="0">
+            <a:pPr marL="0" indent="0" algn="r">
               <a:buNone/>
             </a:pPr>
             <a:r>
@@ -17065,6 +18416,7 @@
         <a:solidFill>
           <a:srgbClr val="1A1A24"/>
         </a:solidFill>
+        <a:effectLst/>
       </p:bgPr>
     </p:bg>
     <p:spTree>
@@ -17102,11 +18454,11 @@
           <a:bodyPr wrap="square" lIns="0" tIns="0" rIns="0" bIns="0" rtlCol="0" anchor="ctr"/>
           <a:lstStyle/>
           <a:p>
-            <a:pPr algn="l" indent="0" marL="0">
-              <a:buNone/>
-            </a:pPr>
-            <a:r>
-              <a:rPr lang="en-US" sz="3200" b="1" spc="100" kern="0" dirty="0">
+            <a:pPr marL="0" indent="0" algn="l">
+              <a:buNone/>
+            </a:pPr>
+            <a:r>
+              <a:rPr lang="en-US" sz="3200" b="1" kern="0" spc="100" dirty="0">
                 <a:solidFill>
                   <a:srgbClr val="FFFFFF"/>
                 </a:solidFill>
@@ -17139,6 +18491,13 @@
           </a:solidFill>
           <a:ln/>
         </p:spPr>
+        <p:txBody>
+          <a:bodyPr/>
+          <a:lstStyle/>
+          <a:p>
+            <a:endParaRPr lang="fr-FR"/>
+          </a:p>
+        </p:txBody>
       </p:sp>
       <p:sp>
         <p:nvSpPr>
@@ -17164,17 +18523,24 @@
             <a:prstDash val="solid"/>
           </a:ln>
         </p:spPr>
+        <p:txBody>
+          <a:bodyPr/>
+          <a:lstStyle/>
+          <a:p>
+            <a:endParaRPr lang="fr-FR"/>
+          </a:p>
+        </p:txBody>
       </p:sp>
       <p:pic>
         <p:nvPicPr>
-          <p:cNvPr id="5" name="Image 0" descr="gantt.png">    </p:cNvPr>
+          <p:cNvPr id="5" name="Image 0" descr="gantt.png"/>
           <p:cNvPicPr>
             <a:picLocks noChangeAspect="1"/>
           </p:cNvPicPr>
           <p:nvPr/>
         </p:nvPicPr>
         <p:blipFill>
-          <a:blip r:embed="rId1"/>
+          <a:blip r:embed="rId3"/>
           <a:stretch>
             <a:fillRect/>
           </a:stretch>
@@ -17210,7 +18576,7 @@
           <a:bodyPr wrap="square" lIns="0" tIns="0" rIns="0" bIns="0" rtlCol="0" anchor="ctr"/>
           <a:lstStyle/>
           <a:p>
-            <a:pPr algn="ctr" indent="0" marL="0">
+            <a:pPr marL="0" indent="0" algn="ctr">
               <a:buNone/>
             </a:pPr>
             <a:r>
@@ -17247,6 +18613,13 @@
           </a:solidFill>
           <a:ln/>
         </p:spPr>
+        <p:txBody>
+          <a:bodyPr/>
+          <a:lstStyle/>
+          <a:p>
+            <a:endParaRPr lang="fr-FR"/>
+          </a:p>
+        </p:txBody>
       </p:sp>
       <p:sp>
         <p:nvSpPr>
@@ -17269,7 +18642,7 @@
           <a:bodyPr wrap="square" lIns="0" tIns="0" rIns="0" bIns="0" rtlCol="0" anchor="t"/>
           <a:lstStyle/>
           <a:p>
-            <a:pPr algn="l" indent="0" marL="0">
+            <a:pPr marL="0" indent="0" algn="l">
               <a:buNone/>
             </a:pPr>
             <a:r>
@@ -17306,6 +18679,13 @@
           </a:solidFill>
           <a:ln/>
         </p:spPr>
+        <p:txBody>
+          <a:bodyPr/>
+          <a:lstStyle/>
+          <a:p>
+            <a:endParaRPr lang="fr-FR"/>
+          </a:p>
+        </p:txBody>
       </p:sp>
       <p:sp>
         <p:nvSpPr>
@@ -17328,7 +18708,7 @@
           <a:bodyPr wrap="square" lIns="0" tIns="0" rIns="0" bIns="0" rtlCol="0" anchor="t"/>
           <a:lstStyle/>
           <a:p>
-            <a:pPr algn="l" indent="0" marL="0">
+            <a:pPr marL="0" indent="0" algn="l">
               <a:buNone/>
             </a:pPr>
             <a:r>
@@ -17367,7 +18747,7 @@
           <a:bodyPr wrap="square" lIns="0" tIns="0" rIns="0" bIns="0" rtlCol="0" anchor="ctr"/>
           <a:lstStyle/>
           <a:p>
-            <a:pPr algn="l" indent="0" marL="0">
+            <a:pPr marL="0" indent="0" algn="l">
               <a:buNone/>
             </a:pPr>
             <a:r>
@@ -17406,7 +18786,7 @@
           <a:bodyPr wrap="square" lIns="0" tIns="0" rIns="0" bIns="0" rtlCol="0" anchor="ctr"/>
           <a:lstStyle/>
           <a:p>
-            <a:pPr algn="r" indent="0" marL="0">
+            <a:pPr marL="0" indent="0" algn="r">
               <a:buNone/>
             </a:pPr>
             <a:r>
@@ -17440,6 +18820,7 @@
         <a:solidFill>
           <a:srgbClr val="1A1A24"/>
         </a:solidFill>
+        <a:effectLst/>
       </p:bgPr>
     </p:bg>
     <p:spTree>
@@ -17477,11 +18858,11 @@
           <a:bodyPr wrap="square" lIns="0" tIns="0" rIns="0" bIns="0" rtlCol="0" anchor="ctr"/>
           <a:lstStyle/>
           <a:p>
-            <a:pPr algn="l" indent="0" marL="0">
-              <a:buNone/>
-            </a:pPr>
-            <a:r>
-              <a:rPr lang="en-US" sz="3200" b="1" spc="100" kern="0" dirty="0">
+            <a:pPr marL="0" indent="0" algn="l">
+              <a:buNone/>
+            </a:pPr>
+            <a:r>
+              <a:rPr lang="en-US" sz="3200" b="1" kern="0" spc="100" dirty="0">
                 <a:solidFill>
                   <a:srgbClr val="FFFFFF"/>
                 </a:solidFill>
@@ -17514,6 +18895,13 @@
           </a:solidFill>
           <a:ln/>
         </p:spPr>
+        <p:txBody>
+          <a:bodyPr/>
+          <a:lstStyle/>
+          <a:p>
+            <a:endParaRPr lang="fr-FR"/>
+          </a:p>
+        </p:txBody>
       </p:sp>
       <p:sp>
         <p:nvSpPr>
@@ -17534,6 +18922,13 @@
           </a:solidFill>
           <a:ln/>
         </p:spPr>
+        <p:txBody>
+          <a:bodyPr/>
+          <a:lstStyle/>
+          <a:p>
+            <a:endParaRPr lang="fr-FR"/>
+          </a:p>
+        </p:txBody>
       </p:sp>
       <p:sp>
         <p:nvSpPr>
@@ -17556,7 +18951,7 @@
           <a:bodyPr wrap="square" lIns="0" tIns="0" rIns="0" bIns="0" rtlCol="0" anchor="t"/>
           <a:lstStyle/>
           <a:p>
-            <a:pPr algn="l" indent="0" marL="0">
+            <a:pPr marL="0" indent="0" algn="l">
               <a:buNone/>
             </a:pPr>
             <a:r>
@@ -17593,6 +18988,13 @@
           </a:solidFill>
           <a:ln/>
         </p:spPr>
+        <p:txBody>
+          <a:bodyPr/>
+          <a:lstStyle/>
+          <a:p>
+            <a:endParaRPr lang="fr-FR"/>
+          </a:p>
+        </p:txBody>
       </p:sp>
       <p:sp>
         <p:nvSpPr>
@@ -17602,8 +19004,8 @@
         </p:nvSpPr>
         <p:spPr>
           <a:xfrm>
-            <a:off x="896112" y="3200400"/>
-            <a:ext cx="4480560" cy="411480"/>
+            <a:off x="896111" y="3200400"/>
+            <a:ext cx="5358385" cy="411480"/>
           </a:xfrm>
           <a:prstGeom prst="rect">
             <a:avLst/>
@@ -17615,7 +19017,7 @@
           <a:bodyPr wrap="square" lIns="0" tIns="0" rIns="0" bIns="0" rtlCol="0" anchor="t"/>
           <a:lstStyle/>
           <a:p>
-            <a:pPr algn="l" indent="0" marL="0">
+            <a:pPr marL="0" indent="0" algn="l">
               <a:buNone/>
             </a:pPr>
             <a:r>
@@ -17627,7 +19029,29 @@
                 <a:ea typeface="Inter" pitchFamily="34" charset="-122"/>
                 <a:cs typeface="Inter" pitchFamily="34" charset="-120"/>
               </a:rPr>
-              <a:t>Visiteur — 7 cas publics : accueil, programmation, artiste, actualités, infos, contact</a:t>
+              <a:t>Visiteur — 7 cas publics : accueil, programmation, artiste, </a:t>
+            </a:r>
+            <a:r>
+              <a:rPr lang="en-US" sz="1600" dirty="0" err="1">
+                <a:solidFill>
+                  <a:srgbClr val="C7C7D1"/>
+                </a:solidFill>
+                <a:latin typeface="Inter" pitchFamily="34" charset="0"/>
+                <a:ea typeface="Inter" pitchFamily="34" charset="-122"/>
+                <a:cs typeface="Inter" pitchFamily="34" charset="-120"/>
+              </a:rPr>
+              <a:t>actualités</a:t>
+            </a:r>
+            <a:r>
+              <a:rPr lang="en-US" sz="1600" dirty="0">
+                <a:solidFill>
+                  <a:srgbClr val="C7C7D1"/>
+                </a:solidFill>
+                <a:latin typeface="Inter" pitchFamily="34" charset="0"/>
+                <a:ea typeface="Inter" pitchFamily="34" charset="-122"/>
+                <a:cs typeface="Inter" pitchFamily="34" charset="-120"/>
+              </a:rPr>
+              <a:t>, infos, contact</a:t>
             </a:r>
             <a:endParaRPr lang="en-US" sz="1600" dirty="0"/>
           </a:p>
@@ -17652,6 +19076,13 @@
           </a:solidFill>
           <a:ln/>
         </p:spPr>
+        <p:txBody>
+          <a:bodyPr/>
+          <a:lstStyle/>
+          <a:p>
+            <a:endParaRPr lang="fr-FR"/>
+          </a:p>
+        </p:txBody>
       </p:sp>
       <p:sp>
         <p:nvSpPr>
@@ -17674,7 +19105,7 @@
           <a:bodyPr wrap="square" lIns="0" tIns="0" rIns="0" bIns="0" rtlCol="0" anchor="t"/>
           <a:lstStyle/>
           <a:p>
-            <a:pPr algn="l" indent="0" marL="0">
+            <a:pPr marL="0" indent="0" algn="l">
               <a:buNone/>
             </a:pPr>
             <a:r>
@@ -17711,6 +19142,13 @@
           </a:solidFill>
           <a:ln/>
         </p:spPr>
+        <p:txBody>
+          <a:bodyPr/>
+          <a:lstStyle/>
+          <a:p>
+            <a:endParaRPr lang="fr-FR"/>
+          </a:p>
+        </p:txBody>
       </p:sp>
       <p:sp>
         <p:nvSpPr>
@@ -17733,7 +19171,7 @@
           <a:bodyPr wrap="square" lIns="0" tIns="0" rIns="0" bIns="0" rtlCol="0" anchor="t"/>
           <a:lstStyle/>
           <a:p>
-            <a:pPr algn="l" indent="0" marL="0">
+            <a:pPr marL="0" indent="0" algn="l">
               <a:buNone/>
             </a:pPr>
             <a:r>
@@ -17775,17 +19213,24 @@
             <a:prstDash val="solid"/>
           </a:ln>
         </p:spPr>
+        <p:txBody>
+          <a:bodyPr/>
+          <a:lstStyle/>
+          <a:p>
+            <a:endParaRPr lang="fr-FR"/>
+          </a:p>
+        </p:txBody>
       </p:sp>
       <p:pic>
         <p:nvPicPr>
-          <p:cNvPr id="13" name="Image 0" descr="uc.png">    </p:cNvPr>
+          <p:cNvPr id="13" name="Image 0" descr="uc.png"/>
           <p:cNvPicPr>
             <a:picLocks noChangeAspect="1"/>
           </p:cNvPicPr>
           <p:nvPr/>
         </p:nvPicPr>
         <p:blipFill>
-          <a:blip r:embed="rId1"/>
+          <a:blip r:embed="rId3"/>
           <a:stretch>
             <a:fillRect/>
           </a:stretch>
@@ -17821,7 +19266,7 @@
           <a:bodyPr wrap="square" lIns="0" tIns="0" rIns="0" bIns="0" rtlCol="0" anchor="ctr"/>
           <a:lstStyle/>
           <a:p>
-            <a:pPr algn="l" indent="0" marL="0">
+            <a:pPr marL="0" indent="0" algn="l">
               <a:buNone/>
             </a:pPr>
             <a:r>
@@ -17860,7 +19305,7 @@
           <a:bodyPr wrap="square" lIns="0" tIns="0" rIns="0" bIns="0" rtlCol="0" anchor="ctr"/>
           <a:lstStyle/>
           <a:p>
-            <a:pPr algn="r" indent="0" marL="0">
+            <a:pPr marL="0" indent="0" algn="r">
               <a:buNone/>
             </a:pPr>
             <a:r>
@@ -17894,6 +19339,7 @@
         <a:solidFill>
           <a:srgbClr val="1A1A24"/>
         </a:solidFill>
+        <a:effectLst/>
       </p:bgPr>
     </p:bg>
     <p:spTree>
@@ -17931,11 +19377,11 @@
           <a:bodyPr wrap="square" lIns="0" tIns="0" rIns="0" bIns="0" rtlCol="0" anchor="ctr"/>
           <a:lstStyle/>
           <a:p>
-            <a:pPr algn="l" indent="0" marL="0">
-              <a:buNone/>
-            </a:pPr>
-            <a:r>
-              <a:rPr lang="en-US" sz="3200" b="1" spc="100" kern="0" dirty="0">
+            <a:pPr marL="0" indent="0" algn="l">
+              <a:buNone/>
+            </a:pPr>
+            <a:r>
+              <a:rPr lang="en-US" sz="3200" b="1" kern="0" spc="100" dirty="0">
                 <a:solidFill>
                   <a:srgbClr val="FFFFFF"/>
                 </a:solidFill>
@@ -17968,6 +19414,13 @@
           </a:solidFill>
           <a:ln/>
         </p:spPr>
+        <p:txBody>
+          <a:bodyPr/>
+          <a:lstStyle/>
+          <a:p>
+            <a:endParaRPr lang="fr-FR"/>
+          </a:p>
+        </p:txBody>
       </p:sp>
       <p:sp>
         <p:nvSpPr>
@@ -17988,6 +19441,13 @@
           </a:solidFill>
           <a:ln/>
         </p:spPr>
+        <p:txBody>
+          <a:bodyPr/>
+          <a:lstStyle/>
+          <a:p>
+            <a:endParaRPr lang="fr-FR"/>
+          </a:p>
+        </p:txBody>
       </p:sp>
       <p:sp>
         <p:nvSpPr>
@@ -18010,7 +19470,7 @@
           <a:bodyPr wrap="square" lIns="0" tIns="0" rIns="0" bIns="0" rtlCol="0" anchor="t"/>
           <a:lstStyle/>
           <a:p>
-            <a:pPr algn="l" indent="0" marL="0">
+            <a:pPr marL="0" indent="0" algn="l">
               <a:buNone/>
             </a:pPr>
             <a:r>
@@ -18047,6 +19507,13 @@
           </a:solidFill>
           <a:ln/>
         </p:spPr>
+        <p:txBody>
+          <a:bodyPr/>
+          <a:lstStyle/>
+          <a:p>
+            <a:endParaRPr lang="fr-FR"/>
+          </a:p>
+        </p:txBody>
       </p:sp>
       <p:sp>
         <p:nvSpPr>
@@ -18069,7 +19536,7 @@
           <a:bodyPr wrap="square" lIns="0" tIns="0" rIns="0" bIns="0" rtlCol="0" anchor="t"/>
           <a:lstStyle/>
           <a:p>
-            <a:pPr algn="l" indent="0" marL="0">
+            <a:pPr marL="0" indent="0" algn="l">
               <a:buNone/>
             </a:pPr>
             <a:r>
@@ -18106,6 +19573,13 @@
           </a:solidFill>
           <a:ln/>
         </p:spPr>
+        <p:txBody>
+          <a:bodyPr/>
+          <a:lstStyle/>
+          <a:p>
+            <a:endParaRPr lang="fr-FR"/>
+          </a:p>
+        </p:txBody>
       </p:sp>
       <p:sp>
         <p:nvSpPr>
@@ -18128,7 +19602,7 @@
           <a:bodyPr wrap="square" lIns="0" tIns="0" rIns="0" bIns="0" rtlCol="0" anchor="t"/>
           <a:lstStyle/>
           <a:p>
-            <a:pPr algn="l" indent="0" marL="0">
+            <a:pPr marL="0" indent="0" algn="l">
               <a:buNone/>
             </a:pPr>
             <a:r>
@@ -18165,6 +19639,13 @@
           </a:solidFill>
           <a:ln/>
         </p:spPr>
+        <p:txBody>
+          <a:bodyPr/>
+          <a:lstStyle/>
+          <a:p>
+            <a:endParaRPr lang="fr-FR"/>
+          </a:p>
+        </p:txBody>
       </p:sp>
       <p:sp>
         <p:nvSpPr>
@@ -18187,7 +19668,7 @@
           <a:bodyPr wrap="square" lIns="0" tIns="0" rIns="0" bIns="0" rtlCol="0" anchor="t"/>
           <a:lstStyle/>
           <a:p>
-            <a:pPr algn="l" indent="0" marL="0">
+            <a:pPr marL="0" indent="0" algn="l">
               <a:buNone/>
             </a:pPr>
             <a:r>
@@ -18229,17 +19710,24 @@
             <a:prstDash val="solid"/>
           </a:ln>
         </p:spPr>
+        <p:txBody>
+          <a:bodyPr/>
+          <a:lstStyle/>
+          <a:p>
+            <a:endParaRPr lang="fr-FR"/>
+          </a:p>
+        </p:txBody>
       </p:sp>
       <p:pic>
         <p:nvPicPr>
-          <p:cNvPr id="13" name="Image 0" descr="zoning.png">    </p:cNvPr>
+          <p:cNvPr id="13" name="Image 0" descr="zoning.png"/>
           <p:cNvPicPr>
             <a:picLocks noChangeAspect="1"/>
           </p:cNvPicPr>
           <p:nvPr/>
         </p:nvPicPr>
         <p:blipFill>
-          <a:blip r:embed="rId1"/>
+          <a:blip r:embed="rId3"/>
           <a:stretch>
             <a:fillRect/>
           </a:stretch>
@@ -18275,7 +19763,7 @@
           <a:bodyPr wrap="square" lIns="0" tIns="0" rIns="0" bIns="0" rtlCol="0" anchor="ctr"/>
           <a:lstStyle/>
           <a:p>
-            <a:pPr algn="ctr" indent="0" marL="0">
+            <a:pPr marL="0" indent="0" algn="ctr">
               <a:buNone/>
             </a:pPr>
             <a:r>
@@ -18317,17 +19805,24 @@
             <a:prstDash val="solid"/>
           </a:ln>
         </p:spPr>
+        <p:txBody>
+          <a:bodyPr/>
+          <a:lstStyle/>
+          <a:p>
+            <a:endParaRPr lang="fr-FR"/>
+          </a:p>
+        </p:txBody>
       </p:sp>
       <p:pic>
         <p:nvPicPr>
-          <p:cNvPr id="16" name="Image 1" descr="wireframe.png">    </p:cNvPr>
+          <p:cNvPr id="16" name="Image 1" descr="wireframe.png"/>
           <p:cNvPicPr>
             <a:picLocks noChangeAspect="1"/>
           </p:cNvPicPr>
           <p:nvPr/>
         </p:nvPicPr>
         <p:blipFill>
-          <a:blip r:embed="rId2"/>
+          <a:blip r:embed="rId4"/>
           <a:stretch>
             <a:fillRect/>
           </a:stretch>
@@ -18363,7 +19858,7 @@
           <a:bodyPr wrap="square" lIns="0" tIns="0" rIns="0" bIns="0" rtlCol="0" anchor="ctr"/>
           <a:lstStyle/>
           <a:p>
-            <a:pPr algn="ctr" indent="0" marL="0">
+            <a:pPr marL="0" indent="0" algn="ctr">
               <a:buNone/>
             </a:pPr>
             <a:r>
@@ -18402,7 +19897,7 @@
           <a:bodyPr wrap="square" lIns="0" tIns="0" rIns="0" bIns="0" rtlCol="0" anchor="ctr"/>
           <a:lstStyle/>
           <a:p>
-            <a:pPr algn="l" indent="0" marL="0">
+            <a:pPr marL="0" indent="0" algn="l">
               <a:buNone/>
             </a:pPr>
             <a:r>
@@ -18441,7 +19936,7 @@
           <a:bodyPr wrap="square" lIns="0" tIns="0" rIns="0" bIns="0" rtlCol="0" anchor="ctr"/>
           <a:lstStyle/>
           <a:p>
-            <a:pPr algn="r" indent="0" marL="0">
+            <a:pPr marL="0" indent="0" algn="r">
               <a:buNone/>
             </a:pPr>
             <a:r>
@@ -18760,4 +20255,319 @@
     </a:ext>
   </a:extLst>
 </a:theme>
+</file>
+
+<file path=ppt/theme/theme2.xml><?xml version="1.0" encoding="utf-8"?>
+<a:theme xmlns:a="http://schemas.openxmlformats.org/drawingml/2006/main" name="Thème Office">
+  <a:themeElements>
+    <a:clrScheme name="Office">
+      <a:dk1>
+        <a:sysClr val="windowText" lastClr="000000"/>
+      </a:dk1>
+      <a:lt1>
+        <a:sysClr val="window" lastClr="FFFFFF"/>
+      </a:lt1>
+      <a:dk2>
+        <a:srgbClr val="0E2841"/>
+      </a:dk2>
+      <a:lt2>
+        <a:srgbClr val="E8E8E8"/>
+      </a:lt2>
+      <a:accent1>
+        <a:srgbClr val="156082"/>
+      </a:accent1>
+      <a:accent2>
+        <a:srgbClr val="E97132"/>
+      </a:accent2>
+      <a:accent3>
+        <a:srgbClr val="196B24"/>
+      </a:accent3>
+      <a:accent4>
+        <a:srgbClr val="0F9ED5"/>
+      </a:accent4>
+      <a:accent5>
+        <a:srgbClr val="A02B93"/>
+      </a:accent5>
+      <a:accent6>
+        <a:srgbClr val="4EA72E"/>
+      </a:accent6>
+      <a:hlink>
+        <a:srgbClr val="467886"/>
+      </a:hlink>
+      <a:folHlink>
+        <a:srgbClr val="96607D"/>
+      </a:folHlink>
+    </a:clrScheme>
+    <a:fontScheme name="Office">
+      <a:majorFont>
+        <a:latin typeface="Aptos Display" panose="02110004020202020204"/>
+        <a:ea typeface=""/>
+        <a:cs typeface=""/>
+        <a:font script="Jpan" typeface="游ゴシック Light"/>
+        <a:font script="Hang" typeface="맑은 고딕"/>
+        <a:font script="Hans" typeface="等线 Light"/>
+        <a:font script="Hant" typeface="新細明體"/>
+        <a:font script="Arab" typeface="Times New Roman"/>
+        <a:font script="Hebr" typeface="Times New Roman"/>
+        <a:font script="Thai" typeface="Angsana New"/>
+        <a:font script="Ethi" typeface="Nyala"/>
+        <a:font script="Beng" typeface="Vrinda"/>
+        <a:font script="Gujr" typeface="Shruti"/>
+        <a:font script="Khmr" typeface="MoolBoran"/>
+        <a:font script="Knda" typeface="Tunga"/>
+        <a:font script="Guru" typeface="Raavi"/>
+        <a:font script="Cans" typeface="Euphemia"/>
+        <a:font script="Cher" typeface="Plantagenet Cherokee"/>
+        <a:font script="Yiii" typeface="Microsoft Yi Baiti"/>
+        <a:font script="Tibt" typeface="Microsoft Himalaya"/>
+        <a:font script="Thaa" typeface="MV Boli"/>
+        <a:font script="Deva" typeface="Mangal"/>
+        <a:font script="Telu" typeface="Gautami"/>
+        <a:font script="Taml" typeface="Latha"/>
+        <a:font script="Syrc" typeface="Estrangelo Edessa"/>
+        <a:font script="Orya" typeface="Kalinga"/>
+        <a:font script="Mlym" typeface="Kartika"/>
+        <a:font script="Laoo" typeface="DokChampa"/>
+        <a:font script="Sinh" typeface="Iskoola Pota"/>
+        <a:font script="Mong" typeface="Mongolian Baiti"/>
+        <a:font script="Viet" typeface="Times New Roman"/>
+        <a:font script="Uigh" typeface="Microsoft Uighur"/>
+        <a:font script="Geor" typeface="Sylfaen"/>
+        <a:font script="Armn" typeface="Arial"/>
+        <a:font script="Bugi" typeface="Leelawadee UI"/>
+        <a:font script="Bopo" typeface="Microsoft JhengHei"/>
+        <a:font script="Java" typeface="Javanese Text"/>
+        <a:font script="Lisu" typeface="Segoe UI"/>
+        <a:font script="Mymr" typeface="Myanmar Text"/>
+        <a:font script="Nkoo" typeface="Ebrima"/>
+        <a:font script="Olck" typeface="Nirmala UI"/>
+        <a:font script="Osma" typeface="Ebrima"/>
+        <a:font script="Phag" typeface="Phagspa"/>
+        <a:font script="Syrn" typeface="Estrangelo Edessa"/>
+        <a:font script="Syrj" typeface="Estrangelo Edessa"/>
+        <a:font script="Syre" typeface="Estrangelo Edessa"/>
+        <a:font script="Sora" typeface="Nirmala UI"/>
+        <a:font script="Tale" typeface="Microsoft Tai Le"/>
+        <a:font script="Talu" typeface="Microsoft New Tai Lue"/>
+        <a:font script="Tfng" typeface="Ebrima"/>
+      </a:majorFont>
+      <a:minorFont>
+        <a:latin typeface="Aptos" panose="02110004020202020204"/>
+        <a:ea typeface=""/>
+        <a:cs typeface=""/>
+        <a:font script="Jpan" typeface="游ゴシック"/>
+        <a:font script="Hang" typeface="맑은 고딕"/>
+        <a:font script="Hans" typeface="等线"/>
+        <a:font script="Hant" typeface="新細明體"/>
+        <a:font script="Arab" typeface="Arial"/>
+        <a:font script="Hebr" typeface="Arial"/>
+        <a:font script="Thai" typeface="Cordia New"/>
+        <a:font script="Ethi" typeface="Nyala"/>
+        <a:font script="Beng" typeface="Vrinda"/>
+        <a:font script="Gujr" typeface="Shruti"/>
+        <a:font script="Khmr" typeface="DaunPenh"/>
+        <a:font script="Knda" typeface="Tunga"/>
+        <a:font script="Guru" typeface="Raavi"/>
+        <a:font script="Cans" typeface="Euphemia"/>
+        <a:font script="Cher" typeface="Plantagenet Cherokee"/>
+        <a:font script="Yiii" typeface="Microsoft Yi Baiti"/>
+        <a:font script="Tibt" typeface="Microsoft Himalaya"/>
+        <a:font script="Thaa" typeface="MV Boli"/>
+        <a:font script="Deva" typeface="Mangal"/>
+        <a:font script="Telu" typeface="Gautami"/>
+        <a:font script="Taml" typeface="Latha"/>
+        <a:font script="Syrc" typeface="Estrangelo Edessa"/>
+        <a:font script="Orya" typeface="Kalinga"/>
+        <a:font script="Mlym" typeface="Kartika"/>
+        <a:font script="Laoo" typeface="DokChampa"/>
+        <a:font script="Sinh" typeface="Iskoola Pota"/>
+        <a:font script="Mong" typeface="Mongolian Baiti"/>
+        <a:font script="Viet" typeface="Arial"/>
+        <a:font script="Uigh" typeface="Microsoft Uighur"/>
+        <a:font script="Geor" typeface="Sylfaen"/>
+        <a:font script="Armn" typeface="Arial"/>
+        <a:font script="Bugi" typeface="Leelawadee UI"/>
+        <a:font script="Bopo" typeface="Microsoft JhengHei"/>
+        <a:font script="Java" typeface="Javanese Text"/>
+        <a:font script="Lisu" typeface="Segoe UI"/>
+        <a:font script="Mymr" typeface="Myanmar Text"/>
+        <a:font script="Nkoo" typeface="Ebrima"/>
+        <a:font script="Olck" typeface="Nirmala UI"/>
+        <a:font script="Osma" typeface="Ebrima"/>
+        <a:font script="Phag" typeface="Phagspa"/>
+        <a:font script="Syrn" typeface="Estrangelo Edessa"/>
+        <a:font script="Syrj" typeface="Estrangelo Edessa"/>
+        <a:font script="Syre" typeface="Estrangelo Edessa"/>
+        <a:font script="Sora" typeface="Nirmala UI"/>
+        <a:font script="Tale" typeface="Microsoft Tai Le"/>
+        <a:font script="Talu" typeface="Microsoft New Tai Lue"/>
+        <a:font script="Tfng" typeface="Ebrima"/>
+      </a:minorFont>
+    </a:fontScheme>
+    <a:fmtScheme name="Office">
+      <a:fillStyleLst>
+        <a:solidFill>
+          <a:schemeClr val="phClr"/>
+        </a:solidFill>
+        <a:gradFill rotWithShape="1">
+          <a:gsLst>
+            <a:gs pos="0">
+              <a:schemeClr val="phClr">
+                <a:lumMod val="110000"/>
+                <a:satMod val="105000"/>
+                <a:tint val="67000"/>
+              </a:schemeClr>
+            </a:gs>
+            <a:gs pos="50000">
+              <a:schemeClr val="phClr">
+                <a:lumMod val="105000"/>
+                <a:satMod val="103000"/>
+                <a:tint val="73000"/>
+              </a:schemeClr>
+            </a:gs>
+            <a:gs pos="100000">
+              <a:schemeClr val="phClr">
+                <a:lumMod val="105000"/>
+                <a:satMod val="109000"/>
+                <a:tint val="81000"/>
+              </a:schemeClr>
+            </a:gs>
+          </a:gsLst>
+          <a:lin ang="5400000" scaled="0"/>
+        </a:gradFill>
+        <a:gradFill rotWithShape="1">
+          <a:gsLst>
+            <a:gs pos="0">
+              <a:schemeClr val="phClr">
+                <a:satMod val="103000"/>
+                <a:lumMod val="102000"/>
+                <a:tint val="94000"/>
+              </a:schemeClr>
+            </a:gs>
+            <a:gs pos="50000">
+              <a:schemeClr val="phClr">
+                <a:satMod val="110000"/>
+                <a:lumMod val="100000"/>
+                <a:shade val="100000"/>
+              </a:schemeClr>
+            </a:gs>
+            <a:gs pos="100000">
+              <a:schemeClr val="phClr">
+                <a:lumMod val="99000"/>
+                <a:satMod val="120000"/>
+                <a:shade val="78000"/>
+              </a:schemeClr>
+            </a:gs>
+          </a:gsLst>
+          <a:lin ang="5400000" scaled="0"/>
+        </a:gradFill>
+      </a:fillStyleLst>
+      <a:lnStyleLst>
+        <a:ln w="12700" cap="flat" cmpd="sng" algn="ctr">
+          <a:solidFill>
+            <a:schemeClr val="phClr"/>
+          </a:solidFill>
+          <a:prstDash val="solid"/>
+          <a:miter lim="800000"/>
+        </a:ln>
+        <a:ln w="19050" cap="flat" cmpd="sng" algn="ctr">
+          <a:solidFill>
+            <a:schemeClr val="phClr"/>
+          </a:solidFill>
+          <a:prstDash val="solid"/>
+          <a:miter lim="800000"/>
+        </a:ln>
+        <a:ln w="25400" cap="flat" cmpd="sng" algn="ctr">
+          <a:solidFill>
+            <a:schemeClr val="phClr"/>
+          </a:solidFill>
+          <a:prstDash val="solid"/>
+          <a:miter lim="800000"/>
+        </a:ln>
+      </a:lnStyleLst>
+      <a:effectStyleLst>
+        <a:effectStyle>
+          <a:effectLst/>
+        </a:effectStyle>
+        <a:effectStyle>
+          <a:effectLst/>
+        </a:effectStyle>
+        <a:effectStyle>
+          <a:effectLst>
+            <a:outerShdw blurRad="57150" dist="19050" dir="5400000" algn="ctr" rotWithShape="0">
+              <a:srgbClr val="000000">
+                <a:alpha val="63000"/>
+              </a:srgbClr>
+            </a:outerShdw>
+          </a:effectLst>
+        </a:effectStyle>
+      </a:effectStyleLst>
+      <a:bgFillStyleLst>
+        <a:solidFill>
+          <a:schemeClr val="phClr"/>
+        </a:solidFill>
+        <a:solidFill>
+          <a:schemeClr val="phClr">
+            <a:tint val="95000"/>
+            <a:satMod val="170000"/>
+          </a:schemeClr>
+        </a:solidFill>
+        <a:gradFill rotWithShape="1">
+          <a:gsLst>
+            <a:gs pos="0">
+              <a:schemeClr val="phClr">
+                <a:tint val="93000"/>
+                <a:satMod val="150000"/>
+                <a:shade val="98000"/>
+                <a:lumMod val="102000"/>
+              </a:schemeClr>
+            </a:gs>
+            <a:gs pos="50000">
+              <a:schemeClr val="phClr">
+                <a:tint val="98000"/>
+                <a:satMod val="130000"/>
+                <a:shade val="90000"/>
+                <a:lumMod val="103000"/>
+              </a:schemeClr>
+            </a:gs>
+            <a:gs pos="100000">
+              <a:schemeClr val="phClr">
+                <a:shade val="63000"/>
+                <a:satMod val="120000"/>
+              </a:schemeClr>
+            </a:gs>
+          </a:gsLst>
+          <a:lin ang="5400000" scaled="0"/>
+        </a:gradFill>
+      </a:bgFillStyleLst>
+    </a:fmtScheme>
+  </a:themeElements>
+  <a:objectDefaults>
+    <a:lnDef>
+      <a:spPr/>
+      <a:bodyPr/>
+      <a:lstStyle/>
+      <a:style>
+        <a:lnRef idx="2">
+          <a:schemeClr val="accent1"/>
+        </a:lnRef>
+        <a:fillRef idx="0">
+          <a:schemeClr val="accent1"/>
+        </a:fillRef>
+        <a:effectRef idx="1">
+          <a:schemeClr val="accent1"/>
+        </a:effectRef>
+        <a:fontRef idx="minor">
+          <a:schemeClr val="tx1"/>
+        </a:fontRef>
+      </a:style>
+    </a:lnDef>
+  </a:objectDefaults>
+  <a:extraClrSchemeLst/>
+  <a:extLst>
+    <a:ext uri="{05A4C25C-085E-4340-85A3-A5531E510DB2}">
+      <thm15:themeFamily xmlns:thm15="http://schemas.microsoft.com/office/thememl/2012/main" name="Office Theme" id="{2E142A2C-CD16-42D6-873A-C26D2A0506FA}" vid="{1BDDFF52-6CD6-40A5-AB3C-68EB2F1E4D0A}"/>
+    </a:ext>
+  </a:extLst>
+</a:theme>
 </file>